--- a/GitHub_教學簡報.pptx
+++ b/GitHub_教學簡報.pptx
@@ -3108,7 +3108,7 @@
     <p:bg>
       <p:bgPr>
         <a:solidFill>
-          <a:srgbClr val="0D1117"/>
+          <a:srgbClr val="F6F8FA"/>
         </a:solidFill>
         <a:effectLst/>
       </p:bgPr>
@@ -3148,7 +3148,7 @@
               </a:spcAft>
               <a:defRPr sz="4400" b="1">
                 <a:solidFill>
-                  <a:srgbClr val="FFFFFF"/>
+                  <a:srgbClr val="1F2328"/>
                 </a:solidFill>
                 <a:latin typeface="Microsoft JhengHei"/>
               </a:defRPr>
@@ -3161,7 +3161,7 @@
             <a:pPr>
               <a:defRPr sz="2000">
                 <a:solidFill>
-                  <a:srgbClr val="58A6FF"/>
+                  <a:srgbClr val="0366D6"/>
                 </a:solidFill>
                 <a:latin typeface="Microsoft JhengHei"/>
               </a:defRPr>
@@ -3210,7 +3210,7 @@
     <p:bg>
       <p:bgPr>
         <a:solidFill>
-          <a:srgbClr val="0D1117"/>
+          <a:srgbClr val="F6F8FA"/>
         </a:solidFill>
         <a:effectLst/>
       </p:bgPr>
@@ -3224,14 +3224,59 @@
       <p:grpSpPr/>
       <p:sp>
         <p:nvSpPr>
-          <p:cNvPr id="2" name="TextBox 1"/>
+          <p:cNvPr id="2" name="Rectangle 1"/>
+          <p:cNvSpPr/>
+          <p:nvPr/>
+        </p:nvSpPr>
+        <p:spPr>
+          <a:xfrm>
+            <a:off x="731520" y="384048"/>
+            <a:ext cx="91440" cy="502920"/>
+          </a:xfrm>
+          <a:prstGeom prst="rect">
+            <a:avLst/>
+          </a:prstGeom>
+          <a:solidFill>
+            <a:srgbClr val="0366D6"/>
+          </a:solidFill>
+          <a:ln>
+            <a:solidFill>
+              <a:srgbClr val="0366D6"/>
+            </a:solidFill>
+          </a:ln>
+        </p:spPr>
+        <p:style>
+          <a:lnRef idx="1">
+            <a:schemeClr val="accent1"/>
+          </a:lnRef>
+          <a:fillRef idx="3">
+            <a:schemeClr val="accent1"/>
+          </a:fillRef>
+          <a:effectRef idx="2">
+            <a:schemeClr val="accent1"/>
+          </a:effectRef>
+          <a:fontRef idx="minor">
+            <a:schemeClr val="lt1"/>
+          </a:fontRef>
+        </p:style>
+        <p:txBody>
+          <a:bodyPr rtlCol="0" anchor="ctr"/>
+          <a:lstStyle/>
+          <a:p>
+            <a:pPr algn="ctr"/>
+          </a:p>
+        </p:txBody>
+      </p:sp>
+      <p:sp>
+        <p:nvSpPr>
+          <p:cNvPr id="3" name="TextBox 2"/>
           <p:cNvSpPr txBox="1"/>
           <p:nvPr/>
         </p:nvSpPr>
         <p:spPr>
           <a:xfrm>
-            <a:off x="731520" y="365760"/>
-            <a:ext cx="10725912" cy="731520"/>
+            <a:off x="960120" y="320040"/>
+            <a:ext cx="10497312" cy="731520"/>
           </a:xfrm>
           <a:prstGeom prst="rect">
             <a:avLst/>
@@ -3247,7 +3292,7 @@
             <a:pPr>
               <a:defRPr sz="3600" b="1">
                 <a:solidFill>
-                  <a:srgbClr val="58A6FF"/>
+                  <a:srgbClr val="0366D6"/>
                 </a:solidFill>
                 <a:latin typeface="Microsoft JhengHei"/>
               </a:defRPr>
@@ -3260,7 +3305,7 @@
       </p:sp>
       <p:sp>
         <p:nvSpPr>
-          <p:cNvPr id="3" name="Rectangle 2"/>
+          <p:cNvPr id="4" name="Rectangle 3"/>
           <p:cNvSpPr/>
           <p:nvPr/>
         </p:nvSpPr>
@@ -3273,10 +3318,12 @@
             <a:avLst/>
           </a:prstGeom>
           <a:solidFill>
-            <a:srgbClr val="161B22"/>
+            <a:srgbClr val="FFFFFF"/>
           </a:solidFill>
-          <a:ln>
-            <a:noFill/>
+          <a:ln w="19050">
+            <a:solidFill>
+              <a:srgbClr val="DADEE5"/>
+            </a:solidFill>
           </a:ln>
         </p:spPr>
         <p:style>
@@ -3303,7 +3350,7 @@
       </p:sp>
       <p:sp>
         <p:nvSpPr>
-          <p:cNvPr id="4" name="TextBox 3"/>
+          <p:cNvPr id="5" name="TextBox 4"/>
           <p:cNvSpPr txBox="1"/>
           <p:nvPr/>
         </p:nvSpPr>
@@ -3318,152 +3365,305 @@
           <a:noFill/>
         </p:spPr>
         <p:txBody>
-          <a:bodyPr wrap="square" lIns="0" tIns="0" rIns="0" bIns="0">
+          <a:bodyPr wrap="square" lIns="228600" rIns="228600" tIns="228600" bIns="228600">
             <a:spAutoFit/>
           </a:bodyPr>
           <a:lstStyle/>
           <a:p>
             <a:pPr>
-              <a:spcAft>
-                <a:spcPts val="1000"/>
-              </a:spcAft>
-              <a:defRPr sz="2000">
-                <a:solidFill>
-                  <a:srgbClr val="FFFFFF"/>
-                </a:solidFill>
-                <a:latin typeface="Microsoft JhengHei"/>
-              </a:defRPr>
-            </a:pPr>
-            <a:r>
-              <a:t>好的 Commit 訊息是專案維護的關鍵，建議遵守 **Conventional Commits** 規範：</a:t>
+              <a:lnSpc>
+                <a:spcPct val="125000"/>
+              </a:lnSpc>
+              <a:spcAft>
+                <a:spcPts val="600"/>
+              </a:spcAft>
+              <a:defRPr>
+                <a:latin typeface="Microsoft JhengHei"/>
+              </a:defRPr>
+            </a:pPr>
+            <a:r>
+              <a:rPr sz="2000">
+                <a:solidFill>
+                  <a:srgbClr val="1F2328"/>
+                </a:solidFill>
+                <a:latin typeface="Microsoft JhengHei"/>
+              </a:rPr>
+              <a:t>好的 Commit 訊息是專案維護的關鍵，建議遵守 </a:t>
+            </a:r>
+            <a:r>
+              <a:rPr sz="2000" b="1">
+                <a:solidFill>
+                  <a:srgbClr val="1F2328"/>
+                </a:solidFill>
+                <a:latin typeface="Microsoft JhengHei"/>
+              </a:rPr>
+              <a:t>Conventional Commits</a:t>
+            </a:r>
+            <a:r>
+              <a:rPr sz="2000">
+                <a:solidFill>
+                  <a:srgbClr val="1F2328"/>
+                </a:solidFill>
+                <a:latin typeface="Microsoft JhengHei"/>
+              </a:rPr>
+              <a:t> 規範：</a:t>
             </a:r>
           </a:p>
           <a:p>
             <a:pPr>
-              <a:spcAft>
-                <a:spcPts val="1000"/>
-              </a:spcAft>
-              <a:defRPr sz="2000">
-                <a:solidFill>
-                  <a:srgbClr val="FFFFFF"/>
-                </a:solidFill>
-                <a:latin typeface="Microsoft JhengHei"/>
-              </a:defRPr>
-            </a:pPr>
-            <a:r>
-              <a:t>格式：`&lt;type&gt;: &lt;description&gt;` (類型: 簡短說明)</a:t>
+              <a:lnSpc>
+                <a:spcPct val="125000"/>
+              </a:lnSpc>
+              <a:spcAft>
+                <a:spcPts val="600"/>
+              </a:spcAft>
+              <a:defRPr>
+                <a:latin typeface="Microsoft JhengHei"/>
+              </a:defRPr>
+            </a:pPr>
+            <a:r>
+              <a:rPr sz="2000">
+                <a:solidFill>
+                  <a:srgbClr val="1F2328"/>
+                </a:solidFill>
+                <a:latin typeface="Microsoft JhengHei"/>
+              </a:rPr>
+              <a:t>格式：</a:t>
+            </a:r>
+            <a:r>
+              <a:rPr sz="2000" b="1">
+                <a:solidFill>
+                  <a:srgbClr val="F05032"/>
+                </a:solidFill>
+                <a:latin typeface="Consolas"/>
+              </a:rPr>
+              <a:t>&lt;type&gt;: &lt;description&gt;</a:t>
+            </a:r>
+            <a:r>
+              <a:rPr sz="2000">
+                <a:solidFill>
+                  <a:srgbClr val="1F2328"/>
+                </a:solidFill>
+                <a:latin typeface="Microsoft JhengHei"/>
+              </a:rPr>
+              <a:t> (類型: 簡短說明)</a:t>
             </a:r>
           </a:p>
           <a:p>
             <a:pPr>
-              <a:spcAft>
-                <a:spcPts val="1000"/>
-              </a:spcAft>
-              <a:defRPr sz="2000">
-                <a:solidFill>
-                  <a:srgbClr val="FFFFFF"/>
-                </a:solidFill>
-                <a:latin typeface="Microsoft JhengHei"/>
-              </a:defRPr>
-            </a:pPr>
-            <a:r>
-              <a:t>**常用類型 (Type)**：</a:t>
+              <a:lnSpc>
+                <a:spcPct val="125000"/>
+              </a:lnSpc>
+              <a:spcAft>
+                <a:spcPts val="600"/>
+              </a:spcAft>
+              <a:defRPr>
+                <a:latin typeface="Microsoft JhengHei"/>
+              </a:defRPr>
+            </a:pPr>
+            <a:r>
+              <a:rPr sz="2000" b="1">
+                <a:solidFill>
+                  <a:srgbClr val="1F2328"/>
+                </a:solidFill>
+                <a:latin typeface="Microsoft JhengHei"/>
+              </a:rPr>
+              <a:t>常用類型 (Type)</a:t>
+            </a:r>
+            <a:r>
+              <a:rPr sz="2000">
+                <a:solidFill>
+                  <a:srgbClr val="1F2328"/>
+                </a:solidFill>
+                <a:latin typeface="Microsoft JhengHei"/>
+              </a:rPr>
+              <a:t>：</a:t>
             </a:r>
           </a:p>
           <a:p>
             <a:pPr lvl="1">
-              <a:spcAft>
-                <a:spcPts val="1000"/>
-              </a:spcAft>
-              <a:defRPr sz="1800">
-                <a:solidFill>
-                  <a:srgbClr val="FFFFFF"/>
-                </a:solidFill>
-                <a:latin typeface="Microsoft JhengHei"/>
-              </a:defRPr>
-            </a:pPr>
-            <a:r>
-              <a:t>`feat`: 新增功能 (Feature)</a:t>
+              <a:lnSpc>
+                <a:spcPct val="125000"/>
+              </a:lnSpc>
+              <a:spcAft>
+                <a:spcPts val="600"/>
+              </a:spcAft>
+              <a:defRPr>
+                <a:latin typeface="Microsoft JhengHei"/>
+              </a:defRPr>
+            </a:pPr>
+            <a:r>
+              <a:rPr sz="1800" b="1">
+                <a:solidFill>
+                  <a:srgbClr val="F05032"/>
+                </a:solidFill>
+                <a:latin typeface="Consolas"/>
+              </a:rPr>
+              <a:t>feat</a:t>
+            </a:r>
+            <a:r>
+              <a:rPr sz="1800">
+                <a:solidFill>
+                  <a:srgbClr val="1F2328"/>
+                </a:solidFill>
+                <a:latin typeface="Microsoft JhengHei"/>
+              </a:rPr>
+              <a:t>: 新增功能 (Feature)</a:t>
             </a:r>
           </a:p>
           <a:p>
             <a:pPr lvl="1">
-              <a:spcAft>
-                <a:spcPts val="1000"/>
-              </a:spcAft>
-              <a:defRPr sz="1800">
-                <a:solidFill>
-                  <a:srgbClr val="FFFFFF"/>
-                </a:solidFill>
-                <a:latin typeface="Microsoft JhengHei"/>
-              </a:defRPr>
-            </a:pPr>
-            <a:r>
-              <a:t>`fix`: 修正錯誤 (Bug Fix)</a:t>
+              <a:lnSpc>
+                <a:spcPct val="125000"/>
+              </a:lnSpc>
+              <a:spcAft>
+                <a:spcPts val="600"/>
+              </a:spcAft>
+              <a:defRPr>
+                <a:latin typeface="Microsoft JhengHei"/>
+              </a:defRPr>
+            </a:pPr>
+            <a:r>
+              <a:rPr sz="1800" b="1">
+                <a:solidFill>
+                  <a:srgbClr val="F05032"/>
+                </a:solidFill>
+                <a:latin typeface="Consolas"/>
+              </a:rPr>
+              <a:t>fix</a:t>
+            </a:r>
+            <a:r>
+              <a:rPr sz="1800">
+                <a:solidFill>
+                  <a:srgbClr val="1F2328"/>
+                </a:solidFill>
+                <a:latin typeface="Microsoft JhengHei"/>
+              </a:rPr>
+              <a:t>: 修正錯誤 (Bug Fix)</a:t>
             </a:r>
           </a:p>
           <a:p>
             <a:pPr lvl="1">
-              <a:spcAft>
-                <a:spcPts val="1000"/>
-              </a:spcAft>
-              <a:defRPr sz="1800">
-                <a:solidFill>
-                  <a:srgbClr val="FFFFFF"/>
-                </a:solidFill>
-                <a:latin typeface="Microsoft JhengHei"/>
-              </a:defRPr>
-            </a:pPr>
-            <a:r>
-              <a:t>`docs`: 修改文件或 README</a:t>
+              <a:lnSpc>
+                <a:spcPct val="125000"/>
+              </a:lnSpc>
+              <a:spcAft>
+                <a:spcPts val="600"/>
+              </a:spcAft>
+              <a:defRPr>
+                <a:latin typeface="Microsoft JhengHei"/>
+              </a:defRPr>
+            </a:pPr>
+            <a:r>
+              <a:rPr sz="1800" b="1">
+                <a:solidFill>
+                  <a:srgbClr val="F05032"/>
+                </a:solidFill>
+                <a:latin typeface="Consolas"/>
+              </a:rPr>
+              <a:t>docs</a:t>
+            </a:r>
+            <a:r>
+              <a:rPr sz="1800">
+                <a:solidFill>
+                  <a:srgbClr val="1F2328"/>
+                </a:solidFill>
+                <a:latin typeface="Microsoft JhengHei"/>
+              </a:rPr>
+              <a:t>: 修改文件或 README</a:t>
             </a:r>
           </a:p>
           <a:p>
             <a:pPr lvl="1">
-              <a:spcAft>
-                <a:spcPts val="1000"/>
-              </a:spcAft>
-              <a:defRPr sz="1800">
-                <a:solidFill>
-                  <a:srgbClr val="FFFFFF"/>
-                </a:solidFill>
-                <a:latin typeface="Microsoft JhengHei"/>
-              </a:defRPr>
-            </a:pPr>
-            <a:r>
-              <a:t>`style`: 程式碼格式調整 (空格、縮排等，不影響執行結果)</a:t>
+              <a:lnSpc>
+                <a:spcPct val="125000"/>
+              </a:lnSpc>
+              <a:spcAft>
+                <a:spcPts val="600"/>
+              </a:spcAft>
+              <a:defRPr>
+                <a:latin typeface="Microsoft JhengHei"/>
+              </a:defRPr>
+            </a:pPr>
+            <a:r>
+              <a:rPr sz="1800" b="1">
+                <a:solidFill>
+                  <a:srgbClr val="F05032"/>
+                </a:solidFill>
+                <a:latin typeface="Consolas"/>
+              </a:rPr>
+              <a:t>style</a:t>
+            </a:r>
+            <a:r>
+              <a:rPr sz="1800">
+                <a:solidFill>
+                  <a:srgbClr val="1F2328"/>
+                </a:solidFill>
+                <a:latin typeface="Microsoft JhengHei"/>
+              </a:rPr>
+              <a:t>: 程式碼格式調整 (空格、縮排等，不影響執行結果)</a:t>
             </a:r>
           </a:p>
           <a:p>
             <a:pPr lvl="1">
-              <a:spcAft>
-                <a:spcPts val="1000"/>
-              </a:spcAft>
-              <a:defRPr sz="1800">
-                <a:solidFill>
-                  <a:srgbClr val="FFFFFF"/>
-                </a:solidFill>
-                <a:latin typeface="Microsoft JhengHei"/>
-              </a:defRPr>
-            </a:pPr>
-            <a:r>
-              <a:t>`refactor`: 重構程式碼 (改寫邏輯，但功能不變)</a:t>
+              <a:lnSpc>
+                <a:spcPct val="125000"/>
+              </a:lnSpc>
+              <a:spcAft>
+                <a:spcPts val="600"/>
+              </a:spcAft>
+              <a:defRPr>
+                <a:latin typeface="Microsoft JhengHei"/>
+              </a:defRPr>
+            </a:pPr>
+            <a:r>
+              <a:rPr sz="1800" b="1">
+                <a:solidFill>
+                  <a:srgbClr val="F05032"/>
+                </a:solidFill>
+                <a:latin typeface="Consolas"/>
+              </a:rPr>
+              <a:t>refactor</a:t>
+            </a:r>
+            <a:r>
+              <a:rPr sz="1800">
+                <a:solidFill>
+                  <a:srgbClr val="1F2328"/>
+                </a:solidFill>
+                <a:latin typeface="Microsoft JhengHei"/>
+              </a:rPr>
+              <a:t>: 重構程式碼 (改寫邏輯，但功能不變)</a:t>
             </a:r>
           </a:p>
           <a:p>
             <a:pPr>
-              <a:spcAft>
-                <a:spcPts val="1000"/>
-              </a:spcAft>
-              <a:defRPr sz="2000">
-                <a:solidFill>
-                  <a:srgbClr val="FFFFFF"/>
-                </a:solidFill>
-                <a:latin typeface="Microsoft JhengHei"/>
-              </a:defRPr>
-            </a:pPr>
-            <a:r>
-              <a:t>好的範例：`feat: 整合 Google OAuth 登入功能`</a:t>
+              <a:lnSpc>
+                <a:spcPct val="125000"/>
+              </a:lnSpc>
+              <a:spcAft>
+                <a:spcPts val="600"/>
+              </a:spcAft>
+              <a:defRPr>
+                <a:latin typeface="Microsoft JhengHei"/>
+              </a:defRPr>
+            </a:pPr>
+            <a:r>
+              <a:rPr sz="2000">
+                <a:solidFill>
+                  <a:srgbClr val="1F2328"/>
+                </a:solidFill>
+                <a:latin typeface="Microsoft JhengHei"/>
+              </a:rPr>
+              <a:t>好的範例：</a:t>
+            </a:r>
+            <a:r>
+              <a:rPr sz="2000" b="1">
+                <a:solidFill>
+                  <a:srgbClr val="F05032"/>
+                </a:solidFill>
+                <a:latin typeface="Consolas"/>
+              </a:rPr>
+              <a:t>feat: 整合 Google OAuth 登入功能</a:t>
             </a:r>
           </a:p>
         </p:txBody>
@@ -3482,7 +3682,7 @@
     <p:bg>
       <p:bgPr>
         <a:solidFill>
-          <a:srgbClr val="0D1117"/>
+          <a:srgbClr val="F6F8FA"/>
         </a:solidFill>
         <a:effectLst/>
       </p:bgPr>
@@ -3496,14 +3696,59 @@
       <p:grpSpPr/>
       <p:sp>
         <p:nvSpPr>
-          <p:cNvPr id="2" name="TextBox 1"/>
+          <p:cNvPr id="2" name="Rectangle 1"/>
+          <p:cNvSpPr/>
+          <p:nvPr/>
+        </p:nvSpPr>
+        <p:spPr>
+          <a:xfrm>
+            <a:off x="731520" y="384048"/>
+            <a:ext cx="91440" cy="502920"/>
+          </a:xfrm>
+          <a:prstGeom prst="rect">
+            <a:avLst/>
+          </a:prstGeom>
+          <a:solidFill>
+            <a:srgbClr val="0366D6"/>
+          </a:solidFill>
+          <a:ln>
+            <a:solidFill>
+              <a:srgbClr val="0366D6"/>
+            </a:solidFill>
+          </a:ln>
+        </p:spPr>
+        <p:style>
+          <a:lnRef idx="1">
+            <a:schemeClr val="accent1"/>
+          </a:lnRef>
+          <a:fillRef idx="3">
+            <a:schemeClr val="accent1"/>
+          </a:fillRef>
+          <a:effectRef idx="2">
+            <a:schemeClr val="accent1"/>
+          </a:effectRef>
+          <a:fontRef idx="minor">
+            <a:schemeClr val="lt1"/>
+          </a:fontRef>
+        </p:style>
+        <p:txBody>
+          <a:bodyPr rtlCol="0" anchor="ctr"/>
+          <a:lstStyle/>
+          <a:p>
+            <a:pPr algn="ctr"/>
+          </a:p>
+        </p:txBody>
+      </p:sp>
+      <p:sp>
+        <p:nvSpPr>
+          <p:cNvPr id="3" name="TextBox 2"/>
           <p:cNvSpPr txBox="1"/>
           <p:nvPr/>
         </p:nvSpPr>
         <p:spPr>
           <a:xfrm>
-            <a:off x="731520" y="365760"/>
-            <a:ext cx="10725912" cy="731520"/>
+            <a:off x="960120" y="320040"/>
+            <a:ext cx="10497312" cy="731520"/>
           </a:xfrm>
           <a:prstGeom prst="rect">
             <a:avLst/>
@@ -3519,7 +3764,7 @@
             <a:pPr>
               <a:defRPr sz="3600" b="1">
                 <a:solidFill>
-                  <a:srgbClr val="58A6FF"/>
+                  <a:srgbClr val="0366D6"/>
                 </a:solidFill>
                 <a:latin typeface="Microsoft JhengHei"/>
               </a:defRPr>
@@ -3532,7 +3777,7 @@
       </p:sp>
       <p:sp>
         <p:nvSpPr>
-          <p:cNvPr id="3" name="Rectangle 2"/>
+          <p:cNvPr id="4" name="Rectangle 3"/>
           <p:cNvSpPr/>
           <p:nvPr/>
         </p:nvSpPr>
@@ -3545,10 +3790,12 @@
             <a:avLst/>
           </a:prstGeom>
           <a:solidFill>
-            <a:srgbClr val="161B22"/>
+            <a:srgbClr val="FFFFFF"/>
           </a:solidFill>
-          <a:ln>
-            <a:noFill/>
+          <a:ln w="19050">
+            <a:solidFill>
+              <a:srgbClr val="DADEE5"/>
+            </a:solidFill>
           </a:ln>
         </p:spPr>
         <p:style>
@@ -3575,7 +3822,7 @@
       </p:sp>
       <p:sp>
         <p:nvSpPr>
-          <p:cNvPr id="4" name="TextBox 3"/>
+          <p:cNvPr id="5" name="TextBox 4"/>
           <p:cNvSpPr txBox="1"/>
           <p:nvPr/>
         </p:nvSpPr>
@@ -3590,136 +3837,256 @@
           <a:noFill/>
         </p:spPr>
         <p:txBody>
-          <a:bodyPr wrap="square" lIns="0" tIns="0" rIns="0" bIns="0">
+          <a:bodyPr wrap="square" lIns="228600" rIns="228600" tIns="228600" bIns="228600">
             <a:spAutoFit/>
           </a:bodyPr>
           <a:lstStyle/>
           <a:p>
             <a:pPr>
-              <a:spcAft>
-                <a:spcPts val="1000"/>
-              </a:spcAft>
-              <a:defRPr sz="2000">
-                <a:solidFill>
-                  <a:srgbClr val="FFFFFF"/>
-                </a:solidFill>
-                <a:latin typeface="Microsoft JhengHei"/>
-              </a:defRPr>
-            </a:pPr>
-            <a:r>
-              <a:t>**`git log`：翻閱版本紀錄**</a:t>
+              <a:lnSpc>
+                <a:spcPct val="125000"/>
+              </a:lnSpc>
+              <a:spcAft>
+                <a:spcPts val="600"/>
+              </a:spcAft>
+              <a:defRPr>
+                <a:latin typeface="Microsoft JhengHei"/>
+              </a:defRPr>
+            </a:pPr>
+            <a:r>
+              <a:rPr sz="2000" b="1">
+                <a:solidFill>
+                  <a:srgbClr val="1F2328"/>
+                </a:solidFill>
+                <a:latin typeface="Microsoft JhengHei"/>
+              </a:rPr>
+              <a:t>`git log`：翻閱版本紀錄</a:t>
             </a:r>
           </a:p>
           <a:p>
             <a:pPr lvl="1">
-              <a:spcAft>
-                <a:spcPts val="1000"/>
-              </a:spcAft>
-              <a:defRPr sz="1800">
-                <a:solidFill>
-                  <a:srgbClr val="FFFFFF"/>
-                </a:solidFill>
-                <a:latin typeface="Microsoft JhengHei"/>
-              </a:defRPr>
-            </a:pPr>
-            <a:r>
+              <a:lnSpc>
+                <a:spcPct val="125000"/>
+              </a:lnSpc>
+              <a:spcAft>
+                <a:spcPts val="600"/>
+              </a:spcAft>
+              <a:defRPr>
+                <a:latin typeface="Microsoft JhengHei"/>
+              </a:defRPr>
+            </a:pPr>
+            <a:r>
+              <a:rPr sz="1800">
+                <a:solidFill>
+                  <a:srgbClr val="1F2328"/>
+                </a:solidFill>
+                <a:latin typeface="Microsoft JhengHei"/>
+              </a:rPr>
               <a:t>列出過去所有的 Commit 歷史、作者、日期與提交訊息</a:t>
             </a:r>
           </a:p>
           <a:p>
             <a:pPr lvl="1">
-              <a:spcAft>
-                <a:spcPts val="1000"/>
-              </a:spcAft>
-              <a:defRPr sz="1800">
-                <a:solidFill>
-                  <a:srgbClr val="FFFFFF"/>
-                </a:solidFill>
-                <a:latin typeface="Microsoft JhengHei"/>
-              </a:defRPr>
-            </a:pPr>
-            <a:r>
-              <a:t>`git log --oneline`: 精簡版歷史，一行顯示一筆提交</a:t>
+              <a:lnSpc>
+                <a:spcPct val="125000"/>
+              </a:lnSpc>
+              <a:spcAft>
+                <a:spcPts val="600"/>
+              </a:spcAft>
+              <a:defRPr>
+                <a:latin typeface="Microsoft JhengHei"/>
+              </a:defRPr>
+            </a:pPr>
+            <a:r>
+              <a:rPr sz="1800" b="1">
+                <a:solidFill>
+                  <a:srgbClr val="F05032"/>
+                </a:solidFill>
+                <a:latin typeface="Consolas"/>
+              </a:rPr>
+              <a:t>git log --oneline</a:t>
+            </a:r>
+            <a:r>
+              <a:rPr sz="1800">
+                <a:solidFill>
+                  <a:srgbClr val="1F2328"/>
+                </a:solidFill>
+                <a:latin typeface="Microsoft JhengHei"/>
+              </a:rPr>
+              <a:t>: 精簡版歷史，一行顯示一筆提交</a:t>
             </a:r>
           </a:p>
           <a:p>
             <a:pPr lvl="1">
-              <a:spcAft>
-                <a:spcPts val="1000"/>
-              </a:spcAft>
-              <a:defRPr sz="1800">
-                <a:solidFill>
-                  <a:srgbClr val="FFFFFF"/>
-                </a:solidFill>
-                <a:latin typeface="Microsoft JhengHei"/>
-              </a:defRPr>
-            </a:pPr>
-            <a:r>
-              <a:t>`git log -3`: 只顯示逆向 3 筆資料</a:t>
+              <a:lnSpc>
+                <a:spcPct val="125000"/>
+              </a:lnSpc>
+              <a:spcAft>
+                <a:spcPts val="600"/>
+              </a:spcAft>
+              <a:defRPr>
+                <a:latin typeface="Microsoft JhengHei"/>
+              </a:defRPr>
+            </a:pPr>
+            <a:r>
+              <a:rPr sz="1800" b="1">
+                <a:solidFill>
+                  <a:srgbClr val="F05032"/>
+                </a:solidFill>
+                <a:latin typeface="Consolas"/>
+              </a:rPr>
+              <a:t>git log -3</a:t>
+            </a:r>
+            <a:r>
+              <a:rPr sz="1800">
+                <a:solidFill>
+                  <a:srgbClr val="1F2328"/>
+                </a:solidFill>
+                <a:latin typeface="Microsoft JhengHei"/>
+              </a:rPr>
+              <a:t>: 只顯示逆向 3 筆資料</a:t>
             </a:r>
           </a:p>
           <a:p>
             <a:pPr>
-              <a:spcAft>
-                <a:spcPts val="1000"/>
-              </a:spcAft>
-              <a:defRPr sz="2000">
-                <a:solidFill>
-                  <a:srgbClr val="FFFFFF"/>
-                </a:solidFill>
-                <a:latin typeface="Microsoft JhengHei"/>
-              </a:defRPr>
-            </a:pPr>
-            <a:r>
-              <a:t>**`git diff`：比較檔案差異**</a:t>
+              <a:lnSpc>
+                <a:spcPct val="125000"/>
+              </a:lnSpc>
+              <a:spcAft>
+                <a:spcPts val="600"/>
+              </a:spcAft>
+              <a:defRPr>
+                <a:latin typeface="Microsoft JhengHei"/>
+              </a:defRPr>
+            </a:pPr>
+            <a:r>
+              <a:rPr sz="2000" b="1">
+                <a:solidFill>
+                  <a:srgbClr val="1F2328"/>
+                </a:solidFill>
+                <a:latin typeface="Microsoft JhengHei"/>
+              </a:rPr>
+              <a:t>`git diff`：比較檔案差異</a:t>
             </a:r>
           </a:p>
           <a:p>
             <a:pPr lvl="1">
-              <a:spcAft>
-                <a:spcPts val="1000"/>
-              </a:spcAft>
-              <a:defRPr sz="1800">
-                <a:solidFill>
-                  <a:srgbClr val="FFFFFF"/>
-                </a:solidFill>
-                <a:latin typeface="Microsoft JhengHei"/>
-              </a:defRPr>
-            </a:pPr>
-            <a:r>
-              <a:t>查看檔案修改了哪些具體程式碼行 (綠色 `+` 代表新增，紅色 `-` 代表刪除)</a:t>
+              <a:lnSpc>
+                <a:spcPct val="125000"/>
+              </a:lnSpc>
+              <a:spcAft>
+                <a:spcPts val="600"/>
+              </a:spcAft>
+              <a:defRPr>
+                <a:latin typeface="Microsoft JhengHei"/>
+              </a:defRPr>
+            </a:pPr>
+            <a:r>
+              <a:rPr sz="1800">
+                <a:solidFill>
+                  <a:srgbClr val="1F2328"/>
+                </a:solidFill>
+                <a:latin typeface="Microsoft JhengHei"/>
+              </a:rPr>
+              <a:t>查看檔案修改了哪些具體程式碼行 (綠色 </a:t>
+            </a:r>
+            <a:r>
+              <a:rPr sz="1800" b="1">
+                <a:solidFill>
+                  <a:srgbClr val="F05032"/>
+                </a:solidFill>
+                <a:latin typeface="Consolas"/>
+              </a:rPr>
+              <a:t>+</a:t>
+            </a:r>
+            <a:r>
+              <a:rPr sz="1800">
+                <a:solidFill>
+                  <a:srgbClr val="1F2328"/>
+                </a:solidFill>
+                <a:latin typeface="Microsoft JhengHei"/>
+              </a:rPr>
+              <a:t> 代表新增，紅色 </a:t>
+            </a:r>
+            <a:r>
+              <a:rPr sz="1800" b="1">
+                <a:solidFill>
+                  <a:srgbClr val="F05032"/>
+                </a:solidFill>
+                <a:latin typeface="Consolas"/>
+              </a:rPr>
+              <a:t>-</a:t>
+            </a:r>
+            <a:r>
+              <a:rPr sz="1800">
+                <a:solidFill>
+                  <a:srgbClr val="1F2328"/>
+                </a:solidFill>
+                <a:latin typeface="Microsoft JhengHei"/>
+              </a:rPr>
+              <a:t> 代表刪除)</a:t>
             </a:r>
           </a:p>
           <a:p>
             <a:pPr lvl="1">
-              <a:spcAft>
-                <a:spcPts val="1000"/>
-              </a:spcAft>
-              <a:defRPr sz="1800">
-                <a:solidFill>
-                  <a:srgbClr val="FFFFFF"/>
-                </a:solidFill>
-                <a:latin typeface="Microsoft JhengHei"/>
-              </a:defRPr>
-            </a:pPr>
-            <a:r>
-              <a:t>`git diff`: 查看工作目錄與暫存區的差異</a:t>
+              <a:lnSpc>
+                <a:spcPct val="125000"/>
+              </a:lnSpc>
+              <a:spcAft>
+                <a:spcPts val="600"/>
+              </a:spcAft>
+              <a:defRPr>
+                <a:latin typeface="Microsoft JhengHei"/>
+              </a:defRPr>
+            </a:pPr>
+            <a:r>
+              <a:rPr sz="1800" b="1">
+                <a:solidFill>
+                  <a:srgbClr val="F05032"/>
+                </a:solidFill>
+                <a:latin typeface="Consolas"/>
+              </a:rPr>
+              <a:t>git diff</a:t>
+            </a:r>
+            <a:r>
+              <a:rPr sz="1800">
+                <a:solidFill>
+                  <a:srgbClr val="1F2328"/>
+                </a:solidFill>
+                <a:latin typeface="Microsoft JhengHei"/>
+              </a:rPr>
+              <a:t>: 查看工作目錄與暫存區的差異</a:t>
             </a:r>
           </a:p>
           <a:p>
             <a:pPr lvl="1">
-              <a:spcAft>
-                <a:spcPts val="1000"/>
-              </a:spcAft>
-              <a:defRPr sz="1800">
-                <a:solidFill>
-                  <a:srgbClr val="FFFFFF"/>
-                </a:solidFill>
-                <a:latin typeface="Microsoft JhengHei"/>
-              </a:defRPr>
-            </a:pPr>
-            <a:r>
-              <a:t>`git diff --staged`: 查看暫存區與上次提交版本間的差異</a:t>
+              <a:lnSpc>
+                <a:spcPct val="125000"/>
+              </a:lnSpc>
+              <a:spcAft>
+                <a:spcPts val="600"/>
+              </a:spcAft>
+              <a:defRPr>
+                <a:latin typeface="Microsoft JhengHei"/>
+              </a:defRPr>
+            </a:pPr>
+            <a:r>
+              <a:rPr sz="1800" b="1">
+                <a:solidFill>
+                  <a:srgbClr val="F05032"/>
+                </a:solidFill>
+                <a:latin typeface="Consolas"/>
+              </a:rPr>
+              <a:t>git diff --staged</a:t>
+            </a:r>
+            <a:r>
+              <a:rPr sz="1800">
+                <a:solidFill>
+                  <a:srgbClr val="1F2328"/>
+                </a:solidFill>
+                <a:latin typeface="Microsoft JhengHei"/>
+              </a:rPr>
+              <a:t>: 查看暫存區與上次提交版本間的差異</a:t>
             </a:r>
           </a:p>
         </p:txBody>
@@ -3738,7 +4105,7 @@
     <p:bg>
       <p:bgPr>
         <a:solidFill>
-          <a:srgbClr val="0D1117"/>
+          <a:srgbClr val="F6F8FA"/>
         </a:solidFill>
         <a:effectLst/>
       </p:bgPr>
@@ -3752,14 +4119,59 @@
       <p:grpSpPr/>
       <p:sp>
         <p:nvSpPr>
-          <p:cNvPr id="2" name="TextBox 1"/>
+          <p:cNvPr id="2" name="Rectangle 1"/>
+          <p:cNvSpPr/>
+          <p:nvPr/>
+        </p:nvSpPr>
+        <p:spPr>
+          <a:xfrm>
+            <a:off x="731520" y="384048"/>
+            <a:ext cx="91440" cy="502920"/>
+          </a:xfrm>
+          <a:prstGeom prst="rect">
+            <a:avLst/>
+          </a:prstGeom>
+          <a:solidFill>
+            <a:srgbClr val="0366D6"/>
+          </a:solidFill>
+          <a:ln>
+            <a:solidFill>
+              <a:srgbClr val="0366D6"/>
+            </a:solidFill>
+          </a:ln>
+        </p:spPr>
+        <p:style>
+          <a:lnRef idx="1">
+            <a:schemeClr val="accent1"/>
+          </a:lnRef>
+          <a:fillRef idx="3">
+            <a:schemeClr val="accent1"/>
+          </a:fillRef>
+          <a:effectRef idx="2">
+            <a:schemeClr val="accent1"/>
+          </a:effectRef>
+          <a:fontRef idx="minor">
+            <a:schemeClr val="lt1"/>
+          </a:fontRef>
+        </p:style>
+        <p:txBody>
+          <a:bodyPr rtlCol="0" anchor="ctr"/>
+          <a:lstStyle/>
+          <a:p>
+            <a:pPr algn="ctr"/>
+          </a:p>
+        </p:txBody>
+      </p:sp>
+      <p:sp>
+        <p:nvSpPr>
+          <p:cNvPr id="3" name="TextBox 2"/>
           <p:cNvSpPr txBox="1"/>
           <p:nvPr/>
         </p:nvSpPr>
         <p:spPr>
           <a:xfrm>
-            <a:off x="731520" y="365760"/>
-            <a:ext cx="10725912" cy="731520"/>
+            <a:off x="960120" y="320040"/>
+            <a:ext cx="10497312" cy="731520"/>
           </a:xfrm>
           <a:prstGeom prst="rect">
             <a:avLst/>
@@ -3775,7 +4187,7 @@
             <a:pPr>
               <a:defRPr sz="3600" b="1">
                 <a:solidFill>
-                  <a:srgbClr val="58A6FF"/>
+                  <a:srgbClr val="0366D6"/>
                 </a:solidFill>
                 <a:latin typeface="Microsoft JhengHei"/>
               </a:defRPr>
@@ -3788,7 +4200,7 @@
       </p:sp>
       <p:sp>
         <p:nvSpPr>
-          <p:cNvPr id="3" name="Rectangle 2"/>
+          <p:cNvPr id="4" name="Rectangle 3"/>
           <p:cNvSpPr/>
           <p:nvPr/>
         </p:nvSpPr>
@@ -3801,10 +4213,12 @@
             <a:avLst/>
           </a:prstGeom>
           <a:solidFill>
-            <a:srgbClr val="161B22"/>
+            <a:srgbClr val="FFFFFF"/>
           </a:solidFill>
-          <a:ln>
-            <a:noFill/>
+          <a:ln w="19050">
+            <a:solidFill>
+              <a:srgbClr val="DADEE5"/>
+            </a:solidFill>
           </a:ln>
         </p:spPr>
         <p:style>
@@ -3831,7 +4245,7 @@
       </p:sp>
       <p:sp>
         <p:nvSpPr>
-          <p:cNvPr id="4" name="TextBox 3"/>
+          <p:cNvPr id="5" name="TextBox 4"/>
           <p:cNvSpPr txBox="1"/>
           <p:nvPr/>
         </p:nvSpPr>
@@ -3846,120 +4260,234 @@
           <a:noFill/>
         </p:spPr>
         <p:txBody>
-          <a:bodyPr wrap="square" lIns="0" tIns="0" rIns="0" bIns="0">
+          <a:bodyPr wrap="square" lIns="228600" rIns="228600" tIns="228600" bIns="228600">
             <a:spAutoFit/>
           </a:bodyPr>
           <a:lstStyle/>
           <a:p>
             <a:pPr>
-              <a:spcAft>
-                <a:spcPts val="1000"/>
-              </a:spcAft>
-              <a:defRPr sz="2000">
-                <a:solidFill>
-                  <a:srgbClr val="FFFFFF"/>
-                </a:solidFill>
-                <a:latin typeface="Microsoft JhengHei"/>
-              </a:defRPr>
-            </a:pPr>
-            <a:r>
+              <a:lnSpc>
+                <a:spcPct val="125000"/>
+              </a:lnSpc>
+              <a:spcAft>
+                <a:spcPts val="600"/>
+              </a:spcAft>
+              <a:defRPr>
+                <a:latin typeface="Microsoft JhengHei"/>
+              </a:defRPr>
+            </a:pPr>
+            <a:r>
+              <a:rPr sz="2000">
+                <a:solidFill>
+                  <a:srgbClr val="1F2328"/>
+                </a:solidFill>
+                <a:latin typeface="Microsoft JhengHei"/>
+              </a:rPr>
               <a:t>並非所有檔案都該上傳。有些檔案（如密碼檔、大型套件、編譯暫存檔）應排除在版控之外：</a:t>
             </a:r>
           </a:p>
           <a:p>
             <a:pPr lvl="1">
-              <a:spcAft>
-                <a:spcPts val="1000"/>
-              </a:spcAft>
-              <a:defRPr sz="1800">
-                <a:solidFill>
-                  <a:srgbClr val="FFFFFF"/>
-                </a:solidFill>
-                <a:latin typeface="Microsoft JhengHei"/>
-              </a:defRPr>
-            </a:pPr>
-            <a:r>
-              <a:t>在專案根目錄建立名為 `.gitignore` 的檔案</a:t>
+              <a:lnSpc>
+                <a:spcPct val="125000"/>
+              </a:lnSpc>
+              <a:spcAft>
+                <a:spcPts val="600"/>
+              </a:spcAft>
+              <a:defRPr>
+                <a:latin typeface="Microsoft JhengHei"/>
+              </a:defRPr>
+            </a:pPr>
+            <a:r>
+              <a:rPr sz="1800">
+                <a:solidFill>
+                  <a:srgbClr val="1F2328"/>
+                </a:solidFill>
+                <a:latin typeface="Microsoft JhengHei"/>
+              </a:rPr>
+              <a:t>在專案根目錄建立名為 </a:t>
+            </a:r>
+            <a:r>
+              <a:rPr sz="1800" b="1">
+                <a:solidFill>
+                  <a:srgbClr val="F05032"/>
+                </a:solidFill>
+                <a:latin typeface="Consolas"/>
+              </a:rPr>
+              <a:t>.gitignore</a:t>
+            </a:r>
+            <a:r>
+              <a:rPr sz="1800">
+                <a:solidFill>
+                  <a:srgbClr val="1F2328"/>
+                </a:solidFill>
+                <a:latin typeface="Microsoft JhengHei"/>
+              </a:rPr>
+              <a:t> 的檔案</a:t>
             </a:r>
           </a:p>
           <a:p>
             <a:pPr lvl="1">
-              <a:spcAft>
-                <a:spcPts val="1000"/>
-              </a:spcAft>
-              <a:defRPr sz="1800">
-                <a:solidFill>
-                  <a:srgbClr val="FFFFFF"/>
-                </a:solidFill>
-                <a:latin typeface="Microsoft JhengHei"/>
-              </a:defRPr>
-            </a:pPr>
-            <a:r>
+              <a:lnSpc>
+                <a:spcPct val="125000"/>
+              </a:lnSpc>
+              <a:spcAft>
+                <a:spcPts val="600"/>
+              </a:spcAft>
+              <a:defRPr>
+                <a:latin typeface="Microsoft JhengHei"/>
+              </a:defRPr>
+            </a:pPr>
+            <a:r>
+              <a:rPr sz="1800">
+                <a:solidFill>
+                  <a:srgbClr val="1F2328"/>
+                </a:solidFill>
+                <a:latin typeface="Microsoft JhengHei"/>
+              </a:rPr>
               <a:t>在裡面逐行寫入要忽略的檔案名稱或萬用規則：</a:t>
             </a:r>
           </a:p>
           <a:p>
             <a:pPr lvl="2">
-              <a:spcAft>
-                <a:spcPts val="1000"/>
-              </a:spcAft>
-              <a:defRPr sz="1600">
-                <a:solidFill>
-                  <a:srgbClr val="FFFFFF"/>
-                </a:solidFill>
-                <a:latin typeface="Microsoft JhengHei"/>
-              </a:defRPr>
-            </a:pPr>
-            <a:r>
-              <a:t>`*.log` (忽略所有日誌檔)</a:t>
+              <a:lnSpc>
+                <a:spcPct val="125000"/>
+              </a:lnSpc>
+              <a:spcAft>
+                <a:spcPts val="600"/>
+              </a:spcAft>
+              <a:defRPr>
+                <a:latin typeface="Microsoft JhengHei"/>
+              </a:defRPr>
+            </a:pPr>
+            <a:r>
+              <a:rPr sz="1600" b="1">
+                <a:solidFill>
+                  <a:srgbClr val="F05032"/>
+                </a:solidFill>
+                <a:latin typeface="Consolas"/>
+              </a:rPr>
+              <a:t>*.log</a:t>
+            </a:r>
+            <a:r>
+              <a:rPr sz="1600">
+                <a:solidFill>
+                  <a:srgbClr val="1F2328"/>
+                </a:solidFill>
+                <a:latin typeface="Microsoft JhengHei"/>
+              </a:rPr>
+              <a:t> (忽略所有日誌檔)</a:t>
             </a:r>
           </a:p>
           <a:p>
             <a:pPr lvl="2">
-              <a:spcAft>
-                <a:spcPts val="1000"/>
-              </a:spcAft>
-              <a:defRPr sz="1600">
-                <a:solidFill>
-                  <a:srgbClr val="FFFFFF"/>
-                </a:solidFill>
-                <a:latin typeface="Microsoft JhengHei"/>
-              </a:defRPr>
-            </a:pPr>
-            <a:r>
-              <a:t>`.env` (忽略環境變數密碼檔)</a:t>
+              <a:lnSpc>
+                <a:spcPct val="125000"/>
+              </a:lnSpc>
+              <a:spcAft>
+                <a:spcPts val="600"/>
+              </a:spcAft>
+              <a:defRPr>
+                <a:latin typeface="Microsoft JhengHei"/>
+              </a:defRPr>
+            </a:pPr>
+            <a:r>
+              <a:rPr sz="1600" b="1">
+                <a:solidFill>
+                  <a:srgbClr val="F05032"/>
+                </a:solidFill>
+                <a:latin typeface="Consolas"/>
+              </a:rPr>
+              <a:t>.env</a:t>
+            </a:r>
+            <a:r>
+              <a:rPr sz="1600">
+                <a:solidFill>
+                  <a:srgbClr val="1F2328"/>
+                </a:solidFill>
+                <a:latin typeface="Microsoft JhengHei"/>
+              </a:rPr>
+              <a:t> (忽略環境變數密碼檔)</a:t>
             </a:r>
           </a:p>
           <a:p>
             <a:pPr lvl="2">
-              <a:spcAft>
-                <a:spcPts val="1000"/>
-              </a:spcAft>
-              <a:defRPr sz="1600">
-                <a:solidFill>
-                  <a:srgbClr val="FFFFFF"/>
-                </a:solidFill>
-                <a:latin typeface="Microsoft JhengHei"/>
-              </a:defRPr>
-            </a:pPr>
-            <a:r>
-              <a:t>`node_modules/` (忽略前端套件依賴資料夾)</a:t>
+              <a:lnSpc>
+                <a:spcPct val="125000"/>
+              </a:lnSpc>
+              <a:spcAft>
+                <a:spcPts val="600"/>
+              </a:spcAft>
+              <a:defRPr>
+                <a:latin typeface="Microsoft JhengHei"/>
+              </a:defRPr>
+            </a:pPr>
+            <a:r>
+              <a:rPr sz="1600" b="1">
+                <a:solidFill>
+                  <a:srgbClr val="F05032"/>
+                </a:solidFill>
+                <a:latin typeface="Consolas"/>
+              </a:rPr>
+              <a:t>node_modules/</a:t>
+            </a:r>
+            <a:r>
+              <a:rPr sz="1600">
+                <a:solidFill>
+                  <a:srgbClr val="1F2328"/>
+                </a:solidFill>
+                <a:latin typeface="Microsoft JhengHei"/>
+              </a:rPr>
+              <a:t> (忽略前端套件依賴資料夾)</a:t>
             </a:r>
           </a:p>
           <a:p>
             <a:pPr lvl="1">
-              <a:spcAft>
-                <a:spcPts val="1000"/>
-              </a:spcAft>
-              <a:defRPr sz="1800">
-                <a:solidFill>
-                  <a:srgbClr val="FFFFFF"/>
-                </a:solidFill>
-                <a:latin typeface="Microsoft JhengHei"/>
-              </a:defRPr>
-            </a:pPr>
-            <a:r>
-              <a:t>**注意事項**：已經被 Git 追蹤的檔案不受此檔影響。必須先執行 `git rm --cached &lt;檔名&gt;` 解除追蹤後，才會被 ignore。</a:t>
+              <a:lnSpc>
+                <a:spcPct val="125000"/>
+              </a:lnSpc>
+              <a:spcAft>
+                <a:spcPts val="600"/>
+              </a:spcAft>
+              <a:defRPr>
+                <a:latin typeface="Microsoft JhengHei"/>
+              </a:defRPr>
+            </a:pPr>
+            <a:r>
+              <a:rPr sz="1800" b="1">
+                <a:solidFill>
+                  <a:srgbClr val="1F2328"/>
+                </a:solidFill>
+                <a:latin typeface="Microsoft JhengHei"/>
+              </a:rPr>
+              <a:t>注意事項</a:t>
+            </a:r>
+            <a:r>
+              <a:rPr sz="1800">
+                <a:solidFill>
+                  <a:srgbClr val="1F2328"/>
+                </a:solidFill>
+                <a:latin typeface="Microsoft JhengHei"/>
+              </a:rPr>
+              <a:t>：已經被 Git 追蹤的檔案不受此檔影響。必須先執行 </a:t>
+            </a:r>
+            <a:r>
+              <a:rPr sz="1800" b="1">
+                <a:solidFill>
+                  <a:srgbClr val="F05032"/>
+                </a:solidFill>
+                <a:latin typeface="Consolas"/>
+              </a:rPr>
+              <a:t>git rm --cached &lt;檔名&gt;</a:t>
+            </a:r>
+            <a:r>
+              <a:rPr sz="1800">
+                <a:solidFill>
+                  <a:srgbClr val="1F2328"/>
+                </a:solidFill>
+                <a:latin typeface="Microsoft JhengHei"/>
+              </a:rPr>
+              <a:t> 解除追蹤後，才會被 ignore。</a:t>
             </a:r>
           </a:p>
         </p:txBody>
@@ -3978,7 +4506,7 @@
     <p:bg>
       <p:bgPr>
         <a:solidFill>
-          <a:srgbClr val="0D1117"/>
+          <a:srgbClr val="F6F8FA"/>
         </a:solidFill>
         <a:effectLst/>
       </p:bgPr>
@@ -3992,14 +4520,59 @@
       <p:grpSpPr/>
       <p:sp>
         <p:nvSpPr>
-          <p:cNvPr id="2" name="TextBox 1"/>
+          <p:cNvPr id="2" name="Rectangle 1"/>
+          <p:cNvSpPr/>
+          <p:nvPr/>
+        </p:nvSpPr>
+        <p:spPr>
+          <a:xfrm>
+            <a:off x="731520" y="384048"/>
+            <a:ext cx="91440" cy="502920"/>
+          </a:xfrm>
+          <a:prstGeom prst="rect">
+            <a:avLst/>
+          </a:prstGeom>
+          <a:solidFill>
+            <a:srgbClr val="0366D6"/>
+          </a:solidFill>
+          <a:ln>
+            <a:solidFill>
+              <a:srgbClr val="0366D6"/>
+            </a:solidFill>
+          </a:ln>
+        </p:spPr>
+        <p:style>
+          <a:lnRef idx="1">
+            <a:schemeClr val="accent1"/>
+          </a:lnRef>
+          <a:fillRef idx="3">
+            <a:schemeClr val="accent1"/>
+          </a:fillRef>
+          <a:effectRef idx="2">
+            <a:schemeClr val="accent1"/>
+          </a:effectRef>
+          <a:fontRef idx="minor">
+            <a:schemeClr val="lt1"/>
+          </a:fontRef>
+        </p:style>
+        <p:txBody>
+          <a:bodyPr rtlCol="0" anchor="ctr"/>
+          <a:lstStyle/>
+          <a:p>
+            <a:pPr algn="ctr"/>
+          </a:p>
+        </p:txBody>
+      </p:sp>
+      <p:sp>
+        <p:nvSpPr>
+          <p:cNvPr id="3" name="TextBox 2"/>
           <p:cNvSpPr txBox="1"/>
           <p:nvPr/>
         </p:nvSpPr>
         <p:spPr>
           <a:xfrm>
-            <a:off x="731520" y="365760"/>
-            <a:ext cx="10725912" cy="731520"/>
+            <a:off x="960120" y="320040"/>
+            <a:ext cx="10497312" cy="731520"/>
           </a:xfrm>
           <a:prstGeom prst="rect">
             <a:avLst/>
@@ -4015,7 +4588,7 @@
             <a:pPr>
               <a:defRPr sz="3600" b="1">
                 <a:solidFill>
-                  <a:srgbClr val="58A6FF"/>
+                  <a:srgbClr val="0366D6"/>
                 </a:solidFill>
                 <a:latin typeface="Microsoft JhengHei"/>
               </a:defRPr>
@@ -4028,7 +4601,7 @@
       </p:sp>
       <p:sp>
         <p:nvSpPr>
-          <p:cNvPr id="3" name="Rectangle 2"/>
+          <p:cNvPr id="4" name="Rectangle 3"/>
           <p:cNvSpPr/>
           <p:nvPr/>
         </p:nvSpPr>
@@ -4041,10 +4614,12 @@
             <a:avLst/>
           </a:prstGeom>
           <a:solidFill>
-            <a:srgbClr val="161B22"/>
+            <a:srgbClr val="FFFFFF"/>
           </a:solidFill>
-          <a:ln>
-            <a:noFill/>
+          <a:ln w="19050">
+            <a:solidFill>
+              <a:srgbClr val="DADEE5"/>
+            </a:solidFill>
           </a:ln>
         </p:spPr>
         <p:style>
@@ -4071,7 +4646,7 @@
       </p:sp>
       <p:sp>
         <p:nvSpPr>
-          <p:cNvPr id="4" name="TextBox 3"/>
+          <p:cNvPr id="5" name="TextBox 4"/>
           <p:cNvSpPr txBox="1"/>
           <p:nvPr/>
         </p:nvSpPr>
@@ -4086,120 +4661,198 @@
           <a:noFill/>
         </p:spPr>
         <p:txBody>
-          <a:bodyPr wrap="square" lIns="0" tIns="0" rIns="0" bIns="0">
+          <a:bodyPr wrap="square" lIns="228600" rIns="228600" tIns="228600" bIns="228600">
             <a:spAutoFit/>
           </a:bodyPr>
           <a:lstStyle/>
           <a:p>
             <a:pPr>
-              <a:spcAft>
-                <a:spcPts val="1000"/>
-              </a:spcAft>
-              <a:defRPr sz="2000">
-                <a:solidFill>
-                  <a:srgbClr val="FFFFFF"/>
-                </a:solidFill>
-                <a:latin typeface="Microsoft JhengHei"/>
-              </a:defRPr>
-            </a:pPr>
-            <a:r>
-              <a:t>**`git restore &lt;檔名&gt;`：放棄修改**</a:t>
+              <a:lnSpc>
+                <a:spcPct val="125000"/>
+              </a:lnSpc>
+              <a:spcAft>
+                <a:spcPts val="600"/>
+              </a:spcAft>
+              <a:defRPr>
+                <a:latin typeface="Microsoft JhengHei"/>
+              </a:defRPr>
+            </a:pPr>
+            <a:r>
+              <a:rPr sz="2000" b="1">
+                <a:solidFill>
+                  <a:srgbClr val="1F2328"/>
+                </a:solidFill>
+                <a:latin typeface="Microsoft JhengHei"/>
+              </a:rPr>
+              <a:t>`git restore &lt;檔名&gt;`：放棄修改</a:t>
             </a:r>
           </a:p>
           <a:p>
             <a:pPr lvl="1">
-              <a:spcAft>
-                <a:spcPts val="1000"/>
-              </a:spcAft>
-              <a:defRPr sz="1800">
-                <a:solidFill>
-                  <a:srgbClr val="FFFFFF"/>
-                </a:solidFill>
-                <a:latin typeface="Microsoft JhengHei"/>
-              </a:defRPr>
-            </a:pPr>
-            <a:r>
+              <a:lnSpc>
+                <a:spcPct val="125000"/>
+              </a:lnSpc>
+              <a:spcAft>
+                <a:spcPts val="600"/>
+              </a:spcAft>
+              <a:defRPr>
+                <a:latin typeface="Microsoft JhengHei"/>
+              </a:defRPr>
+            </a:pPr>
+            <a:r>
+              <a:rPr sz="1800">
+                <a:solidFill>
+                  <a:srgbClr val="1F2328"/>
+                </a:solidFill>
+                <a:latin typeface="Microsoft JhengHei"/>
+              </a:rPr>
               <a:t>放記工作目錄中未暫存的修改，回到上次提交的狀態（此操作無法復原！）</a:t>
             </a:r>
           </a:p>
           <a:p>
             <a:pPr>
-              <a:spcAft>
-                <a:spcPts val="1000"/>
-              </a:spcAft>
-              <a:defRPr sz="2000">
-                <a:solidFill>
-                  <a:srgbClr val="FFFFFF"/>
-                </a:solidFill>
-                <a:latin typeface="Microsoft JhengHei"/>
-              </a:defRPr>
-            </a:pPr>
-            <a:r>
-              <a:t>**`git restore --staged &lt;檔名&gt;`：取消暫存**</a:t>
+              <a:lnSpc>
+                <a:spcPct val="125000"/>
+              </a:lnSpc>
+              <a:spcAft>
+                <a:spcPts val="600"/>
+              </a:spcAft>
+              <a:defRPr>
+                <a:latin typeface="Microsoft JhengHei"/>
+              </a:defRPr>
+            </a:pPr>
+            <a:r>
+              <a:rPr sz="2000" b="1">
+                <a:solidFill>
+                  <a:srgbClr val="1F2328"/>
+                </a:solidFill>
+                <a:latin typeface="Microsoft JhengHei"/>
+              </a:rPr>
+              <a:t>`git restore --staged &lt;檔名&gt;`：取消暫存</a:t>
             </a:r>
           </a:p>
           <a:p>
             <a:pPr lvl="1">
-              <a:spcAft>
-                <a:spcPts val="1000"/>
-              </a:spcAft>
-              <a:defRPr sz="1800">
-                <a:solidFill>
-                  <a:srgbClr val="FFFFFF"/>
-                </a:solidFill>
-                <a:latin typeface="Microsoft JhengHei"/>
-              </a:defRPr>
-            </a:pPr>
-            <a:r>
-              <a:t>將檔案從暫存區拿出來，回復成 modified 狀態 (等同取消 `git add`)</a:t>
+              <a:lnSpc>
+                <a:spcPct val="125000"/>
+              </a:lnSpc>
+              <a:spcAft>
+                <a:spcPts val="600"/>
+              </a:spcAft>
+              <a:defRPr>
+                <a:latin typeface="Microsoft JhengHei"/>
+              </a:defRPr>
+            </a:pPr>
+            <a:r>
+              <a:rPr sz="1800">
+                <a:solidFill>
+                  <a:srgbClr val="1F2328"/>
+                </a:solidFill>
+                <a:latin typeface="Microsoft JhengHei"/>
+              </a:rPr>
+              <a:t>將檔案從暫存區拿出來，回復成 modified 狀態 (等同取消 </a:t>
+            </a:r>
+            <a:r>
+              <a:rPr sz="1800" b="1">
+                <a:solidFill>
+                  <a:srgbClr val="F05032"/>
+                </a:solidFill>
+                <a:latin typeface="Consolas"/>
+              </a:rPr>
+              <a:t>git add</a:t>
+            </a:r>
+            <a:r>
+              <a:rPr sz="1800">
+                <a:solidFill>
+                  <a:srgbClr val="1F2328"/>
+                </a:solidFill>
+                <a:latin typeface="Microsoft JhengHei"/>
+              </a:rPr>
+              <a:t>)</a:t>
             </a:r>
           </a:p>
           <a:p>
             <a:pPr>
-              <a:spcAft>
-                <a:spcPts val="1000"/>
-              </a:spcAft>
-              <a:defRPr sz="2000">
-                <a:solidFill>
-                  <a:srgbClr val="FFFFFF"/>
-                </a:solidFill>
-                <a:latin typeface="Microsoft JhengHei"/>
-              </a:defRPr>
-            </a:pPr>
-            <a:r>
-              <a:t>**`git reset HEAD~1`：撤銷提交**</a:t>
+              <a:lnSpc>
+                <a:spcPct val="125000"/>
+              </a:lnSpc>
+              <a:spcAft>
+                <a:spcPts val="600"/>
+              </a:spcAft>
+              <a:defRPr>
+                <a:latin typeface="Microsoft JhengHei"/>
+              </a:defRPr>
+            </a:pPr>
+            <a:r>
+              <a:rPr sz="2000" b="1">
+                <a:solidFill>
+                  <a:srgbClr val="1F2328"/>
+                </a:solidFill>
+                <a:latin typeface="Microsoft JhengHei"/>
+              </a:rPr>
+              <a:t>`git reset HEAD~1`：撤銷提交</a:t>
             </a:r>
           </a:p>
           <a:p>
             <a:pPr lvl="1">
-              <a:spcAft>
-                <a:spcPts val="1000"/>
-              </a:spcAft>
-              <a:defRPr sz="1800">
-                <a:solidFill>
-                  <a:srgbClr val="FFFFFF"/>
-                </a:solidFill>
-                <a:latin typeface="Microsoft JhengHei"/>
-              </a:defRPr>
-            </a:pPr>
-            <a:r>
-              <a:t>`git reset --soft HEAD~1`: 撤銷上一次 commit，但保留檔案修改於暫存區</a:t>
+              <a:lnSpc>
+                <a:spcPct val="125000"/>
+              </a:lnSpc>
+              <a:spcAft>
+                <a:spcPts val="600"/>
+              </a:spcAft>
+              <a:defRPr>
+                <a:latin typeface="Microsoft JhengHei"/>
+              </a:defRPr>
+            </a:pPr>
+            <a:r>
+              <a:rPr sz="1800" b="1">
+                <a:solidFill>
+                  <a:srgbClr val="F05032"/>
+                </a:solidFill>
+                <a:latin typeface="Consolas"/>
+              </a:rPr>
+              <a:t>git reset --soft HEAD~1</a:t>
+            </a:r>
+            <a:r>
+              <a:rPr sz="1800">
+                <a:solidFill>
+                  <a:srgbClr val="1F2328"/>
+                </a:solidFill>
+                <a:latin typeface="Microsoft JhengHei"/>
+              </a:rPr>
+              <a:t>: 撤銷上一次 commit，但保留檔案修改於暫存區</a:t>
             </a:r>
           </a:p>
           <a:p>
             <a:pPr lvl="1">
-              <a:spcAft>
-                <a:spcPts val="1000"/>
-              </a:spcAft>
-              <a:defRPr sz="1800">
-                <a:solidFill>
-                  <a:srgbClr val="FFFFFF"/>
-                </a:solidFill>
-                <a:latin typeface="Microsoft JhengHei"/>
-              </a:defRPr>
-            </a:pPr>
-            <a:r>
-              <a:t>`git reset --hard HEAD~1`: 徹底抹除上一次 commit 與所有變更 (危險！)</a:t>
+              <a:lnSpc>
+                <a:spcPct val="125000"/>
+              </a:lnSpc>
+              <a:spcAft>
+                <a:spcPts val="600"/>
+              </a:spcAft>
+              <a:defRPr>
+                <a:latin typeface="Microsoft JhengHei"/>
+              </a:defRPr>
+            </a:pPr>
+            <a:r>
+              <a:rPr sz="1800" b="1">
+                <a:solidFill>
+                  <a:srgbClr val="F05032"/>
+                </a:solidFill>
+                <a:latin typeface="Consolas"/>
+              </a:rPr>
+              <a:t>git reset --hard HEAD~1</a:t>
+            </a:r>
+            <a:r>
+              <a:rPr sz="1800">
+                <a:solidFill>
+                  <a:srgbClr val="1F2328"/>
+                </a:solidFill>
+                <a:latin typeface="Microsoft JhengHei"/>
+              </a:rPr>
+              <a:t>: 徹底抹除上一次 commit 與所有變更 (危險！)</a:t>
             </a:r>
           </a:p>
         </p:txBody>
@@ -4218,7 +4871,7 @@
     <p:bg>
       <p:bgPr>
         <a:solidFill>
-          <a:srgbClr val="0D1117"/>
+          <a:srgbClr val="F6F8FA"/>
         </a:solidFill>
         <a:effectLst/>
       </p:bgPr>
@@ -4232,14 +4885,59 @@
       <p:grpSpPr/>
       <p:sp>
         <p:nvSpPr>
-          <p:cNvPr id="2" name="TextBox 1"/>
+          <p:cNvPr id="2" name="Rectangle 1"/>
+          <p:cNvSpPr/>
+          <p:nvPr/>
+        </p:nvSpPr>
+        <p:spPr>
+          <a:xfrm>
+            <a:off x="731520" y="384048"/>
+            <a:ext cx="91440" cy="502920"/>
+          </a:xfrm>
+          <a:prstGeom prst="rect">
+            <a:avLst/>
+          </a:prstGeom>
+          <a:solidFill>
+            <a:srgbClr val="0366D6"/>
+          </a:solidFill>
+          <a:ln>
+            <a:solidFill>
+              <a:srgbClr val="0366D6"/>
+            </a:solidFill>
+          </a:ln>
+        </p:spPr>
+        <p:style>
+          <a:lnRef idx="1">
+            <a:schemeClr val="accent1"/>
+          </a:lnRef>
+          <a:fillRef idx="3">
+            <a:schemeClr val="accent1"/>
+          </a:fillRef>
+          <a:effectRef idx="2">
+            <a:schemeClr val="accent1"/>
+          </a:effectRef>
+          <a:fontRef idx="minor">
+            <a:schemeClr val="lt1"/>
+          </a:fontRef>
+        </p:style>
+        <p:txBody>
+          <a:bodyPr rtlCol="0" anchor="ctr"/>
+          <a:lstStyle/>
+          <a:p>
+            <a:pPr algn="ctr"/>
+          </a:p>
+        </p:txBody>
+      </p:sp>
+      <p:sp>
+        <p:nvSpPr>
+          <p:cNvPr id="3" name="TextBox 2"/>
           <p:cNvSpPr txBox="1"/>
           <p:nvPr/>
         </p:nvSpPr>
         <p:spPr>
           <a:xfrm>
-            <a:off x="731520" y="365760"/>
-            <a:ext cx="10725912" cy="731520"/>
+            <a:off x="960120" y="320040"/>
+            <a:ext cx="10497312" cy="731520"/>
           </a:xfrm>
           <a:prstGeom prst="rect">
             <a:avLst/>
@@ -4255,7 +4953,7 @@
             <a:pPr>
               <a:defRPr sz="3600" b="1">
                 <a:solidFill>
-                  <a:srgbClr val="58A6FF"/>
+                  <a:srgbClr val="0366D6"/>
                 </a:solidFill>
                 <a:latin typeface="Microsoft JhengHei"/>
               </a:defRPr>
@@ -4268,7 +4966,7 @@
       </p:sp>
       <p:sp>
         <p:nvSpPr>
-          <p:cNvPr id="3" name="Rectangle 2"/>
+          <p:cNvPr id="4" name="Rectangle 3"/>
           <p:cNvSpPr/>
           <p:nvPr/>
         </p:nvSpPr>
@@ -4281,10 +4979,12 @@
             <a:avLst/>
           </a:prstGeom>
           <a:solidFill>
-            <a:srgbClr val="161B22"/>
+            <a:srgbClr val="FFFFFF"/>
           </a:solidFill>
-          <a:ln>
-            <a:noFill/>
+          <a:ln w="19050">
+            <a:solidFill>
+              <a:srgbClr val="DADEE5"/>
+            </a:solidFill>
           </a:ln>
         </p:spPr>
         <p:style>
@@ -4311,7 +5011,7 @@
       </p:sp>
       <p:sp>
         <p:nvSpPr>
-          <p:cNvPr id="4" name="TextBox 3"/>
+          <p:cNvPr id="5" name="TextBox 4"/>
           <p:cNvSpPr txBox="1"/>
           <p:nvPr/>
         </p:nvSpPr>
@@ -4326,104 +5026,212 @@
           <a:noFill/>
         </p:spPr>
         <p:txBody>
-          <a:bodyPr wrap="square" lIns="0" tIns="0" rIns="0" bIns="0">
+          <a:bodyPr wrap="square" lIns="228600" rIns="228600" tIns="228600" bIns="228600">
             <a:spAutoFit/>
           </a:bodyPr>
           <a:lstStyle/>
           <a:p>
             <a:pPr>
-              <a:spcAft>
-                <a:spcPts val="1000"/>
-              </a:spcAft>
-              <a:defRPr sz="2000">
-                <a:solidFill>
-                  <a:srgbClr val="FFFFFF"/>
-                </a:solidFill>
-                <a:latin typeface="Microsoft JhengHei"/>
-              </a:defRPr>
-            </a:pPr>
-            <a:r>
-              <a:t>**`git commit --amend`：補救最後一次提交**</a:t>
+              <a:lnSpc>
+                <a:spcPct val="125000"/>
+              </a:lnSpc>
+              <a:spcAft>
+                <a:spcPts val="600"/>
+              </a:spcAft>
+              <a:defRPr>
+                <a:latin typeface="Microsoft JhengHei"/>
+              </a:defRPr>
+            </a:pPr>
+            <a:r>
+              <a:rPr sz="2000" b="1">
+                <a:solidFill>
+                  <a:srgbClr val="1F2328"/>
+                </a:solidFill>
+                <a:latin typeface="Microsoft JhengHei"/>
+              </a:rPr>
+              <a:t>`git commit --amend`：補救最後一次提交</a:t>
             </a:r>
           </a:p>
           <a:p>
             <a:pPr lvl="1">
-              <a:spcAft>
-                <a:spcPts val="1000"/>
-              </a:spcAft>
-              <a:defRPr sz="1800">
-                <a:solidFill>
-                  <a:srgbClr val="FFFFFF"/>
-                </a:solidFill>
-                <a:latin typeface="Microsoft JhengHei"/>
-              </a:defRPr>
-            </a:pPr>
-            <a:r>
-              <a:t>如果剛 commit 完發現訊息寫錯，或少 add 了一個檔案，可重新 `git add` 後輸入 `git commit --amend --no-edit` 合併入上一次提交</a:t>
+              <a:lnSpc>
+                <a:spcPct val="125000"/>
+              </a:lnSpc>
+              <a:spcAft>
+                <a:spcPts val="600"/>
+              </a:spcAft>
+              <a:defRPr>
+                <a:latin typeface="Microsoft JhengHei"/>
+              </a:defRPr>
+            </a:pPr>
+            <a:r>
+              <a:rPr sz="1800">
+                <a:solidFill>
+                  <a:srgbClr val="1F2328"/>
+                </a:solidFill>
+                <a:latin typeface="Microsoft JhengHei"/>
+              </a:rPr>
+              <a:t>如果剛 commit 完發現訊息寫錯，或少 add 了一個檔案，可重新 </a:t>
+            </a:r>
+            <a:r>
+              <a:rPr sz="1800" b="1">
+                <a:solidFill>
+                  <a:srgbClr val="F05032"/>
+                </a:solidFill>
+                <a:latin typeface="Consolas"/>
+              </a:rPr>
+              <a:t>git add</a:t>
+            </a:r>
+            <a:r>
+              <a:rPr sz="1800">
+                <a:solidFill>
+                  <a:srgbClr val="1F2328"/>
+                </a:solidFill>
+                <a:latin typeface="Microsoft JhengHei"/>
+              </a:rPr>
+              <a:t> 後輸入 </a:t>
+            </a:r>
+            <a:r>
+              <a:rPr sz="1800" b="1">
+                <a:solidFill>
+                  <a:srgbClr val="F05032"/>
+                </a:solidFill>
+                <a:latin typeface="Consolas"/>
+              </a:rPr>
+              <a:t>git commit --amend --no-edit</a:t>
+            </a:r>
+            <a:r>
+              <a:rPr sz="1800">
+                <a:solidFill>
+                  <a:srgbClr val="1F2328"/>
+                </a:solidFill>
+                <a:latin typeface="Microsoft JhengHei"/>
+              </a:rPr>
+              <a:t> 合併入上一次提交</a:t>
             </a:r>
           </a:p>
           <a:p>
             <a:pPr>
-              <a:spcAft>
-                <a:spcPts val="1000"/>
-              </a:spcAft>
-              <a:defRPr sz="2000">
-                <a:solidFill>
-                  <a:srgbClr val="FFFFFF"/>
-                </a:solidFill>
-                <a:latin typeface="Microsoft JhengHei"/>
-              </a:defRPr>
-            </a:pPr>
-            <a:r>
-              <a:t>**`git stash`：臨時儲存工作進度**</a:t>
+              <a:lnSpc>
+                <a:spcPct val="125000"/>
+              </a:lnSpc>
+              <a:spcAft>
+                <a:spcPts val="600"/>
+              </a:spcAft>
+              <a:defRPr>
+                <a:latin typeface="Microsoft JhengHei"/>
+              </a:defRPr>
+            </a:pPr>
+            <a:r>
+              <a:rPr sz="2000" b="1">
+                <a:solidFill>
+                  <a:srgbClr val="1F2328"/>
+                </a:solidFill>
+                <a:latin typeface="Microsoft JhengHei"/>
+              </a:rPr>
+              <a:t>`git stash`：臨時儲存工作進度</a:t>
             </a:r>
           </a:p>
           <a:p>
             <a:pPr lvl="1">
-              <a:spcAft>
-                <a:spcPts val="1000"/>
-              </a:spcAft>
-              <a:defRPr sz="1800">
-                <a:solidFill>
-                  <a:srgbClr val="FFFFFF"/>
-                </a:solidFill>
-                <a:latin typeface="Microsoft JhengHei"/>
-              </a:defRPr>
-            </a:pPr>
-            <a:r>
+              <a:lnSpc>
+                <a:spcPct val="125000"/>
+              </a:lnSpc>
+              <a:spcAft>
+                <a:spcPts val="600"/>
+              </a:spcAft>
+              <a:defRPr>
+                <a:latin typeface="Microsoft JhengHei"/>
+              </a:defRPr>
+            </a:pPr>
+            <a:r>
+              <a:rPr sz="1800">
+                <a:solidFill>
+                  <a:srgbClr val="1F2328"/>
+                </a:solidFill>
+                <a:latin typeface="Microsoft JhengHei"/>
+              </a:rPr>
               <a:t>當你手頭功能寫到一半，突然要切去別的分支修正緊急錯誤時：</a:t>
             </a:r>
           </a:p>
           <a:p>
             <a:pPr lvl="2">
-              <a:spcAft>
-                <a:spcPts val="1000"/>
-              </a:spcAft>
-              <a:defRPr sz="1600">
-                <a:solidFill>
-                  <a:srgbClr val="FFFFFF"/>
-                </a:solidFill>
-                <a:latin typeface="Microsoft JhengHei"/>
-              </a:defRPr>
-            </a:pPr>
-            <a:r>
-              <a:t>輸入 `git stash` 暫存目前修改，讓工作目錄回到乾淨狀態</a:t>
+              <a:lnSpc>
+                <a:spcPct val="125000"/>
+              </a:lnSpc>
+              <a:spcAft>
+                <a:spcPts val="600"/>
+              </a:spcAft>
+              <a:defRPr>
+                <a:latin typeface="Microsoft JhengHei"/>
+              </a:defRPr>
+            </a:pPr>
+            <a:r>
+              <a:rPr sz="1600">
+                <a:solidFill>
+                  <a:srgbClr val="1F2328"/>
+                </a:solidFill>
+                <a:latin typeface="Microsoft JhengHei"/>
+              </a:rPr>
+              <a:t>輸入 </a:t>
+            </a:r>
+            <a:r>
+              <a:rPr sz="1600" b="1">
+                <a:solidFill>
+                  <a:srgbClr val="F05032"/>
+                </a:solidFill>
+                <a:latin typeface="Consolas"/>
+              </a:rPr>
+              <a:t>git stash</a:t>
+            </a:r>
+            <a:r>
+              <a:rPr sz="1600">
+                <a:solidFill>
+                  <a:srgbClr val="1F2328"/>
+                </a:solidFill>
+                <a:latin typeface="Microsoft JhengHei"/>
+              </a:rPr>
+              <a:t> 暫存目前修改，讓工作目錄回到乾淨狀態</a:t>
             </a:r>
           </a:p>
           <a:p>
             <a:pPr lvl="2">
-              <a:spcAft>
-                <a:spcPts val="1000"/>
-              </a:spcAft>
-              <a:defRPr sz="1600">
-                <a:solidFill>
-                  <a:srgbClr val="FFFFFF"/>
-                </a:solidFill>
-                <a:latin typeface="Microsoft JhengHei"/>
-              </a:defRPr>
-            </a:pPr>
-            <a:r>
-              <a:t>修完錯誤後，切回原分支輸入 `git stash pop` 還原進度繼續寫</a:t>
+              <a:lnSpc>
+                <a:spcPct val="125000"/>
+              </a:lnSpc>
+              <a:spcAft>
+                <a:spcPts val="600"/>
+              </a:spcAft>
+              <a:defRPr>
+                <a:latin typeface="Microsoft JhengHei"/>
+              </a:defRPr>
+            </a:pPr>
+            <a:r>
+              <a:rPr sz="1600">
+                <a:solidFill>
+                  <a:srgbClr val="1F2328"/>
+                </a:solidFill>
+                <a:latin typeface="Microsoft JhengHei"/>
+              </a:rPr>
+              <a:t>修完錯誤後，切回原分支輸入 </a:t>
+            </a:r>
+            <a:r>
+              <a:rPr sz="1600" b="1">
+                <a:solidFill>
+                  <a:srgbClr val="F05032"/>
+                </a:solidFill>
+                <a:latin typeface="Consolas"/>
+              </a:rPr>
+              <a:t>git stash pop</a:t>
+            </a:r>
+            <a:r>
+              <a:rPr sz="1600">
+                <a:solidFill>
+                  <a:srgbClr val="1F2328"/>
+                </a:solidFill>
+                <a:latin typeface="Microsoft JhengHei"/>
+              </a:rPr>
+              <a:t> 還原進度繼續寫</a:t>
             </a:r>
           </a:p>
         </p:txBody>
@@ -4482,7 +5290,7 @@
               </a:spcAft>
               <a:defRPr sz="4800" b="1">
                 <a:solidFill>
-                  <a:srgbClr val="FFFFFF"/>
+                  <a:srgbClr val="1F2328"/>
                 </a:solidFill>
                 <a:latin typeface="Microsoft JhengHei"/>
               </a:defRPr>
@@ -4495,7 +5303,7 @@
             <a:pPr algn="ctr">
               <a:defRPr sz="2000">
                 <a:solidFill>
-                  <a:srgbClr val="8B949E"/>
+                  <a:srgbClr val="57606A"/>
                 </a:solidFill>
                 <a:latin typeface="Microsoft JhengHei"/>
               </a:defRPr>
@@ -4520,7 +5328,7 @@
     <p:bg>
       <p:bgPr>
         <a:solidFill>
-          <a:srgbClr val="0D1117"/>
+          <a:srgbClr val="F6F8FA"/>
         </a:solidFill>
         <a:effectLst/>
       </p:bgPr>
@@ -4534,14 +5342,59 @@
       <p:grpSpPr/>
       <p:sp>
         <p:nvSpPr>
-          <p:cNvPr id="2" name="TextBox 1"/>
+          <p:cNvPr id="2" name="Rectangle 1"/>
+          <p:cNvSpPr/>
+          <p:nvPr/>
+        </p:nvSpPr>
+        <p:spPr>
+          <a:xfrm>
+            <a:off x="731520" y="384048"/>
+            <a:ext cx="91440" cy="502920"/>
+          </a:xfrm>
+          <a:prstGeom prst="rect">
+            <a:avLst/>
+          </a:prstGeom>
+          <a:solidFill>
+            <a:srgbClr val="0366D6"/>
+          </a:solidFill>
+          <a:ln>
+            <a:solidFill>
+              <a:srgbClr val="0366D6"/>
+            </a:solidFill>
+          </a:ln>
+        </p:spPr>
+        <p:style>
+          <a:lnRef idx="1">
+            <a:schemeClr val="accent1"/>
+          </a:lnRef>
+          <a:fillRef idx="3">
+            <a:schemeClr val="accent1"/>
+          </a:fillRef>
+          <a:effectRef idx="2">
+            <a:schemeClr val="accent1"/>
+          </a:effectRef>
+          <a:fontRef idx="minor">
+            <a:schemeClr val="lt1"/>
+          </a:fontRef>
+        </p:style>
+        <p:txBody>
+          <a:bodyPr rtlCol="0" anchor="ctr"/>
+          <a:lstStyle/>
+          <a:p>
+            <a:pPr algn="ctr"/>
+          </a:p>
+        </p:txBody>
+      </p:sp>
+      <p:sp>
+        <p:nvSpPr>
+          <p:cNvPr id="3" name="TextBox 2"/>
           <p:cNvSpPr txBox="1"/>
           <p:nvPr/>
         </p:nvSpPr>
         <p:spPr>
           <a:xfrm>
-            <a:off x="731520" y="365760"/>
-            <a:ext cx="10725912" cy="731520"/>
+            <a:off x="960120" y="320040"/>
+            <a:ext cx="10497312" cy="731520"/>
           </a:xfrm>
           <a:prstGeom prst="rect">
             <a:avLst/>
@@ -4557,7 +5410,7 @@
             <a:pPr>
               <a:defRPr sz="3600" b="1">
                 <a:solidFill>
-                  <a:srgbClr val="58A6FF"/>
+                  <a:srgbClr val="0366D6"/>
                 </a:solidFill>
                 <a:latin typeface="Microsoft JhengHei"/>
               </a:defRPr>
@@ -4570,7 +5423,7 @@
       </p:sp>
       <p:sp>
         <p:nvSpPr>
-          <p:cNvPr id="3" name="Rectangle 2"/>
+          <p:cNvPr id="4" name="Rectangle 3"/>
           <p:cNvSpPr/>
           <p:nvPr/>
         </p:nvSpPr>
@@ -4583,10 +5436,12 @@
             <a:avLst/>
           </a:prstGeom>
           <a:solidFill>
-            <a:srgbClr val="161B22"/>
+            <a:srgbClr val="FFFFFF"/>
           </a:solidFill>
-          <a:ln>
-            <a:noFill/>
+          <a:ln w="19050">
+            <a:solidFill>
+              <a:srgbClr val="DADEE5"/>
+            </a:solidFill>
           </a:ln>
         </p:spPr>
         <p:style>
@@ -4613,7 +5468,7 @@
       </p:sp>
       <p:sp>
         <p:nvSpPr>
-          <p:cNvPr id="4" name="TextBox 3"/>
+          <p:cNvPr id="5" name="TextBox 4"/>
           <p:cNvSpPr txBox="1"/>
           <p:nvPr/>
         </p:nvSpPr>
@@ -4628,127 +5483,259 @@
           <a:noFill/>
         </p:spPr>
         <p:txBody>
-          <a:bodyPr wrap="square" lIns="0" tIns="0" rIns="0" bIns="0">
+          <a:bodyPr wrap="square" lIns="228600" rIns="228600" tIns="228600" bIns="228600">
             <a:spAutoFit/>
           </a:bodyPr>
           <a:lstStyle/>
           <a:p>
             <a:pPr>
-              <a:spcAft>
-                <a:spcPts val="1000"/>
-              </a:spcAft>
-              <a:defRPr sz="1800">
-                <a:solidFill>
-                  <a:srgbClr val="FFFFFF"/>
-                </a:solidFill>
-                <a:latin typeface="Microsoft JhengHei"/>
-              </a:defRPr>
-            </a:pPr>
-            <a:r>
-              <a:t>分支 (Branch) 讓開發者可以在獨立的平行宇宙中實驗，不影響主線 `main`：</a:t>
+              <a:lnSpc>
+                <a:spcPct val="125000"/>
+              </a:lnSpc>
+              <a:spcAft>
+                <a:spcPts val="600"/>
+              </a:spcAft>
+              <a:defRPr>
+                <a:latin typeface="Microsoft JhengHei"/>
+              </a:defRPr>
+            </a:pPr>
+            <a:r>
+              <a:rPr sz="1800">
+                <a:solidFill>
+                  <a:srgbClr val="1F2328"/>
+                </a:solidFill>
+                <a:latin typeface="Microsoft JhengHei"/>
+              </a:rPr>
+              <a:t>分支 (Branch) 讓開發者可以在獨立的平行宇宙中實驗，不影響主線 </a:t>
+            </a:r>
+            <a:r>
+              <a:rPr sz="1800" b="1">
+                <a:solidFill>
+                  <a:srgbClr val="F05032"/>
+                </a:solidFill>
+                <a:latin typeface="Consolas"/>
+              </a:rPr>
+              <a:t>main</a:t>
+            </a:r>
+            <a:r>
+              <a:rPr sz="1800">
+                <a:solidFill>
+                  <a:srgbClr val="1F2328"/>
+                </a:solidFill>
+                <a:latin typeface="Microsoft JhengHei"/>
+              </a:rPr>
+              <a:t>：</a:t>
             </a:r>
           </a:p>
           <a:p>
             <a:pPr>
-              <a:spcAft>
-                <a:spcPts val="1000"/>
-              </a:spcAft>
-              <a:defRPr sz="1800">
-                <a:solidFill>
-                  <a:srgbClr val="FFFFFF"/>
-                </a:solidFill>
-                <a:latin typeface="Microsoft JhengHei"/>
-              </a:defRPr>
-            </a:pPr>
-            <a:r>
-              <a:t>**分支常用指令**：</a:t>
+              <a:lnSpc>
+                <a:spcPct val="125000"/>
+              </a:lnSpc>
+              <a:spcAft>
+                <a:spcPts val="600"/>
+              </a:spcAft>
+              <a:defRPr>
+                <a:latin typeface="Microsoft JhengHei"/>
+              </a:defRPr>
+            </a:pPr>
+            <a:r>
+              <a:rPr sz="1800" b="1">
+                <a:solidFill>
+                  <a:srgbClr val="1F2328"/>
+                </a:solidFill>
+                <a:latin typeface="Microsoft JhengHei"/>
+              </a:rPr>
+              <a:t>分支常用指令</a:t>
+            </a:r>
+            <a:r>
+              <a:rPr sz="1800">
+                <a:solidFill>
+                  <a:srgbClr val="1F2328"/>
+                </a:solidFill>
+                <a:latin typeface="Microsoft JhengHei"/>
+              </a:rPr>
+              <a:t>：</a:t>
             </a:r>
           </a:p>
           <a:p>
             <a:pPr lvl="1">
-              <a:spcAft>
-                <a:spcPts val="1000"/>
-              </a:spcAft>
-              <a:defRPr sz="1600">
-                <a:solidFill>
-                  <a:srgbClr val="FFFFFF"/>
-                </a:solidFill>
-                <a:latin typeface="Microsoft JhengHei"/>
-              </a:defRPr>
-            </a:pPr>
-            <a:r>
-              <a:t>`git branch`: 列出目前本地的所有分支</a:t>
+              <a:lnSpc>
+                <a:spcPct val="125000"/>
+              </a:lnSpc>
+              <a:spcAft>
+                <a:spcPts val="600"/>
+              </a:spcAft>
+              <a:defRPr>
+                <a:latin typeface="Microsoft JhengHei"/>
+              </a:defRPr>
+            </a:pPr>
+            <a:r>
+              <a:rPr sz="1600" b="1">
+                <a:solidFill>
+                  <a:srgbClr val="F05032"/>
+                </a:solidFill>
+                <a:latin typeface="Consolas"/>
+              </a:rPr>
+              <a:t>git branch</a:t>
+            </a:r>
+            <a:r>
+              <a:rPr sz="1600">
+                <a:solidFill>
+                  <a:srgbClr val="1F2328"/>
+                </a:solidFill>
+                <a:latin typeface="Microsoft JhengHei"/>
+              </a:rPr>
+              <a:t>: 列出目前本地的所有分支</a:t>
             </a:r>
           </a:p>
           <a:p>
             <a:pPr lvl="1">
-              <a:spcAft>
-                <a:spcPts val="1000"/>
-              </a:spcAft>
-              <a:defRPr sz="1600">
-                <a:solidFill>
-                  <a:srgbClr val="FFFFFF"/>
-                </a:solidFill>
-                <a:latin typeface="Microsoft JhengHei"/>
-              </a:defRPr>
-            </a:pPr>
-            <a:r>
-              <a:t>`git branch &lt;新分支名&gt;`: 建立新分支</a:t>
+              <a:lnSpc>
+                <a:spcPct val="125000"/>
+              </a:lnSpc>
+              <a:spcAft>
+                <a:spcPts val="600"/>
+              </a:spcAft>
+              <a:defRPr>
+                <a:latin typeface="Microsoft JhengHei"/>
+              </a:defRPr>
+            </a:pPr>
+            <a:r>
+              <a:rPr sz="1600" b="1">
+                <a:solidFill>
+                  <a:srgbClr val="F05032"/>
+                </a:solidFill>
+                <a:latin typeface="Consolas"/>
+              </a:rPr>
+              <a:t>git branch &lt;新分支名&gt;</a:t>
+            </a:r>
+            <a:r>
+              <a:rPr sz="1600">
+                <a:solidFill>
+                  <a:srgbClr val="1F2328"/>
+                </a:solidFill>
+                <a:latin typeface="Microsoft JhengHei"/>
+              </a:rPr>
+              <a:t>: 建立新分支</a:t>
             </a:r>
           </a:p>
           <a:p>
             <a:pPr lvl="1">
-              <a:spcAft>
-                <a:spcPts val="1000"/>
-              </a:spcAft>
-              <a:defRPr sz="1600">
-                <a:solidFill>
-                  <a:srgbClr val="FFFFFF"/>
-                </a:solidFill>
-                <a:latin typeface="Microsoft JhengHei"/>
-              </a:defRPr>
-            </a:pPr>
-            <a:r>
-              <a:t>`git switch &lt;分支名&gt;` (舊版為 `checkout`): 切換至指定分支</a:t>
+              <a:lnSpc>
+                <a:spcPct val="125000"/>
+              </a:lnSpc>
+              <a:spcAft>
+                <a:spcPts val="600"/>
+              </a:spcAft>
+              <a:defRPr>
+                <a:latin typeface="Microsoft JhengHei"/>
+              </a:defRPr>
+            </a:pPr>
+            <a:r>
+              <a:rPr sz="1600" b="1">
+                <a:solidFill>
+                  <a:srgbClr val="F05032"/>
+                </a:solidFill>
+                <a:latin typeface="Consolas"/>
+              </a:rPr>
+              <a:t>git switch &lt;分支名&gt;</a:t>
+            </a:r>
+            <a:r>
+              <a:rPr sz="1600">
+                <a:solidFill>
+                  <a:srgbClr val="1F2328"/>
+                </a:solidFill>
+                <a:latin typeface="Microsoft JhengHei"/>
+              </a:rPr>
+              <a:t> (舊版為 </a:t>
+            </a:r>
+            <a:r>
+              <a:rPr sz="1600" b="1">
+                <a:solidFill>
+                  <a:srgbClr val="F05032"/>
+                </a:solidFill>
+                <a:latin typeface="Consolas"/>
+              </a:rPr>
+              <a:t>checkout</a:t>
+            </a:r>
+            <a:r>
+              <a:rPr sz="1600">
+                <a:solidFill>
+                  <a:srgbClr val="1F2328"/>
+                </a:solidFill>
+                <a:latin typeface="Microsoft JhengHei"/>
+              </a:rPr>
+              <a:t>): 切換至指定分支</a:t>
             </a:r>
           </a:p>
           <a:p>
             <a:pPr lvl="1">
-              <a:spcAft>
-                <a:spcPts val="1000"/>
-              </a:spcAft>
-              <a:defRPr sz="1600">
-                <a:solidFill>
-                  <a:srgbClr val="FFFFFF"/>
-                </a:solidFill>
-                <a:latin typeface="Microsoft JhengHei"/>
-              </a:defRPr>
-            </a:pPr>
-            <a:r>
-              <a:t>`git switch -c &lt;新分支名&gt;`: 建立分支並直接切換過去</a:t>
+              <a:lnSpc>
+                <a:spcPct val="125000"/>
+              </a:lnSpc>
+              <a:spcAft>
+                <a:spcPts val="600"/>
+              </a:spcAft>
+              <a:defRPr>
+                <a:latin typeface="Microsoft JhengHei"/>
+              </a:defRPr>
+            </a:pPr>
+            <a:r>
+              <a:rPr sz="1600" b="1">
+                <a:solidFill>
+                  <a:srgbClr val="F05032"/>
+                </a:solidFill>
+                <a:latin typeface="Consolas"/>
+              </a:rPr>
+              <a:t>git switch -c &lt;新分支名&gt;</a:t>
+            </a:r>
+            <a:r>
+              <a:rPr sz="1600">
+                <a:solidFill>
+                  <a:srgbClr val="1F2328"/>
+                </a:solidFill>
+                <a:latin typeface="Microsoft JhengHei"/>
+              </a:rPr>
+              <a:t>: 建立分支並直接切換過去</a:t>
             </a:r>
           </a:p>
           <a:p>
             <a:pPr lvl="1">
-              <a:spcAft>
-                <a:spcPts val="1000"/>
-              </a:spcAft>
-              <a:defRPr sz="1600">
-                <a:solidFill>
-                  <a:srgbClr val="FFFFFF"/>
-                </a:solidFill>
-                <a:latin typeface="Microsoft JhengHei"/>
-              </a:defRPr>
-            </a:pPr>
-            <a:r>
-              <a:t>`git merge &lt;分支名&gt;`: 將指定分支合併回目前分支</a:t>
+              <a:lnSpc>
+                <a:spcPct val="125000"/>
+              </a:lnSpc>
+              <a:spcAft>
+                <a:spcPts val="600"/>
+              </a:spcAft>
+              <a:defRPr>
+                <a:latin typeface="Microsoft JhengHei"/>
+              </a:defRPr>
+            </a:pPr>
+            <a:r>
+              <a:rPr sz="1600" b="1">
+                <a:solidFill>
+                  <a:srgbClr val="F05032"/>
+                </a:solidFill>
+                <a:latin typeface="Consolas"/>
+              </a:rPr>
+              <a:t>git merge &lt;分支名&gt;</a:t>
+            </a:r>
+            <a:r>
+              <a:rPr sz="1600">
+                <a:solidFill>
+                  <a:srgbClr val="1F2328"/>
+                </a:solidFill>
+                <a:latin typeface="Microsoft JhengHei"/>
+              </a:rPr>
+              <a:t>: 將指定分支合併回目前分支</a:t>
             </a:r>
           </a:p>
         </p:txBody>
       </p:sp>
       <p:pic>
         <p:nvPicPr>
-          <p:cNvPr id="5" name="Picture 4" descr="git_branches.png"/>
+          <p:cNvPr id="6" name="Picture 5" descr="git_branches.png"/>
           <p:cNvPicPr>
             <a:picLocks noChangeAspect="1"/>
           </p:cNvPicPr>
@@ -4784,7 +5771,7 @@
     <p:bg>
       <p:bgPr>
         <a:solidFill>
-          <a:srgbClr val="0D1117"/>
+          <a:srgbClr val="F6F8FA"/>
         </a:solidFill>
         <a:effectLst/>
       </p:bgPr>
@@ -4798,14 +5785,59 @@
       <p:grpSpPr/>
       <p:sp>
         <p:nvSpPr>
-          <p:cNvPr id="2" name="TextBox 1"/>
+          <p:cNvPr id="2" name="Rectangle 1"/>
+          <p:cNvSpPr/>
+          <p:nvPr/>
+        </p:nvSpPr>
+        <p:spPr>
+          <a:xfrm>
+            <a:off x="731520" y="384048"/>
+            <a:ext cx="91440" cy="502920"/>
+          </a:xfrm>
+          <a:prstGeom prst="rect">
+            <a:avLst/>
+          </a:prstGeom>
+          <a:solidFill>
+            <a:srgbClr val="0366D6"/>
+          </a:solidFill>
+          <a:ln>
+            <a:solidFill>
+              <a:srgbClr val="0366D6"/>
+            </a:solidFill>
+          </a:ln>
+        </p:spPr>
+        <p:style>
+          <a:lnRef idx="1">
+            <a:schemeClr val="accent1"/>
+          </a:lnRef>
+          <a:fillRef idx="3">
+            <a:schemeClr val="accent1"/>
+          </a:fillRef>
+          <a:effectRef idx="2">
+            <a:schemeClr val="accent1"/>
+          </a:effectRef>
+          <a:fontRef idx="minor">
+            <a:schemeClr val="lt1"/>
+          </a:fontRef>
+        </p:style>
+        <p:txBody>
+          <a:bodyPr rtlCol="0" anchor="ctr"/>
+          <a:lstStyle/>
+          <a:p>
+            <a:pPr algn="ctr"/>
+          </a:p>
+        </p:txBody>
+      </p:sp>
+      <p:sp>
+        <p:nvSpPr>
+          <p:cNvPr id="3" name="TextBox 2"/>
           <p:cNvSpPr txBox="1"/>
           <p:nvPr/>
         </p:nvSpPr>
         <p:spPr>
           <a:xfrm>
-            <a:off x="731520" y="365760"/>
-            <a:ext cx="10725912" cy="731520"/>
+            <a:off x="960120" y="320040"/>
+            <a:ext cx="10497312" cy="731520"/>
           </a:xfrm>
           <a:prstGeom prst="rect">
             <a:avLst/>
@@ -4821,7 +5853,7 @@
             <a:pPr>
               <a:defRPr sz="3600" b="1">
                 <a:solidFill>
-                  <a:srgbClr val="58A6FF"/>
+                  <a:srgbClr val="0366D6"/>
                 </a:solidFill>
                 <a:latin typeface="Microsoft JhengHei"/>
               </a:defRPr>
@@ -4834,7 +5866,7 @@
       </p:sp>
       <p:sp>
         <p:nvSpPr>
-          <p:cNvPr id="3" name="Rectangle 2"/>
+          <p:cNvPr id="4" name="Rectangle 3"/>
           <p:cNvSpPr/>
           <p:nvPr/>
         </p:nvSpPr>
@@ -4847,10 +5879,12 @@
             <a:avLst/>
           </a:prstGeom>
           <a:solidFill>
-            <a:srgbClr val="161B22"/>
+            <a:srgbClr val="FFFFFF"/>
           </a:solidFill>
-          <a:ln>
-            <a:noFill/>
+          <a:ln w="19050">
+            <a:solidFill>
+              <a:srgbClr val="DADEE5"/>
+            </a:solidFill>
           </a:ln>
         </p:spPr>
         <p:style>
@@ -4877,7 +5911,7 @@
       </p:sp>
       <p:sp>
         <p:nvSpPr>
-          <p:cNvPr id="4" name="TextBox 3"/>
+          <p:cNvPr id="5" name="TextBox 4"/>
           <p:cNvSpPr txBox="1"/>
           <p:nvPr/>
         </p:nvSpPr>
@@ -4892,152 +5926,296 @@
           <a:noFill/>
         </p:spPr>
         <p:txBody>
-          <a:bodyPr wrap="square" lIns="0" tIns="0" rIns="0" bIns="0">
+          <a:bodyPr wrap="square" lIns="228600" rIns="228600" tIns="228600" bIns="228600">
             <a:spAutoFit/>
           </a:bodyPr>
           <a:lstStyle/>
           <a:p>
             <a:pPr>
-              <a:spcAft>
-                <a:spcPts val="1000"/>
-              </a:spcAft>
-              <a:defRPr sz="2000">
-                <a:solidFill>
-                  <a:srgbClr val="FFFFFF"/>
-                </a:solidFill>
-                <a:latin typeface="Microsoft JhengHei"/>
-              </a:defRPr>
-            </a:pPr>
-            <a:r>
-              <a:t>**衝突產生的原因**：當兩個分支修改了同一個檔案的同一個區域，Git 合併時不知道聽誰的，就會停下來請你手動排除。</a:t>
+              <a:lnSpc>
+                <a:spcPct val="125000"/>
+              </a:lnSpc>
+              <a:spcAft>
+                <a:spcPts val="600"/>
+              </a:spcAft>
+              <a:defRPr>
+                <a:latin typeface="Microsoft JhengHei"/>
+              </a:defRPr>
+            </a:pPr>
+            <a:r>
+              <a:rPr sz="2000" b="1">
+                <a:solidFill>
+                  <a:srgbClr val="1F2328"/>
+                </a:solidFill>
+                <a:latin typeface="Microsoft JhengHei"/>
+              </a:rPr>
+              <a:t>衝突產生的原因</a:t>
+            </a:r>
+            <a:r>
+              <a:rPr sz="2000">
+                <a:solidFill>
+                  <a:srgbClr val="1F2328"/>
+                </a:solidFill>
+                <a:latin typeface="Microsoft JhengHei"/>
+              </a:rPr>
+              <a:t>：當兩個分支修改了同一個檔案的同一個區域，Git 合併時不知道聽誰的，就會停下來請你手動排除。</a:t>
             </a:r>
           </a:p>
           <a:p>
             <a:pPr>
-              <a:spcAft>
-                <a:spcPts val="1000"/>
-              </a:spcAft>
-              <a:defRPr sz="2000">
-                <a:solidFill>
-                  <a:srgbClr val="FFFFFF"/>
-                </a:solidFill>
-                <a:latin typeface="Microsoft JhengHei"/>
-              </a:defRPr>
-            </a:pPr>
-            <a:r>
-              <a:t>**衝突檔案標記格式**：</a:t>
+              <a:lnSpc>
+                <a:spcPct val="125000"/>
+              </a:lnSpc>
+              <a:spcAft>
+                <a:spcPts val="600"/>
+              </a:spcAft>
+              <a:defRPr>
+                <a:latin typeface="Microsoft JhengHei"/>
+              </a:defRPr>
+            </a:pPr>
+            <a:r>
+              <a:rPr sz="2000" b="1">
+                <a:solidFill>
+                  <a:srgbClr val="1F2328"/>
+                </a:solidFill>
+                <a:latin typeface="Microsoft JhengHei"/>
+              </a:rPr>
+              <a:t>衝突檔案標記格式</a:t>
+            </a:r>
+            <a:r>
+              <a:rPr sz="2000">
+                <a:solidFill>
+                  <a:srgbClr val="1F2328"/>
+                </a:solidFill>
+                <a:latin typeface="Microsoft JhengHei"/>
+              </a:rPr>
+              <a:t>：</a:t>
             </a:r>
           </a:p>
           <a:p>
             <a:pPr lvl="1">
-              <a:spcAft>
-                <a:spcPts val="1000"/>
-              </a:spcAft>
-              <a:defRPr sz="1800">
-                <a:solidFill>
-                  <a:srgbClr val="FFFFFF"/>
-                </a:solidFill>
-                <a:latin typeface="Microsoft JhengHei"/>
-              </a:defRPr>
-            </a:pPr>
-            <a:r>
-              <a:t>`&lt;&lt;&lt;&lt;&lt;&lt;&lt; HEAD` (你目前分支的內容)</a:t>
+              <a:lnSpc>
+                <a:spcPct val="125000"/>
+              </a:lnSpc>
+              <a:spcAft>
+                <a:spcPts val="600"/>
+              </a:spcAft>
+              <a:defRPr>
+                <a:latin typeface="Microsoft JhengHei"/>
+              </a:defRPr>
+            </a:pPr>
+            <a:r>
+              <a:rPr sz="1800" b="1">
+                <a:solidFill>
+                  <a:srgbClr val="F05032"/>
+                </a:solidFill>
+                <a:latin typeface="Consolas"/>
+              </a:rPr>
+              <a:t>&lt;&lt;&lt;&lt;&lt;&lt;&lt; HEAD</a:t>
+            </a:r>
+            <a:r>
+              <a:rPr sz="1800">
+                <a:solidFill>
+                  <a:srgbClr val="1F2328"/>
+                </a:solidFill>
+                <a:latin typeface="Microsoft JhengHei"/>
+              </a:rPr>
+              <a:t> (你目前分支的內容)</a:t>
             </a:r>
           </a:p>
           <a:p>
             <a:pPr lvl="1">
-              <a:spcAft>
-                <a:spcPts val="1000"/>
-              </a:spcAft>
-              <a:defRPr sz="1800">
-                <a:solidFill>
-                  <a:srgbClr val="FFFFFF"/>
-                </a:solidFill>
-                <a:latin typeface="Microsoft JhengHei"/>
-              </a:defRPr>
-            </a:pPr>
-            <a:r>
-              <a:t>`=======` (分隔線)</a:t>
+              <a:lnSpc>
+                <a:spcPct val="125000"/>
+              </a:lnSpc>
+              <a:spcAft>
+                <a:spcPts val="600"/>
+              </a:spcAft>
+              <a:defRPr>
+                <a:latin typeface="Microsoft JhengHei"/>
+              </a:defRPr>
+            </a:pPr>
+            <a:r>
+              <a:rPr sz="1800" b="1">
+                <a:solidFill>
+                  <a:srgbClr val="F05032"/>
+                </a:solidFill>
+                <a:latin typeface="Consolas"/>
+              </a:rPr>
+              <a:t>=======</a:t>
+            </a:r>
+            <a:r>
+              <a:rPr sz="1800">
+                <a:solidFill>
+                  <a:srgbClr val="1F2328"/>
+                </a:solidFill>
+                <a:latin typeface="Microsoft JhengHei"/>
+              </a:rPr>
+              <a:t> (分隔線)</a:t>
             </a:r>
           </a:p>
           <a:p>
             <a:pPr lvl="1">
-              <a:spcAft>
-                <a:spcPts val="1000"/>
-              </a:spcAft>
-              <a:defRPr sz="1800">
-                <a:solidFill>
-                  <a:srgbClr val="FFFFFF"/>
-                </a:solidFill>
-                <a:latin typeface="Microsoft JhengHei"/>
-              </a:defRPr>
-            </a:pPr>
-            <a:r>
-              <a:t>`&gt;&gt;&gt;&gt;&gt;&gt;&gt; feature-branch` (要合併進來的內容)</a:t>
+              <a:lnSpc>
+                <a:spcPct val="125000"/>
+              </a:lnSpc>
+              <a:spcAft>
+                <a:spcPts val="600"/>
+              </a:spcAft>
+              <a:defRPr>
+                <a:latin typeface="Microsoft JhengHei"/>
+              </a:defRPr>
+            </a:pPr>
+            <a:r>
+              <a:rPr sz="1800" b="1">
+                <a:solidFill>
+                  <a:srgbClr val="F05032"/>
+                </a:solidFill>
+                <a:latin typeface="Consolas"/>
+              </a:rPr>
+              <a:t>&gt;&gt;&gt;&gt;&gt;&gt;&gt; feature-branch</a:t>
+            </a:r>
+            <a:r>
+              <a:rPr sz="1800">
+                <a:solidFill>
+                  <a:srgbClr val="1F2328"/>
+                </a:solidFill>
+                <a:latin typeface="Microsoft JhengHei"/>
+              </a:rPr>
+              <a:t> (要合併進來的內容)</a:t>
             </a:r>
           </a:p>
           <a:p>
             <a:pPr>
-              <a:spcAft>
-                <a:spcPts val="1000"/>
-              </a:spcAft>
-              <a:defRPr sz="2000">
-                <a:solidFill>
-                  <a:srgbClr val="FFFFFF"/>
-                </a:solidFill>
-                <a:latin typeface="Microsoft JhengHei"/>
-              </a:defRPr>
-            </a:pPr>
-            <a:r>
-              <a:t>**排除步驟**：</a:t>
+              <a:lnSpc>
+                <a:spcPct val="125000"/>
+              </a:lnSpc>
+              <a:spcAft>
+                <a:spcPts val="600"/>
+              </a:spcAft>
+              <a:defRPr>
+                <a:latin typeface="Microsoft JhengHei"/>
+              </a:defRPr>
+            </a:pPr>
+            <a:r>
+              <a:rPr sz="2000" b="1">
+                <a:solidFill>
+                  <a:srgbClr val="1F2328"/>
+                </a:solidFill>
+                <a:latin typeface="Microsoft JhengHei"/>
+              </a:rPr>
+              <a:t>排除步驟</a:t>
+            </a:r>
+            <a:r>
+              <a:rPr sz="2000">
+                <a:solidFill>
+                  <a:srgbClr val="1F2328"/>
+                </a:solidFill>
+                <a:latin typeface="Microsoft JhengHei"/>
+              </a:rPr>
+              <a:t>：</a:t>
             </a:r>
           </a:p>
           <a:p>
             <a:pPr lvl="1">
-              <a:spcAft>
-                <a:spcPts val="1000"/>
-              </a:spcAft>
-              <a:defRPr sz="1800">
-                <a:solidFill>
-                  <a:srgbClr val="FFFFFF"/>
-                </a:solidFill>
-                <a:latin typeface="Microsoft JhengHei"/>
-              </a:defRPr>
-            </a:pPr>
-            <a:r>
+              <a:lnSpc>
+                <a:spcPct val="125000"/>
+              </a:lnSpc>
+              <a:spcAft>
+                <a:spcPts val="600"/>
+              </a:spcAft>
+              <a:defRPr>
+                <a:latin typeface="Microsoft JhengHei"/>
+              </a:defRPr>
+            </a:pPr>
+            <a:r>
+              <a:rPr sz="1800">
+                <a:solidFill>
+                  <a:srgbClr val="1F2328"/>
+                </a:solidFill>
+                <a:latin typeface="Microsoft JhengHei"/>
+              </a:rPr>
               <a:t>1. 開啟衝突檔案，手動刪除衝突標記並決定要保留哪些程式碼</a:t>
             </a:r>
           </a:p>
           <a:p>
             <a:pPr lvl="1">
-              <a:spcAft>
-                <a:spcPts val="1000"/>
-              </a:spcAft>
-              <a:defRPr sz="1800">
-                <a:solidFill>
-                  <a:srgbClr val="FFFFFF"/>
-                </a:solidFill>
-                <a:latin typeface="Microsoft JhengHei"/>
-              </a:defRPr>
-            </a:pPr>
-            <a:r>
-              <a:t>2. `git add &lt;檔名&gt;` 代表衝突已解決</a:t>
+              <a:lnSpc>
+                <a:spcPct val="125000"/>
+              </a:lnSpc>
+              <a:spcAft>
+                <a:spcPts val="600"/>
+              </a:spcAft>
+              <a:defRPr>
+                <a:latin typeface="Microsoft JhengHei"/>
+              </a:defRPr>
+            </a:pPr>
+            <a:r>
+              <a:rPr sz="1800">
+                <a:solidFill>
+                  <a:srgbClr val="1F2328"/>
+                </a:solidFill>
+                <a:latin typeface="Microsoft JhengHei"/>
+              </a:rPr>
+              <a:t>2. </a:t>
+            </a:r>
+            <a:r>
+              <a:rPr sz="1800" b="1">
+                <a:solidFill>
+                  <a:srgbClr val="F05032"/>
+                </a:solidFill>
+                <a:latin typeface="Consolas"/>
+              </a:rPr>
+              <a:t>git add &lt;檔名&gt;</a:t>
+            </a:r>
+            <a:r>
+              <a:rPr sz="1800">
+                <a:solidFill>
+                  <a:srgbClr val="1F2328"/>
+                </a:solidFill>
+                <a:latin typeface="Microsoft JhengHei"/>
+              </a:rPr>
+              <a:t> 代表衝突已解決</a:t>
             </a:r>
           </a:p>
           <a:p>
             <a:pPr lvl="1">
-              <a:spcAft>
-                <a:spcPts val="1000"/>
-              </a:spcAft>
-              <a:defRPr sz="1800">
-                <a:solidFill>
-                  <a:srgbClr val="FFFFFF"/>
-                </a:solidFill>
-                <a:latin typeface="Microsoft JhengHei"/>
-              </a:defRPr>
-            </a:pPr>
-            <a:r>
-              <a:t>3. 輸入 `git commit` 完成合併提交</a:t>
+              <a:lnSpc>
+                <a:spcPct val="125000"/>
+              </a:lnSpc>
+              <a:spcAft>
+                <a:spcPts val="600"/>
+              </a:spcAft>
+              <a:defRPr>
+                <a:latin typeface="Microsoft JhengHei"/>
+              </a:defRPr>
+            </a:pPr>
+            <a:r>
+              <a:rPr sz="1800">
+                <a:solidFill>
+                  <a:srgbClr val="1F2328"/>
+                </a:solidFill>
+                <a:latin typeface="Microsoft JhengHei"/>
+              </a:rPr>
+              <a:t>3. 輸入 </a:t>
+            </a:r>
+            <a:r>
+              <a:rPr sz="1800" b="1">
+                <a:solidFill>
+                  <a:srgbClr val="F05032"/>
+                </a:solidFill>
+                <a:latin typeface="Consolas"/>
+              </a:rPr>
+              <a:t>git commit</a:t>
+            </a:r>
+            <a:r>
+              <a:rPr sz="1800">
+                <a:solidFill>
+                  <a:srgbClr val="1F2328"/>
+                </a:solidFill>
+                <a:latin typeface="Microsoft JhengHei"/>
+              </a:rPr>
+              <a:t> 完成合併提交</a:t>
             </a:r>
           </a:p>
         </p:txBody>
@@ -5056,7 +6234,7 @@
     <p:bg>
       <p:bgPr>
         <a:solidFill>
-          <a:srgbClr val="0D1117"/>
+          <a:srgbClr val="F6F8FA"/>
         </a:solidFill>
         <a:effectLst/>
       </p:bgPr>
@@ -5070,14 +6248,59 @@
       <p:grpSpPr/>
       <p:sp>
         <p:nvSpPr>
-          <p:cNvPr id="2" name="TextBox 1"/>
+          <p:cNvPr id="2" name="Rectangle 1"/>
+          <p:cNvSpPr/>
+          <p:nvPr/>
+        </p:nvSpPr>
+        <p:spPr>
+          <a:xfrm>
+            <a:off x="731520" y="384048"/>
+            <a:ext cx="91440" cy="502920"/>
+          </a:xfrm>
+          <a:prstGeom prst="rect">
+            <a:avLst/>
+          </a:prstGeom>
+          <a:solidFill>
+            <a:srgbClr val="0366D6"/>
+          </a:solidFill>
+          <a:ln>
+            <a:solidFill>
+              <a:srgbClr val="0366D6"/>
+            </a:solidFill>
+          </a:ln>
+        </p:spPr>
+        <p:style>
+          <a:lnRef idx="1">
+            <a:schemeClr val="accent1"/>
+          </a:lnRef>
+          <a:fillRef idx="3">
+            <a:schemeClr val="accent1"/>
+          </a:fillRef>
+          <a:effectRef idx="2">
+            <a:schemeClr val="accent1"/>
+          </a:effectRef>
+          <a:fontRef idx="minor">
+            <a:schemeClr val="lt1"/>
+          </a:fontRef>
+        </p:style>
+        <p:txBody>
+          <a:bodyPr rtlCol="0" anchor="ctr"/>
+          <a:lstStyle/>
+          <a:p>
+            <a:pPr algn="ctr"/>
+          </a:p>
+        </p:txBody>
+      </p:sp>
+      <p:sp>
+        <p:nvSpPr>
+          <p:cNvPr id="3" name="TextBox 2"/>
           <p:cNvSpPr txBox="1"/>
           <p:nvPr/>
         </p:nvSpPr>
         <p:spPr>
           <a:xfrm>
-            <a:off x="731520" y="365760"/>
-            <a:ext cx="10725912" cy="731520"/>
+            <a:off x="960120" y="320040"/>
+            <a:ext cx="10497312" cy="731520"/>
           </a:xfrm>
           <a:prstGeom prst="rect">
             <a:avLst/>
@@ -5093,7 +6316,7 @@
             <a:pPr>
               <a:defRPr sz="3600" b="1">
                 <a:solidFill>
-                  <a:srgbClr val="58A6FF"/>
+                  <a:srgbClr val="0366D6"/>
                 </a:solidFill>
                 <a:latin typeface="Microsoft JhengHei"/>
               </a:defRPr>
@@ -5106,7 +6329,7 @@
       </p:sp>
       <p:sp>
         <p:nvSpPr>
-          <p:cNvPr id="3" name="Rectangle 2"/>
+          <p:cNvPr id="4" name="Rectangle 3"/>
           <p:cNvSpPr/>
           <p:nvPr/>
         </p:nvSpPr>
@@ -5119,10 +6342,12 @@
             <a:avLst/>
           </a:prstGeom>
           <a:solidFill>
-            <a:srgbClr val="161B22"/>
+            <a:srgbClr val="FFFFFF"/>
           </a:solidFill>
-          <a:ln>
-            <a:noFill/>
+          <a:ln w="19050">
+            <a:solidFill>
+              <a:srgbClr val="DADEE5"/>
+            </a:solidFill>
           </a:ln>
         </p:spPr>
         <p:style>
@@ -5149,7 +6374,7 @@
       </p:sp>
       <p:sp>
         <p:nvSpPr>
-          <p:cNvPr id="4" name="TextBox 3"/>
+          <p:cNvPr id="5" name="TextBox 4"/>
           <p:cNvSpPr txBox="1"/>
           <p:nvPr/>
         </p:nvSpPr>
@@ -5185,7 +6410,7 @@
       </p:sp>
       <p:sp>
         <p:nvSpPr>
-          <p:cNvPr id="5" name="TextBox 4"/>
+          <p:cNvPr id="6" name="TextBox 5"/>
           <p:cNvSpPr txBox="1"/>
           <p:nvPr/>
         </p:nvSpPr>
@@ -5200,71 +6425,194 @@
           <a:noFill/>
         </p:spPr>
         <p:txBody>
-          <a:bodyPr wrap="square" lIns="0" tIns="0" rIns="0" bIns="0">
+          <a:bodyPr wrap="square" lIns="228600" rIns="228600" tIns="228600" bIns="228600">
             <a:spAutoFit/>
           </a:bodyPr>
           <a:lstStyle/>
           <a:p>
             <a:pPr>
-              <a:spcAft>
-                <a:spcPts val="1000"/>
-              </a:spcAft>
-              <a:defRPr sz="1600">
-                <a:solidFill>
-                  <a:srgbClr val="FFFFFF"/>
-                </a:solidFill>
-                <a:latin typeface="Microsoft JhengHei"/>
-              </a:defRPr>
-            </a:pPr>
-            <a:r>
-              <a:t>主分支為 `main` (正式版) 與 `develop` (開發版)</a:t>
+              <a:lnSpc>
+                <a:spcPct val="125000"/>
+              </a:lnSpc>
+              <a:spcAft>
+                <a:spcPts val="600"/>
+              </a:spcAft>
+              <a:defRPr>
+                <a:latin typeface="Microsoft JhengHei"/>
+              </a:defRPr>
+            </a:pPr>
+            <a:r>
+              <a:rPr sz="1600">
+                <a:solidFill>
+                  <a:srgbClr val="1F2328"/>
+                </a:solidFill>
+                <a:latin typeface="Microsoft JhengHei"/>
+              </a:rPr>
+              <a:t>主分支為 </a:t>
+            </a:r>
+            <a:r>
+              <a:rPr sz="1600" b="1">
+                <a:solidFill>
+                  <a:srgbClr val="F05032"/>
+                </a:solidFill>
+                <a:latin typeface="Consolas"/>
+              </a:rPr>
+              <a:t>main</a:t>
+            </a:r>
+            <a:r>
+              <a:rPr sz="1600">
+                <a:solidFill>
+                  <a:srgbClr val="1F2328"/>
+                </a:solidFill>
+                <a:latin typeface="Microsoft JhengHei"/>
+              </a:rPr>
+              <a:t> (正式版) 與 </a:t>
+            </a:r>
+            <a:r>
+              <a:rPr sz="1600" b="1">
+                <a:solidFill>
+                  <a:srgbClr val="F05032"/>
+                </a:solidFill>
+                <a:latin typeface="Consolas"/>
+              </a:rPr>
+              <a:t>develop</a:t>
+            </a:r>
+            <a:r>
+              <a:rPr sz="1600">
+                <a:solidFill>
+                  <a:srgbClr val="1F2328"/>
+                </a:solidFill>
+                <a:latin typeface="Microsoft JhengHei"/>
+              </a:rPr>
+              <a:t> (開發版)</a:t>
             </a:r>
           </a:p>
           <a:p>
             <a:pPr>
-              <a:spcAft>
-                <a:spcPts val="1000"/>
-              </a:spcAft>
-              <a:defRPr sz="1600">
-                <a:solidFill>
-                  <a:srgbClr val="FFFFFF"/>
-                </a:solidFill>
-                <a:latin typeface="Microsoft JhengHei"/>
-              </a:defRPr>
-            </a:pPr>
-            <a:r>
-              <a:t>開發功能時從 `develop` 分出 `feature/` 分支</a:t>
+              <a:lnSpc>
+                <a:spcPct val="125000"/>
+              </a:lnSpc>
+              <a:spcAft>
+                <a:spcPts val="600"/>
+              </a:spcAft>
+              <a:defRPr>
+                <a:latin typeface="Microsoft JhengHei"/>
+              </a:defRPr>
+            </a:pPr>
+            <a:r>
+              <a:rPr sz="1600">
+                <a:solidFill>
+                  <a:srgbClr val="1F2328"/>
+                </a:solidFill>
+                <a:latin typeface="Microsoft JhengHei"/>
+              </a:rPr>
+              <a:t>開發功能時從 </a:t>
+            </a:r>
+            <a:r>
+              <a:rPr sz="1600" b="1">
+                <a:solidFill>
+                  <a:srgbClr val="F05032"/>
+                </a:solidFill>
+                <a:latin typeface="Consolas"/>
+              </a:rPr>
+              <a:t>develop</a:t>
+            </a:r>
+            <a:r>
+              <a:rPr sz="1600">
+                <a:solidFill>
+                  <a:srgbClr val="1F2328"/>
+                </a:solidFill>
+                <a:latin typeface="Microsoft JhengHei"/>
+              </a:rPr>
+              <a:t> 分出 </a:t>
+            </a:r>
+            <a:r>
+              <a:rPr sz="1600" b="1">
+                <a:solidFill>
+                  <a:srgbClr val="F05032"/>
+                </a:solidFill>
+                <a:latin typeface="Consolas"/>
+              </a:rPr>
+              <a:t>feature/</a:t>
+            </a:r>
+            <a:r>
+              <a:rPr sz="1600">
+                <a:solidFill>
+                  <a:srgbClr val="1F2328"/>
+                </a:solidFill>
+                <a:latin typeface="Microsoft JhengHei"/>
+              </a:rPr>
+              <a:t> 分支</a:t>
             </a:r>
           </a:p>
           <a:p>
             <a:pPr>
-              <a:spcAft>
-                <a:spcPts val="1000"/>
-              </a:spcAft>
-              <a:defRPr sz="1600">
-                <a:solidFill>
-                  <a:srgbClr val="FFFFFF"/>
-                </a:solidFill>
-                <a:latin typeface="Microsoft JhengHei"/>
-              </a:defRPr>
-            </a:pPr>
-            <a:r>
-              <a:t>準備發行時使用 `release/`，修 bug 使用 `hotfix/`</a:t>
+              <a:lnSpc>
+                <a:spcPct val="125000"/>
+              </a:lnSpc>
+              <a:spcAft>
+                <a:spcPts val="600"/>
+              </a:spcAft>
+              <a:defRPr>
+                <a:latin typeface="Microsoft JhengHei"/>
+              </a:defRPr>
+            </a:pPr>
+            <a:r>
+              <a:rPr sz="1600">
+                <a:solidFill>
+                  <a:srgbClr val="1F2328"/>
+                </a:solidFill>
+                <a:latin typeface="Microsoft JhengHei"/>
+              </a:rPr>
+              <a:t>準備發行時使用 </a:t>
+            </a:r>
+            <a:r>
+              <a:rPr sz="1600" b="1">
+                <a:solidFill>
+                  <a:srgbClr val="F05032"/>
+                </a:solidFill>
+                <a:latin typeface="Consolas"/>
+              </a:rPr>
+              <a:t>release/</a:t>
+            </a:r>
+            <a:r>
+              <a:rPr sz="1600">
+                <a:solidFill>
+                  <a:srgbClr val="1F2328"/>
+                </a:solidFill>
+                <a:latin typeface="Microsoft JhengHei"/>
+              </a:rPr>
+              <a:t>，修 bug 使用 </a:t>
+            </a:r>
+            <a:r>
+              <a:rPr sz="1600" b="1">
+                <a:solidFill>
+                  <a:srgbClr val="F05032"/>
+                </a:solidFill>
+                <a:latin typeface="Consolas"/>
+              </a:rPr>
+              <a:t>hotfix/</a:t>
             </a:r>
           </a:p>
           <a:p>
             <a:pPr>
-              <a:spcAft>
-                <a:spcPts val="1000"/>
-              </a:spcAft>
-              <a:defRPr sz="1600">
-                <a:solidFill>
-                  <a:srgbClr val="FFFFFF"/>
-                </a:solidFill>
-                <a:latin typeface="Microsoft JhengHei"/>
-              </a:defRPr>
-            </a:pPr>
-            <a:r>
+              <a:lnSpc>
+                <a:spcPct val="125000"/>
+              </a:lnSpc>
+              <a:spcAft>
+                <a:spcPts val="600"/>
+              </a:spcAft>
+              <a:defRPr>
+                <a:latin typeface="Microsoft JhengHei"/>
+              </a:defRPr>
+            </a:pPr>
+            <a:r>
+              <a:rPr sz="1600">
+                <a:solidFill>
+                  <a:srgbClr val="1F2328"/>
+                </a:solidFill>
+                <a:latin typeface="Microsoft JhengHei"/>
+              </a:rPr>
               <a:t>結構清晰但流程繁雜，適合大型專案與有固定產品發行週期的團隊</a:t>
             </a:r>
           </a:p>
@@ -5272,7 +6620,7 @@
       </p:sp>
       <p:sp>
         <p:nvSpPr>
-          <p:cNvPr id="6" name="Rectangle 5"/>
+          <p:cNvPr id="7" name="Rectangle 6"/>
           <p:cNvSpPr/>
           <p:nvPr/>
         </p:nvSpPr>
@@ -5285,10 +6633,12 @@
             <a:avLst/>
           </a:prstGeom>
           <a:solidFill>
-            <a:srgbClr val="161B22"/>
+            <a:srgbClr val="FFFFFF"/>
           </a:solidFill>
-          <a:ln>
-            <a:noFill/>
+          <a:ln w="19050">
+            <a:solidFill>
+              <a:srgbClr val="DADEE5"/>
+            </a:solidFill>
           </a:ln>
         </p:spPr>
         <p:style>
@@ -5315,7 +6665,7 @@
       </p:sp>
       <p:sp>
         <p:nvSpPr>
-          <p:cNvPr id="7" name="TextBox 6"/>
+          <p:cNvPr id="8" name="TextBox 7"/>
           <p:cNvSpPr txBox="1"/>
           <p:nvPr/>
         </p:nvSpPr>
@@ -5338,7 +6688,7 @@
             <a:pPr>
               <a:defRPr sz="2200" b="1">
                 <a:solidFill>
-                  <a:srgbClr val="8B949E"/>
+                  <a:srgbClr val="57606A"/>
                 </a:solidFill>
                 <a:latin typeface="Microsoft JhengHei"/>
               </a:defRPr>
@@ -5351,7 +6701,7 @@
       </p:sp>
       <p:sp>
         <p:nvSpPr>
-          <p:cNvPr id="8" name="TextBox 7"/>
+          <p:cNvPr id="9" name="TextBox 8"/>
           <p:cNvSpPr txBox="1"/>
           <p:nvPr/>
         </p:nvSpPr>
@@ -5366,72 +6716,168 @@
           <a:noFill/>
         </p:spPr>
         <p:txBody>
-          <a:bodyPr wrap="square" lIns="0" tIns="0" rIns="0" bIns="0">
+          <a:bodyPr wrap="square" lIns="228600" rIns="228600" tIns="228600" bIns="228600">
             <a:spAutoFit/>
           </a:bodyPr>
           <a:lstStyle/>
           <a:p>
             <a:pPr>
-              <a:spcAft>
-                <a:spcPts val="1000"/>
-              </a:spcAft>
-              <a:defRPr sz="1600">
-                <a:solidFill>
-                  <a:srgbClr val="FFFFFF"/>
-                </a:solidFill>
-                <a:latin typeface="Microsoft JhengHei"/>
-              </a:defRPr>
-            </a:pPr>
-            <a:r>
-              <a:t>只有一條主要分支 `main`，且隨時保持可部署狀態</a:t>
+              <a:lnSpc>
+                <a:spcPct val="125000"/>
+              </a:lnSpc>
+              <a:spcAft>
+                <a:spcPts val="600"/>
+              </a:spcAft>
+              <a:defRPr>
+                <a:latin typeface="Microsoft JhengHei"/>
+              </a:defRPr>
+            </a:pPr>
+            <a:r>
+              <a:rPr sz="1600">
+                <a:solidFill>
+                  <a:srgbClr val="1F2328"/>
+                </a:solidFill>
+                <a:latin typeface="Microsoft JhengHei"/>
+              </a:rPr>
+              <a:t>只有一條主要分支 </a:t>
+            </a:r>
+            <a:r>
+              <a:rPr sz="1600" b="1">
+                <a:solidFill>
+                  <a:srgbClr val="F05032"/>
+                </a:solidFill>
+                <a:latin typeface="Consolas"/>
+              </a:rPr>
+              <a:t>main</a:t>
+            </a:r>
+            <a:r>
+              <a:rPr sz="1600">
+                <a:solidFill>
+                  <a:srgbClr val="1F2328"/>
+                </a:solidFill>
+                <a:latin typeface="Microsoft JhengHei"/>
+              </a:rPr>
+              <a:t>，且隨時保持可部署狀態</a:t>
             </a:r>
           </a:p>
           <a:p>
             <a:pPr>
-              <a:spcAft>
-                <a:spcPts val="1000"/>
-              </a:spcAft>
-              <a:defRPr sz="1600">
-                <a:solidFill>
-                  <a:srgbClr val="FFFFFF"/>
-                </a:solidFill>
-                <a:latin typeface="Microsoft JhengHei"/>
-              </a:defRPr>
-            </a:pPr>
-            <a:r>
-              <a:t>要開發功能時直接從 `main` 分出 `feature-xxx` 分支</a:t>
+              <a:lnSpc>
+                <a:spcPct val="125000"/>
+              </a:lnSpc>
+              <a:spcAft>
+                <a:spcPts val="600"/>
+              </a:spcAft>
+              <a:defRPr>
+                <a:latin typeface="Microsoft JhengHei"/>
+              </a:defRPr>
+            </a:pPr>
+            <a:r>
+              <a:rPr sz="1600">
+                <a:solidFill>
+                  <a:srgbClr val="1F2328"/>
+                </a:solidFill>
+                <a:latin typeface="Microsoft JhengHei"/>
+              </a:rPr>
+              <a:t>要開發功能時直接從 </a:t>
+            </a:r>
+            <a:r>
+              <a:rPr sz="1600" b="1">
+                <a:solidFill>
+                  <a:srgbClr val="F05032"/>
+                </a:solidFill>
+                <a:latin typeface="Consolas"/>
+              </a:rPr>
+              <a:t>main</a:t>
+            </a:r>
+            <a:r>
+              <a:rPr sz="1600">
+                <a:solidFill>
+                  <a:srgbClr val="1F2328"/>
+                </a:solidFill>
+                <a:latin typeface="Microsoft JhengHei"/>
+              </a:rPr>
+              <a:t> 分出 </a:t>
+            </a:r>
+            <a:r>
+              <a:rPr sz="1600" b="1">
+                <a:solidFill>
+                  <a:srgbClr val="F05032"/>
+                </a:solidFill>
+                <a:latin typeface="Consolas"/>
+              </a:rPr>
+              <a:t>feature-xxx</a:t>
+            </a:r>
+            <a:r>
+              <a:rPr sz="1600">
+                <a:solidFill>
+                  <a:srgbClr val="1F2328"/>
+                </a:solidFill>
+                <a:latin typeface="Microsoft JhengHei"/>
+              </a:rPr>
+              <a:t> 分支</a:t>
             </a:r>
           </a:p>
           <a:p>
             <a:pPr>
-              <a:spcAft>
-                <a:spcPts val="1000"/>
-              </a:spcAft>
-              <a:defRPr sz="1600">
-                <a:solidFill>
-                  <a:srgbClr val="FFFFFF"/>
-                </a:solidFill>
-                <a:latin typeface="Microsoft JhengHei"/>
-              </a:defRPr>
-            </a:pPr>
-            <a:r>
+              <a:lnSpc>
+                <a:spcPct val="125000"/>
+              </a:lnSpc>
+              <a:spcAft>
+                <a:spcPts val="600"/>
+              </a:spcAft>
+              <a:defRPr>
+                <a:latin typeface="Microsoft JhengHei"/>
+              </a:defRPr>
+            </a:pPr>
+            <a:r>
+              <a:rPr sz="1600">
+                <a:solidFill>
+                  <a:srgbClr val="1F2328"/>
+                </a:solidFill>
+                <a:latin typeface="Microsoft JhengHei"/>
+              </a:rPr>
               <a:t>開發完成推送至雲端，發起 Pull Request (PR) 進行代碼審查</a:t>
             </a:r>
           </a:p>
           <a:p>
             <a:pPr>
-              <a:spcAft>
-                <a:spcPts val="1000"/>
-              </a:spcAft>
-              <a:defRPr sz="1600">
-                <a:solidFill>
-                  <a:srgbClr val="FFFFFF"/>
-                </a:solidFill>
-                <a:latin typeface="Microsoft JhengHei"/>
-              </a:defRPr>
-            </a:pPr>
-            <a:r>
-              <a:t>審查通過直接合併回 `main` 並自動部署，流程極簡</a:t>
+              <a:lnSpc>
+                <a:spcPct val="125000"/>
+              </a:lnSpc>
+              <a:spcAft>
+                <a:spcPts val="600"/>
+              </a:spcAft>
+              <a:defRPr>
+                <a:latin typeface="Microsoft JhengHei"/>
+              </a:defRPr>
+            </a:pPr>
+            <a:r>
+              <a:rPr sz="1600">
+                <a:solidFill>
+                  <a:srgbClr val="1F2328"/>
+                </a:solidFill>
+                <a:latin typeface="Microsoft JhengHei"/>
+              </a:rPr>
+              <a:t>審查通過直接合併回 </a:t>
+            </a:r>
+            <a:r>
+              <a:rPr sz="1600" b="1">
+                <a:solidFill>
+                  <a:srgbClr val="F05032"/>
+                </a:solidFill>
+                <a:latin typeface="Consolas"/>
+              </a:rPr>
+              <a:t>main</a:t>
+            </a:r>
+            <a:r>
+              <a:rPr sz="1600">
+                <a:solidFill>
+                  <a:srgbClr val="1F2328"/>
+                </a:solidFill>
+                <a:latin typeface="Microsoft JhengHei"/>
+              </a:rPr>
+              <a:t> 並自動部署，流程極簡</a:t>
             </a:r>
           </a:p>
         </p:txBody>
@@ -5490,7 +6936,7 @@
               </a:spcAft>
               <a:defRPr sz="4800" b="1">
                 <a:solidFill>
-                  <a:srgbClr val="FFFFFF"/>
+                  <a:srgbClr val="1F2328"/>
                 </a:solidFill>
                 <a:latin typeface="Microsoft JhengHei"/>
               </a:defRPr>
@@ -5503,7 +6949,7 @@
             <a:pPr algn="ctr">
               <a:defRPr sz="2000">
                 <a:solidFill>
-                  <a:srgbClr val="8B949E"/>
+                  <a:srgbClr val="57606A"/>
                 </a:solidFill>
                 <a:latin typeface="Microsoft JhengHei"/>
               </a:defRPr>
@@ -5528,7 +6974,7 @@
     <p:bg>
       <p:bgPr>
         <a:solidFill>
-          <a:srgbClr val="0D1117"/>
+          <a:srgbClr val="F6F8FA"/>
         </a:solidFill>
         <a:effectLst/>
       </p:bgPr>
@@ -5542,14 +6988,59 @@
       <p:grpSpPr/>
       <p:sp>
         <p:nvSpPr>
-          <p:cNvPr id="2" name="TextBox 1"/>
+          <p:cNvPr id="2" name="Rectangle 1"/>
+          <p:cNvSpPr/>
+          <p:nvPr/>
+        </p:nvSpPr>
+        <p:spPr>
+          <a:xfrm>
+            <a:off x="731520" y="384048"/>
+            <a:ext cx="91440" cy="502920"/>
+          </a:xfrm>
+          <a:prstGeom prst="rect">
+            <a:avLst/>
+          </a:prstGeom>
+          <a:solidFill>
+            <a:srgbClr val="0366D6"/>
+          </a:solidFill>
+          <a:ln>
+            <a:solidFill>
+              <a:srgbClr val="0366D6"/>
+            </a:solidFill>
+          </a:ln>
+        </p:spPr>
+        <p:style>
+          <a:lnRef idx="1">
+            <a:schemeClr val="accent1"/>
+          </a:lnRef>
+          <a:fillRef idx="3">
+            <a:schemeClr val="accent1"/>
+          </a:fillRef>
+          <a:effectRef idx="2">
+            <a:schemeClr val="accent1"/>
+          </a:effectRef>
+          <a:fontRef idx="minor">
+            <a:schemeClr val="lt1"/>
+          </a:fontRef>
+        </p:style>
+        <p:txBody>
+          <a:bodyPr rtlCol="0" anchor="ctr"/>
+          <a:lstStyle/>
+          <a:p>
+            <a:pPr algn="ctr"/>
+          </a:p>
+        </p:txBody>
+      </p:sp>
+      <p:sp>
+        <p:nvSpPr>
+          <p:cNvPr id="3" name="TextBox 2"/>
           <p:cNvSpPr txBox="1"/>
           <p:nvPr/>
         </p:nvSpPr>
         <p:spPr>
           <a:xfrm>
-            <a:off x="731520" y="365760"/>
-            <a:ext cx="10725912" cy="731520"/>
+            <a:off x="960120" y="320040"/>
+            <a:ext cx="10497312" cy="731520"/>
           </a:xfrm>
           <a:prstGeom prst="rect">
             <a:avLst/>
@@ -5565,7 +7056,7 @@
             <a:pPr>
               <a:defRPr sz="3600" b="1">
                 <a:solidFill>
-                  <a:srgbClr val="58A6FF"/>
+                  <a:srgbClr val="0366D6"/>
                 </a:solidFill>
                 <a:latin typeface="Microsoft JhengHei"/>
               </a:defRPr>
@@ -5578,7 +7069,7 @@
       </p:sp>
       <p:sp>
         <p:nvSpPr>
-          <p:cNvPr id="3" name="Rectangle 2"/>
+          <p:cNvPr id="4" name="Rectangle 3"/>
           <p:cNvSpPr/>
           <p:nvPr/>
         </p:nvSpPr>
@@ -5591,10 +7082,12 @@
             <a:avLst/>
           </a:prstGeom>
           <a:solidFill>
-            <a:srgbClr val="161B22"/>
+            <a:srgbClr val="FFFFFF"/>
           </a:solidFill>
-          <a:ln>
-            <a:noFill/>
+          <a:ln w="19050">
+            <a:solidFill>
+              <a:srgbClr val="DADEE5"/>
+            </a:solidFill>
           </a:ln>
         </p:spPr>
         <p:style>
@@ -5621,7 +7114,7 @@
       </p:sp>
       <p:sp>
         <p:nvSpPr>
-          <p:cNvPr id="4" name="TextBox 3"/>
+          <p:cNvPr id="5" name="TextBox 4"/>
           <p:cNvSpPr txBox="1"/>
           <p:nvPr/>
         </p:nvSpPr>
@@ -5636,120 +7129,243 @@
           <a:noFill/>
         </p:spPr>
         <p:txBody>
-          <a:bodyPr wrap="square" lIns="0" tIns="0" rIns="0" bIns="0">
+          <a:bodyPr wrap="square" lIns="228600" rIns="228600" tIns="228600" bIns="228600">
             <a:spAutoFit/>
           </a:bodyPr>
           <a:lstStyle/>
           <a:p>
             <a:pPr>
-              <a:spcAft>
-                <a:spcPts val="1000"/>
-              </a:spcAft>
-              <a:defRPr sz="2000">
-                <a:solidFill>
-                  <a:srgbClr val="FFFFFF"/>
-                </a:solidFill>
-                <a:latin typeface="Microsoft JhengHei"/>
-              </a:defRPr>
-            </a:pPr>
-            <a:r>
-              <a:t>**電玩遊戲的存檔**：玩遊戲時，我們可以隨時存檔。改錯了、玩壞了，隨時可以讀取存檔回到過去。</a:t>
+              <a:lnSpc>
+                <a:spcPct val="125000"/>
+              </a:lnSpc>
+              <a:spcAft>
+                <a:spcPts val="600"/>
+              </a:spcAft>
+              <a:defRPr>
+                <a:latin typeface="Microsoft JhengHei"/>
+              </a:defRPr>
+            </a:pPr>
+            <a:r>
+              <a:rPr sz="2000" b="1">
+                <a:solidFill>
+                  <a:srgbClr val="1F2328"/>
+                </a:solidFill>
+                <a:latin typeface="Microsoft JhengHei"/>
+              </a:rPr>
+              <a:t>電玩遊戲的存檔</a:t>
+            </a:r>
+            <a:r>
+              <a:rPr sz="2000">
+                <a:solidFill>
+                  <a:srgbClr val="1F2328"/>
+                </a:solidFill>
+                <a:latin typeface="Microsoft JhengHei"/>
+              </a:rPr>
+              <a:t>：玩遊戲時，我們可以隨時存檔。改錯了、玩壞了，隨時可以讀取存檔回到過去。</a:t>
             </a:r>
           </a:p>
           <a:p>
             <a:pPr>
-              <a:spcAft>
-                <a:spcPts val="1000"/>
-              </a:spcAft>
-              <a:defRPr sz="2000">
-                <a:solidFill>
-                  <a:srgbClr val="FFFFFF"/>
-                </a:solidFill>
-                <a:latin typeface="Microsoft JhengHei"/>
-              </a:defRPr>
-            </a:pPr>
-            <a:r>
-              <a:t>**沒有版本控制的悲劇**：</a:t>
+              <a:lnSpc>
+                <a:spcPct val="125000"/>
+              </a:lnSpc>
+              <a:spcAft>
+                <a:spcPts val="600"/>
+              </a:spcAft>
+              <a:defRPr>
+                <a:latin typeface="Microsoft JhengHei"/>
+              </a:defRPr>
+            </a:pPr>
+            <a:r>
+              <a:rPr sz="2000" b="1">
+                <a:solidFill>
+                  <a:srgbClr val="1F2328"/>
+                </a:solidFill>
+                <a:latin typeface="Microsoft JhengHei"/>
+              </a:rPr>
+              <a:t>沒有版本控制的悲劇</a:t>
+            </a:r>
+            <a:r>
+              <a:rPr sz="2000">
+                <a:solidFill>
+                  <a:srgbClr val="1F2328"/>
+                </a:solidFill>
+                <a:latin typeface="Microsoft JhengHei"/>
+              </a:rPr>
+              <a:t>：</a:t>
             </a:r>
           </a:p>
           <a:p>
             <a:pPr lvl="1">
-              <a:spcAft>
-                <a:spcPts val="1000"/>
-              </a:spcAft>
-              <a:defRPr sz="1800">
-                <a:solidFill>
-                  <a:srgbClr val="FFFFFF"/>
-                </a:solidFill>
-                <a:latin typeface="Microsoft JhengHei"/>
-              </a:defRPr>
-            </a:pPr>
-            <a:r>
+              <a:lnSpc>
+                <a:spcPct val="125000"/>
+              </a:lnSpc>
+              <a:spcAft>
+                <a:spcPts val="600"/>
+              </a:spcAft>
+              <a:defRPr>
+                <a:latin typeface="Microsoft JhengHei"/>
+              </a:defRPr>
+            </a:pPr>
+            <a:r>
+              <a:rPr sz="1800">
+                <a:solidFill>
+                  <a:srgbClr val="1F2328"/>
+                </a:solidFill>
+                <a:latin typeface="Microsoft JhengHei"/>
+              </a:rPr>
               <a:t>報告名稱變成：「報告_最終版.doc」、「報告_真的最終版.doc」、「報告_打死不改最終版.doc」</a:t>
             </a:r>
           </a:p>
           <a:p>
             <a:pPr>
-              <a:spcAft>
-                <a:spcPts val="1000"/>
-              </a:spcAft>
-              <a:defRPr sz="2000">
-                <a:solidFill>
-                  <a:srgbClr val="FFFFFF"/>
-                </a:solidFill>
-                <a:latin typeface="Microsoft JhengHei"/>
-              </a:defRPr>
-            </a:pPr>
-            <a:r>
-              <a:t>**版本控制系統 (VCS) 的優勢**：</a:t>
+              <a:lnSpc>
+                <a:spcPct val="125000"/>
+              </a:lnSpc>
+              <a:spcAft>
+                <a:spcPts val="600"/>
+              </a:spcAft>
+              <a:defRPr>
+                <a:latin typeface="Microsoft JhengHei"/>
+              </a:defRPr>
+            </a:pPr>
+            <a:r>
+              <a:rPr sz="2000" b="1">
+                <a:solidFill>
+                  <a:srgbClr val="1F2328"/>
+                </a:solidFill>
+                <a:latin typeface="Microsoft JhengHei"/>
+              </a:rPr>
+              <a:t>版本控制系統 (VCS) 的優勢</a:t>
+            </a:r>
+            <a:r>
+              <a:rPr sz="2000">
+                <a:solidFill>
+                  <a:srgbClr val="1F2328"/>
+                </a:solidFill>
+                <a:latin typeface="Microsoft JhengHei"/>
+              </a:rPr>
+              <a:t>：</a:t>
             </a:r>
           </a:p>
           <a:p>
             <a:pPr lvl="1">
-              <a:spcAft>
-                <a:spcPts val="1000"/>
-              </a:spcAft>
-              <a:defRPr sz="1800">
-                <a:solidFill>
-                  <a:srgbClr val="FFFFFF"/>
-                </a:solidFill>
-                <a:latin typeface="Microsoft JhengHei"/>
-              </a:defRPr>
-            </a:pPr>
-            <a:r>
-              <a:t>1. **詳細記錄**：誰在什麼時候修改了檔案的哪一行，一目了然</a:t>
+              <a:lnSpc>
+                <a:spcPct val="125000"/>
+              </a:lnSpc>
+              <a:spcAft>
+                <a:spcPts val="600"/>
+              </a:spcAft>
+              <a:defRPr>
+                <a:latin typeface="Microsoft JhengHei"/>
+              </a:defRPr>
+            </a:pPr>
+            <a:r>
+              <a:rPr sz="1800">
+                <a:solidFill>
+                  <a:srgbClr val="1F2328"/>
+                </a:solidFill>
+                <a:latin typeface="Microsoft JhengHei"/>
+              </a:rPr>
+              <a:t>1. </a:t>
+            </a:r>
+            <a:r>
+              <a:rPr sz="1800" b="1">
+                <a:solidFill>
+                  <a:srgbClr val="1F2328"/>
+                </a:solidFill>
+                <a:latin typeface="Microsoft JhengHei"/>
+              </a:rPr>
+              <a:t>詳細記錄</a:t>
+            </a:r>
+            <a:r>
+              <a:rPr sz="1800">
+                <a:solidFill>
+                  <a:srgbClr val="1F2328"/>
+                </a:solidFill>
+                <a:latin typeface="Microsoft JhengHei"/>
+              </a:rPr>
+              <a:t>：誰在什麼時候修改了檔案的哪一行，一目了然</a:t>
             </a:r>
           </a:p>
           <a:p>
             <a:pPr lvl="1">
-              <a:spcAft>
-                <a:spcPts val="1000"/>
-              </a:spcAft>
-              <a:defRPr sz="1800">
-                <a:solidFill>
-                  <a:srgbClr val="FFFFFF"/>
-                </a:solidFill>
-                <a:latin typeface="Microsoft JhengHei"/>
-              </a:defRPr>
-            </a:pPr>
-            <a:r>
-              <a:t>2. **時光機**：隨時可以復原到過去的任一個歷史版本</a:t>
+              <a:lnSpc>
+                <a:spcPct val="125000"/>
+              </a:lnSpc>
+              <a:spcAft>
+                <a:spcPts val="600"/>
+              </a:spcAft>
+              <a:defRPr>
+                <a:latin typeface="Microsoft JhengHei"/>
+              </a:defRPr>
+            </a:pPr>
+            <a:r>
+              <a:rPr sz="1800">
+                <a:solidFill>
+                  <a:srgbClr val="1F2328"/>
+                </a:solidFill>
+                <a:latin typeface="Microsoft JhengHei"/>
+              </a:rPr>
+              <a:t>2. </a:t>
+            </a:r>
+            <a:r>
+              <a:rPr sz="1800" b="1">
+                <a:solidFill>
+                  <a:srgbClr val="1F2328"/>
+                </a:solidFill>
+                <a:latin typeface="Microsoft JhengHei"/>
+              </a:rPr>
+              <a:t>時光機</a:t>
+            </a:r>
+            <a:r>
+              <a:rPr sz="1800">
+                <a:solidFill>
+                  <a:srgbClr val="1F2328"/>
+                </a:solidFill>
+                <a:latin typeface="Microsoft JhengHei"/>
+              </a:rPr>
+              <a:t>：隨時可以復原到過去的任一個歷史版本</a:t>
             </a:r>
           </a:p>
           <a:p>
             <a:pPr lvl="1">
-              <a:spcAft>
-                <a:spcPts val="1000"/>
-              </a:spcAft>
-              <a:defRPr sz="1800">
-                <a:solidFill>
-                  <a:srgbClr val="FFFFFF"/>
-                </a:solidFill>
-                <a:latin typeface="Microsoft JhengHei"/>
-              </a:defRPr>
-            </a:pPr>
-            <a:r>
-              <a:t>3. **團隊協作**：多人修改同一個檔案時，系統會智慧合併</a:t>
+              <a:lnSpc>
+                <a:spcPct val="125000"/>
+              </a:lnSpc>
+              <a:spcAft>
+                <a:spcPts val="600"/>
+              </a:spcAft>
+              <a:defRPr>
+                <a:latin typeface="Microsoft JhengHei"/>
+              </a:defRPr>
+            </a:pPr>
+            <a:r>
+              <a:rPr sz="1800">
+                <a:solidFill>
+                  <a:srgbClr val="1F2328"/>
+                </a:solidFill>
+                <a:latin typeface="Microsoft JhengHei"/>
+              </a:rPr>
+              <a:t>3. </a:t>
+            </a:r>
+            <a:r>
+              <a:rPr sz="1800" b="1">
+                <a:solidFill>
+                  <a:srgbClr val="1F2328"/>
+                </a:solidFill>
+                <a:latin typeface="Microsoft JhengHei"/>
+              </a:rPr>
+              <a:t>團隊協作</a:t>
+            </a:r>
+            <a:r>
+              <a:rPr sz="1800">
+                <a:solidFill>
+                  <a:srgbClr val="1F2328"/>
+                </a:solidFill>
+                <a:latin typeface="Microsoft JhengHei"/>
+              </a:rPr>
+              <a:t>：多人修改同一個檔案時，系統會智慧合併</a:t>
             </a:r>
           </a:p>
         </p:txBody>
@@ -5768,7 +7384,7 @@
     <p:bg>
       <p:bgPr>
         <a:solidFill>
-          <a:srgbClr val="0D1117"/>
+          <a:srgbClr val="F6F8FA"/>
         </a:solidFill>
         <a:effectLst/>
       </p:bgPr>
@@ -5782,14 +7398,59 @@
       <p:grpSpPr/>
       <p:sp>
         <p:nvSpPr>
-          <p:cNvPr id="2" name="TextBox 1"/>
+          <p:cNvPr id="2" name="Rectangle 1"/>
+          <p:cNvSpPr/>
+          <p:nvPr/>
+        </p:nvSpPr>
+        <p:spPr>
+          <a:xfrm>
+            <a:off x="731520" y="384048"/>
+            <a:ext cx="91440" cy="502920"/>
+          </a:xfrm>
+          <a:prstGeom prst="rect">
+            <a:avLst/>
+          </a:prstGeom>
+          <a:solidFill>
+            <a:srgbClr val="0366D6"/>
+          </a:solidFill>
+          <a:ln>
+            <a:solidFill>
+              <a:srgbClr val="0366D6"/>
+            </a:solidFill>
+          </a:ln>
+        </p:spPr>
+        <p:style>
+          <a:lnRef idx="1">
+            <a:schemeClr val="accent1"/>
+          </a:lnRef>
+          <a:fillRef idx="3">
+            <a:schemeClr val="accent1"/>
+          </a:fillRef>
+          <a:effectRef idx="2">
+            <a:schemeClr val="accent1"/>
+          </a:effectRef>
+          <a:fontRef idx="minor">
+            <a:schemeClr val="lt1"/>
+          </a:fontRef>
+        </p:style>
+        <p:txBody>
+          <a:bodyPr rtlCol="0" anchor="ctr"/>
+          <a:lstStyle/>
+          <a:p>
+            <a:pPr algn="ctr"/>
+          </a:p>
+        </p:txBody>
+      </p:sp>
+      <p:sp>
+        <p:nvSpPr>
+          <p:cNvPr id="3" name="TextBox 2"/>
           <p:cNvSpPr txBox="1"/>
           <p:nvPr/>
         </p:nvSpPr>
         <p:spPr>
           <a:xfrm>
-            <a:off x="731520" y="365760"/>
-            <a:ext cx="10725912" cy="731520"/>
+            <a:off x="960120" y="320040"/>
+            <a:ext cx="10497312" cy="731520"/>
           </a:xfrm>
           <a:prstGeom prst="rect">
             <a:avLst/>
@@ -5805,7 +7466,7 @@
             <a:pPr>
               <a:defRPr sz="3600" b="1">
                 <a:solidFill>
-                  <a:srgbClr val="58A6FF"/>
+                  <a:srgbClr val="0366D6"/>
                 </a:solidFill>
                 <a:latin typeface="Microsoft JhengHei"/>
               </a:defRPr>
@@ -5818,7 +7479,7 @@
       </p:sp>
       <p:sp>
         <p:nvSpPr>
-          <p:cNvPr id="3" name="Rectangle 2"/>
+          <p:cNvPr id="4" name="Rectangle 3"/>
           <p:cNvSpPr/>
           <p:nvPr/>
         </p:nvSpPr>
@@ -5831,10 +7492,12 @@
             <a:avLst/>
           </a:prstGeom>
           <a:solidFill>
-            <a:srgbClr val="161B22"/>
+            <a:srgbClr val="FFFFFF"/>
           </a:solidFill>
-          <a:ln>
-            <a:noFill/>
+          <a:ln w="19050">
+            <a:solidFill>
+              <a:srgbClr val="DADEE5"/>
+            </a:solidFill>
           </a:ln>
         </p:spPr>
         <p:style>
@@ -5861,7 +7524,7 @@
       </p:sp>
       <p:sp>
         <p:nvSpPr>
-          <p:cNvPr id="4" name="TextBox 3"/>
+          <p:cNvPr id="5" name="TextBox 4"/>
           <p:cNvSpPr txBox="1"/>
           <p:nvPr/>
         </p:nvSpPr>
@@ -5876,111 +7539,201 @@
           <a:noFill/>
         </p:spPr>
         <p:txBody>
-          <a:bodyPr wrap="square" lIns="0" tIns="0" rIns="0" bIns="0">
+          <a:bodyPr wrap="square" lIns="228600" rIns="228600" tIns="228600" bIns="228600">
             <a:spAutoFit/>
           </a:bodyPr>
           <a:lstStyle/>
           <a:p>
             <a:pPr>
-              <a:spcAft>
-                <a:spcPts val="1000"/>
-              </a:spcAft>
-              <a:defRPr sz="1800">
-                <a:solidFill>
-                  <a:srgbClr val="FFFFFF"/>
-                </a:solidFill>
-                <a:latin typeface="Microsoft JhengHei"/>
-              </a:defRPr>
-            </a:pPr>
-            <a:r>
+              <a:lnSpc>
+                <a:spcPct val="125000"/>
+              </a:lnSpc>
+              <a:spcAft>
+                <a:spcPts val="600"/>
+              </a:spcAft>
+              <a:defRPr>
+                <a:latin typeface="Microsoft JhengHei"/>
+              </a:defRPr>
+            </a:pPr>
+            <a:r>
+              <a:rPr sz="1800">
+                <a:solidFill>
+                  <a:srgbClr val="1F2328"/>
+                </a:solidFill>
+                <a:latin typeface="Microsoft JhengHei"/>
+              </a:rPr>
               <a:t>將本地代碼上傳雲端，或從雲端下載專案：</a:t>
             </a:r>
           </a:p>
           <a:p>
             <a:pPr>
-              <a:spcAft>
-                <a:spcPts val="1000"/>
-              </a:spcAft>
-              <a:defRPr sz="1800">
-                <a:solidFill>
-                  <a:srgbClr val="FFFFFF"/>
-                </a:solidFill>
-                <a:latin typeface="Microsoft JhengHei"/>
-              </a:defRPr>
-            </a:pPr>
-            <a:r>
-              <a:t>**常用指令**：</a:t>
+              <a:lnSpc>
+                <a:spcPct val="125000"/>
+              </a:lnSpc>
+              <a:spcAft>
+                <a:spcPts val="600"/>
+              </a:spcAft>
+              <a:defRPr>
+                <a:latin typeface="Microsoft JhengHei"/>
+              </a:defRPr>
+            </a:pPr>
+            <a:r>
+              <a:rPr sz="1800" b="1">
+                <a:solidFill>
+                  <a:srgbClr val="1F2328"/>
+                </a:solidFill>
+                <a:latin typeface="Microsoft JhengHei"/>
+              </a:rPr>
+              <a:t>常用指令</a:t>
+            </a:r>
+            <a:r>
+              <a:rPr sz="1800">
+                <a:solidFill>
+                  <a:srgbClr val="1F2328"/>
+                </a:solidFill>
+                <a:latin typeface="Microsoft JhengHei"/>
+              </a:rPr>
+              <a:t>：</a:t>
             </a:r>
           </a:p>
           <a:p>
             <a:pPr lvl="1">
-              <a:spcAft>
-                <a:spcPts val="1000"/>
-              </a:spcAft>
-              <a:defRPr sz="1600">
-                <a:solidFill>
-                  <a:srgbClr val="FFFFFF"/>
-                </a:solidFill>
-                <a:latin typeface="Microsoft JhengHei"/>
-              </a:defRPr>
-            </a:pPr>
-            <a:r>
-              <a:t>`git remote add origin &lt;GitHub網址&gt;`: 將本地儲存庫關聯至遠端倉庫</a:t>
+              <a:lnSpc>
+                <a:spcPct val="125000"/>
+              </a:lnSpc>
+              <a:spcAft>
+                <a:spcPts val="600"/>
+              </a:spcAft>
+              <a:defRPr>
+                <a:latin typeface="Microsoft JhengHei"/>
+              </a:defRPr>
+            </a:pPr>
+            <a:r>
+              <a:rPr sz="1600" b="1">
+                <a:solidFill>
+                  <a:srgbClr val="F05032"/>
+                </a:solidFill>
+                <a:latin typeface="Consolas"/>
+              </a:rPr>
+              <a:t>git remote add origin &lt;GitHub網址&gt;</a:t>
+            </a:r>
+            <a:r>
+              <a:rPr sz="1600">
+                <a:solidFill>
+                  <a:srgbClr val="1F2328"/>
+                </a:solidFill>
+                <a:latin typeface="Microsoft JhengHei"/>
+              </a:rPr>
+              <a:t>: 將本地儲存庫關聯至遠端倉庫</a:t>
             </a:r>
           </a:p>
           <a:p>
             <a:pPr lvl="1">
-              <a:spcAft>
-                <a:spcPts val="1000"/>
-              </a:spcAft>
-              <a:defRPr sz="1600">
-                <a:solidFill>
-                  <a:srgbClr val="FFFFFF"/>
-                </a:solidFill>
-                <a:latin typeface="Microsoft JhengHei"/>
-              </a:defRPr>
-            </a:pPr>
-            <a:r>
-              <a:t>`git push -u origin main`: 首次推送 main 分支並設定 upstream，之後只需打 `git push`</a:t>
+              <a:lnSpc>
+                <a:spcPct val="125000"/>
+              </a:lnSpc>
+              <a:spcAft>
+                <a:spcPts val="600"/>
+              </a:spcAft>
+              <a:defRPr>
+                <a:latin typeface="Microsoft JhengHei"/>
+              </a:defRPr>
+            </a:pPr>
+            <a:r>
+              <a:rPr sz="1600" b="1">
+                <a:solidFill>
+                  <a:srgbClr val="F05032"/>
+                </a:solidFill>
+                <a:latin typeface="Consolas"/>
+              </a:rPr>
+              <a:t>git push -u origin main</a:t>
+            </a:r>
+            <a:r>
+              <a:rPr sz="1600">
+                <a:solidFill>
+                  <a:srgbClr val="1F2328"/>
+                </a:solidFill>
+                <a:latin typeface="Microsoft JhengHei"/>
+              </a:rPr>
+              <a:t>: 首次推送 main 分支並設定 upstream，之後只需打 </a:t>
+            </a:r>
+            <a:r>
+              <a:rPr sz="1600" b="1">
+                <a:solidFill>
+                  <a:srgbClr val="F05032"/>
+                </a:solidFill>
+                <a:latin typeface="Consolas"/>
+              </a:rPr>
+              <a:t>git push</a:t>
             </a:r>
           </a:p>
           <a:p>
             <a:pPr lvl="1">
-              <a:spcAft>
-                <a:spcPts val="1000"/>
-              </a:spcAft>
-              <a:defRPr sz="1600">
-                <a:solidFill>
-                  <a:srgbClr val="FFFFFF"/>
-                </a:solidFill>
-                <a:latin typeface="Microsoft JhengHei"/>
-              </a:defRPr>
-            </a:pPr>
-            <a:r>
-              <a:t>`git clone &lt;網址&gt;`: 下載並複製 GitHub 上的專案到本地電腦</a:t>
+              <a:lnSpc>
+                <a:spcPct val="125000"/>
+              </a:lnSpc>
+              <a:spcAft>
+                <a:spcPts val="600"/>
+              </a:spcAft>
+              <a:defRPr>
+                <a:latin typeface="Microsoft JhengHei"/>
+              </a:defRPr>
+            </a:pPr>
+            <a:r>
+              <a:rPr sz="1600" b="1">
+                <a:solidFill>
+                  <a:srgbClr val="F05032"/>
+                </a:solidFill>
+                <a:latin typeface="Consolas"/>
+              </a:rPr>
+              <a:t>git clone &lt;網址&gt;</a:t>
+            </a:r>
+            <a:r>
+              <a:rPr sz="1600">
+                <a:solidFill>
+                  <a:srgbClr val="1F2328"/>
+                </a:solidFill>
+                <a:latin typeface="Microsoft JhengHei"/>
+              </a:rPr>
+              <a:t>: 下載並複製 GitHub 上的專案到本地電腦</a:t>
             </a:r>
           </a:p>
           <a:p>
             <a:pPr lvl="1">
-              <a:spcAft>
-                <a:spcPts val="1000"/>
-              </a:spcAft>
-              <a:defRPr sz="1600">
-                <a:solidFill>
-                  <a:srgbClr val="FFFFFF"/>
-                </a:solidFill>
-                <a:latin typeface="Microsoft JhengHei"/>
-              </a:defRPr>
-            </a:pPr>
-            <a:r>
-              <a:t>`git pull`: 從遠端更新最新提交並自動合併到本地</a:t>
+              <a:lnSpc>
+                <a:spcPct val="125000"/>
+              </a:lnSpc>
+              <a:spcAft>
+                <a:spcPts val="600"/>
+              </a:spcAft>
+              <a:defRPr>
+                <a:latin typeface="Microsoft JhengHei"/>
+              </a:defRPr>
+            </a:pPr>
+            <a:r>
+              <a:rPr sz="1600" b="1">
+                <a:solidFill>
+                  <a:srgbClr val="F05032"/>
+                </a:solidFill>
+                <a:latin typeface="Consolas"/>
+              </a:rPr>
+              <a:t>git pull</a:t>
+            </a:r>
+            <a:r>
+              <a:rPr sz="1600">
+                <a:solidFill>
+                  <a:srgbClr val="1F2328"/>
+                </a:solidFill>
+                <a:latin typeface="Microsoft JhengHei"/>
+              </a:rPr>
+              <a:t>: 從遠端更新最新提交並自動合併到本地</a:t>
             </a:r>
           </a:p>
         </p:txBody>
       </p:sp>
       <p:pic>
         <p:nvPicPr>
-          <p:cNvPr id="5" name="Picture 4" descr="github_collaboration.png"/>
+          <p:cNvPr id="6" name="Picture 5" descr="github_collaboration.png"/>
           <p:cNvPicPr>
             <a:picLocks noChangeAspect="1"/>
           </p:cNvPicPr>
@@ -6016,7 +7769,7 @@
     <p:bg>
       <p:bgPr>
         <a:solidFill>
-          <a:srgbClr val="0D1117"/>
+          <a:srgbClr val="F6F8FA"/>
         </a:solidFill>
         <a:effectLst/>
       </p:bgPr>
@@ -6030,14 +7783,59 @@
       <p:grpSpPr/>
       <p:sp>
         <p:nvSpPr>
-          <p:cNvPr id="2" name="TextBox 1"/>
+          <p:cNvPr id="2" name="Rectangle 1"/>
+          <p:cNvSpPr/>
+          <p:nvPr/>
+        </p:nvSpPr>
+        <p:spPr>
+          <a:xfrm>
+            <a:off x="731520" y="384048"/>
+            <a:ext cx="91440" cy="502920"/>
+          </a:xfrm>
+          <a:prstGeom prst="rect">
+            <a:avLst/>
+          </a:prstGeom>
+          <a:solidFill>
+            <a:srgbClr val="0366D6"/>
+          </a:solidFill>
+          <a:ln>
+            <a:solidFill>
+              <a:srgbClr val="0366D6"/>
+            </a:solidFill>
+          </a:ln>
+        </p:spPr>
+        <p:style>
+          <a:lnRef idx="1">
+            <a:schemeClr val="accent1"/>
+          </a:lnRef>
+          <a:fillRef idx="3">
+            <a:schemeClr val="accent1"/>
+          </a:fillRef>
+          <a:effectRef idx="2">
+            <a:schemeClr val="accent1"/>
+          </a:effectRef>
+          <a:fontRef idx="minor">
+            <a:schemeClr val="lt1"/>
+          </a:fontRef>
+        </p:style>
+        <p:txBody>
+          <a:bodyPr rtlCol="0" anchor="ctr"/>
+          <a:lstStyle/>
+          <a:p>
+            <a:pPr algn="ctr"/>
+          </a:p>
+        </p:txBody>
+      </p:sp>
+      <p:sp>
+        <p:nvSpPr>
+          <p:cNvPr id="3" name="TextBox 2"/>
           <p:cNvSpPr txBox="1"/>
           <p:nvPr/>
         </p:nvSpPr>
         <p:spPr>
           <a:xfrm>
-            <a:off x="731520" y="365760"/>
-            <a:ext cx="10725912" cy="731520"/>
+            <a:off x="960120" y="320040"/>
+            <a:ext cx="10497312" cy="731520"/>
           </a:xfrm>
           <a:prstGeom prst="rect">
             <a:avLst/>
@@ -6053,7 +7851,7 @@
             <a:pPr>
               <a:defRPr sz="3600" b="1">
                 <a:solidFill>
-                  <a:srgbClr val="58A6FF"/>
+                  <a:srgbClr val="0366D6"/>
                 </a:solidFill>
                 <a:latin typeface="Microsoft JhengHei"/>
               </a:defRPr>
@@ -6066,7 +7864,7 @@
       </p:sp>
       <p:sp>
         <p:nvSpPr>
-          <p:cNvPr id="3" name="Rectangle 2"/>
+          <p:cNvPr id="4" name="Rectangle 3"/>
           <p:cNvSpPr/>
           <p:nvPr/>
         </p:nvSpPr>
@@ -6079,10 +7877,12 @@
             <a:avLst/>
           </a:prstGeom>
           <a:solidFill>
-            <a:srgbClr val="161B22"/>
+            <a:srgbClr val="FFFFFF"/>
           </a:solidFill>
-          <a:ln>
-            <a:noFill/>
+          <a:ln w="19050">
+            <a:solidFill>
+              <a:srgbClr val="DADEE5"/>
+            </a:solidFill>
           </a:ln>
         </p:spPr>
         <p:style>
@@ -6109,7 +7909,7 @@
       </p:sp>
       <p:sp>
         <p:nvSpPr>
-          <p:cNvPr id="4" name="TextBox 3"/>
+          <p:cNvPr id="5" name="TextBox 4"/>
           <p:cNvSpPr txBox="1"/>
           <p:nvPr/>
         </p:nvSpPr>
@@ -6124,135 +7924,219 @@
           <a:noFill/>
         </p:spPr>
         <p:txBody>
-          <a:bodyPr wrap="square" lIns="0" tIns="0" rIns="0" bIns="0">
+          <a:bodyPr wrap="square" lIns="228600" rIns="228600" tIns="228600" bIns="228600">
             <a:spAutoFit/>
           </a:bodyPr>
           <a:lstStyle/>
           <a:p>
             <a:pPr>
-              <a:spcAft>
-                <a:spcPts val="1000"/>
-              </a:spcAft>
-              <a:defRPr sz="2000">
-                <a:solidFill>
-                  <a:srgbClr val="FFFFFF"/>
-                </a:solidFill>
-                <a:latin typeface="Microsoft JhengHei"/>
-              </a:defRPr>
-            </a:pPr>
-            <a:r>
+              <a:lnSpc>
+                <a:spcPct val="125000"/>
+              </a:lnSpc>
+              <a:spcAft>
+                <a:spcPts val="600"/>
+              </a:spcAft>
+              <a:defRPr>
+                <a:latin typeface="Microsoft JhengHei"/>
+              </a:defRPr>
+            </a:pPr>
+            <a:r>
+              <a:rPr sz="2000">
+                <a:solidFill>
+                  <a:srgbClr val="1F2328"/>
+                </a:solidFill>
+                <a:latin typeface="Microsoft JhengHei"/>
+              </a:rPr>
               <a:t>GitHub 已停用傳統密碼推送，目前必須使用以下兩種安全方式驗證：</a:t>
             </a:r>
           </a:p>
           <a:p>
             <a:pPr>
-              <a:spcAft>
-                <a:spcPts val="1000"/>
-              </a:spcAft>
-              <a:defRPr sz="2000">
-                <a:solidFill>
-                  <a:srgbClr val="FFFFFF"/>
-                </a:solidFill>
-                <a:latin typeface="Microsoft JhengHei"/>
-              </a:defRPr>
-            </a:pPr>
-            <a:r>
-              <a:t>**1. SSH 金鑰連線 (免密碼，最推薦)**</a:t>
+              <a:lnSpc>
+                <a:spcPct val="125000"/>
+              </a:lnSpc>
+              <a:spcAft>
+                <a:spcPts val="600"/>
+              </a:spcAft>
+              <a:defRPr>
+                <a:latin typeface="Microsoft JhengHei"/>
+              </a:defRPr>
+            </a:pPr>
+            <a:r>
+              <a:rPr sz="2000" b="1">
+                <a:solidFill>
+                  <a:srgbClr val="1F2328"/>
+                </a:solidFill>
+                <a:latin typeface="Microsoft JhengHei"/>
+              </a:rPr>
+              <a:t>1. SSH 金鑰連線 (免密碼，最推薦)</a:t>
             </a:r>
           </a:p>
           <a:p>
             <a:pPr lvl="1">
-              <a:spcAft>
-                <a:spcPts val="1000"/>
-              </a:spcAft>
-              <a:defRPr sz="1800">
-                <a:solidFill>
-                  <a:srgbClr val="FFFFFF"/>
-                </a:solidFill>
-                <a:latin typeface="Microsoft JhengHei"/>
-              </a:defRPr>
-            </a:pPr>
-            <a:r>
-              <a:t>在本地終端機執行 `ssh-keygen -t ed25519` 產生公私鑰對</a:t>
+              <a:lnSpc>
+                <a:spcPct val="125000"/>
+              </a:lnSpc>
+              <a:spcAft>
+                <a:spcPts val="600"/>
+              </a:spcAft>
+              <a:defRPr>
+                <a:latin typeface="Microsoft JhengHei"/>
+              </a:defRPr>
+            </a:pPr>
+            <a:r>
+              <a:rPr sz="1800">
+                <a:solidFill>
+                  <a:srgbClr val="1F2328"/>
+                </a:solidFill>
+                <a:latin typeface="Microsoft JhengHei"/>
+              </a:rPr>
+              <a:t>在本地終端機執行 </a:t>
+            </a:r>
+            <a:r>
+              <a:rPr sz="1800" b="1">
+                <a:solidFill>
+                  <a:srgbClr val="F05032"/>
+                </a:solidFill>
+                <a:latin typeface="Consolas"/>
+              </a:rPr>
+              <a:t>ssh-keygen -t ed25519</a:t>
+            </a:r>
+            <a:r>
+              <a:rPr sz="1800">
+                <a:solidFill>
+                  <a:srgbClr val="1F2328"/>
+                </a:solidFill>
+                <a:latin typeface="Microsoft JhengHei"/>
+              </a:rPr>
+              <a:t> 產生公私鑰對</a:t>
             </a:r>
           </a:p>
           <a:p>
             <a:pPr lvl="1">
-              <a:spcAft>
-                <a:spcPts val="1000"/>
-              </a:spcAft>
-              <a:defRPr sz="1800">
-                <a:solidFill>
-                  <a:srgbClr val="FFFFFF"/>
-                </a:solidFill>
-                <a:latin typeface="Microsoft JhengHei"/>
-              </a:defRPr>
-            </a:pPr>
-            <a:r>
-              <a:t>將公鑰 (`.pub` 檔內容) 貼到 GitHub Settings ➡ SSH Keys 中</a:t>
+              <a:lnSpc>
+                <a:spcPct val="125000"/>
+              </a:lnSpc>
+              <a:spcAft>
+                <a:spcPts val="600"/>
+              </a:spcAft>
+              <a:defRPr>
+                <a:latin typeface="Microsoft JhengHei"/>
+              </a:defRPr>
+            </a:pPr>
+            <a:r>
+              <a:rPr sz="1800">
+                <a:solidFill>
+                  <a:srgbClr val="1F2328"/>
+                </a:solidFill>
+                <a:latin typeface="Microsoft JhengHei"/>
+              </a:rPr>
+              <a:t>將公鑰 (</a:t>
+            </a:r>
+            <a:r>
+              <a:rPr sz="1800" b="1">
+                <a:solidFill>
+                  <a:srgbClr val="F05032"/>
+                </a:solidFill>
+                <a:latin typeface="Consolas"/>
+              </a:rPr>
+              <a:t>.pub</a:t>
+            </a:r>
+            <a:r>
+              <a:rPr sz="1800">
+                <a:solidFill>
+                  <a:srgbClr val="1F2328"/>
+                </a:solidFill>
+                <a:latin typeface="Microsoft JhengHei"/>
+              </a:rPr>
+              <a:t> 檔內容) 貼到 GitHub Settings ➡ SSH Keys 中</a:t>
             </a:r>
           </a:p>
           <a:p>
             <a:pPr lvl="1">
-              <a:spcAft>
-                <a:spcPts val="1000"/>
-              </a:spcAft>
-              <a:defRPr sz="1800">
-                <a:solidFill>
-                  <a:srgbClr val="FFFFFF"/>
-                </a:solidFill>
-                <a:latin typeface="Microsoft JhengHei"/>
-              </a:defRPr>
-            </a:pPr>
-            <a:r>
+              <a:lnSpc>
+                <a:spcPct val="125000"/>
+              </a:lnSpc>
+              <a:spcAft>
+                <a:spcPts val="600"/>
+              </a:spcAft>
+              <a:defRPr>
+                <a:latin typeface="Microsoft JhengHei"/>
+              </a:defRPr>
+            </a:pPr>
+            <a:r>
+              <a:rPr sz="1800">
+                <a:solidFill>
+                  <a:srgbClr val="1F2328"/>
+                </a:solidFill>
+                <a:latin typeface="Microsoft JhengHei"/>
+              </a:rPr>
               <a:t>驗證成功後，即可免輸入帳密進行推送與拉取</a:t>
             </a:r>
           </a:p>
           <a:p>
             <a:pPr>
-              <a:spcAft>
-                <a:spcPts val="1000"/>
-              </a:spcAft>
-              <a:defRPr sz="2000">
-                <a:solidFill>
-                  <a:srgbClr val="FFFFFF"/>
-                </a:solidFill>
-                <a:latin typeface="Microsoft JhengHei"/>
-              </a:defRPr>
-            </a:pPr>
-            <a:r>
-              <a:t>**2. Personal Access Token (PAT) 認證**</a:t>
+              <a:lnSpc>
+                <a:spcPct val="125000"/>
+              </a:lnSpc>
+              <a:spcAft>
+                <a:spcPts val="600"/>
+              </a:spcAft>
+              <a:defRPr>
+                <a:latin typeface="Microsoft JhengHei"/>
+              </a:defRPr>
+            </a:pPr>
+            <a:r>
+              <a:rPr sz="2000" b="1">
+                <a:solidFill>
+                  <a:srgbClr val="1F2328"/>
+                </a:solidFill>
+                <a:latin typeface="Microsoft JhengHei"/>
+              </a:rPr>
+              <a:t>2. Personal Access Token (PAT) 認證</a:t>
             </a:r>
           </a:p>
           <a:p>
             <a:pPr lvl="1">
-              <a:spcAft>
-                <a:spcPts val="1000"/>
-              </a:spcAft>
-              <a:defRPr sz="1800">
-                <a:solidFill>
-                  <a:srgbClr val="FFFFFF"/>
-                </a:solidFill>
-                <a:latin typeface="Microsoft JhengHei"/>
-              </a:defRPr>
-            </a:pPr>
-            <a:r>
+              <a:lnSpc>
+                <a:spcPct val="125000"/>
+              </a:lnSpc>
+              <a:spcAft>
+                <a:spcPts val="600"/>
+              </a:spcAft>
+              <a:defRPr>
+                <a:latin typeface="Microsoft JhengHei"/>
+              </a:defRPr>
+            </a:pPr>
+            <a:r>
+              <a:rPr sz="1800">
+                <a:solidFill>
+                  <a:srgbClr val="1F2328"/>
+                </a:solidFill>
+                <a:latin typeface="Microsoft JhengHei"/>
+              </a:rPr>
               <a:t>在 GitHub Developer Settings 產生一串 Token 代替密碼</a:t>
             </a:r>
           </a:p>
           <a:p>
             <a:pPr lvl="1">
-              <a:spcAft>
-                <a:spcPts val="1000"/>
-              </a:spcAft>
-              <a:defRPr sz="1800">
-                <a:solidFill>
-                  <a:srgbClr val="FFFFFF"/>
-                </a:solidFill>
-                <a:latin typeface="Microsoft JhengHei"/>
-              </a:defRPr>
-            </a:pPr>
-            <a:r>
+              <a:lnSpc>
+                <a:spcPct val="125000"/>
+              </a:lnSpc>
+              <a:spcAft>
+                <a:spcPts val="600"/>
+              </a:spcAft>
+              <a:defRPr>
+                <a:latin typeface="Microsoft JhengHei"/>
+              </a:defRPr>
+            </a:pPr>
+            <a:r>
+              <a:rPr sz="1800">
+                <a:solidFill>
+                  <a:srgbClr val="1F2328"/>
+                </a:solidFill>
+                <a:latin typeface="Microsoft JhengHei"/>
+              </a:rPr>
               <a:t>可設定存取權限範圍與到期日，安全性高</a:t>
             </a:r>
           </a:p>
@@ -6272,7 +8156,7 @@
     <p:bg>
       <p:bgPr>
         <a:solidFill>
-          <a:srgbClr val="0D1117"/>
+          <a:srgbClr val="F6F8FA"/>
         </a:solidFill>
         <a:effectLst/>
       </p:bgPr>
@@ -6286,14 +8170,59 @@
       <p:grpSpPr/>
       <p:sp>
         <p:nvSpPr>
-          <p:cNvPr id="2" name="TextBox 1"/>
+          <p:cNvPr id="2" name="Rectangle 1"/>
+          <p:cNvSpPr/>
+          <p:nvPr/>
+        </p:nvSpPr>
+        <p:spPr>
+          <a:xfrm>
+            <a:off x="731520" y="384048"/>
+            <a:ext cx="91440" cy="502920"/>
+          </a:xfrm>
+          <a:prstGeom prst="rect">
+            <a:avLst/>
+          </a:prstGeom>
+          <a:solidFill>
+            <a:srgbClr val="0366D6"/>
+          </a:solidFill>
+          <a:ln>
+            <a:solidFill>
+              <a:srgbClr val="0366D6"/>
+            </a:solidFill>
+          </a:ln>
+        </p:spPr>
+        <p:style>
+          <a:lnRef idx="1">
+            <a:schemeClr val="accent1"/>
+          </a:lnRef>
+          <a:fillRef idx="3">
+            <a:schemeClr val="accent1"/>
+          </a:fillRef>
+          <a:effectRef idx="2">
+            <a:schemeClr val="accent1"/>
+          </a:effectRef>
+          <a:fontRef idx="minor">
+            <a:schemeClr val="lt1"/>
+          </a:fontRef>
+        </p:style>
+        <p:txBody>
+          <a:bodyPr rtlCol="0" anchor="ctr"/>
+          <a:lstStyle/>
+          <a:p>
+            <a:pPr algn="ctr"/>
+          </a:p>
+        </p:txBody>
+      </p:sp>
+      <p:sp>
+        <p:nvSpPr>
+          <p:cNvPr id="3" name="TextBox 2"/>
           <p:cNvSpPr txBox="1"/>
           <p:nvPr/>
         </p:nvSpPr>
         <p:spPr>
           <a:xfrm>
-            <a:off x="731520" y="365760"/>
-            <a:ext cx="10725912" cy="731520"/>
+            <a:off x="960120" y="320040"/>
+            <a:ext cx="10497312" cy="731520"/>
           </a:xfrm>
           <a:prstGeom prst="rect">
             <a:avLst/>
@@ -6309,7 +8238,7 @@
             <a:pPr>
               <a:defRPr sz="3600" b="1">
                 <a:solidFill>
-                  <a:srgbClr val="58A6FF"/>
+                  <a:srgbClr val="0366D6"/>
                 </a:solidFill>
                 <a:latin typeface="Microsoft JhengHei"/>
               </a:defRPr>
@@ -6322,7 +8251,7 @@
       </p:sp>
       <p:sp>
         <p:nvSpPr>
-          <p:cNvPr id="3" name="Rectangle 2"/>
+          <p:cNvPr id="4" name="Rectangle 3"/>
           <p:cNvSpPr/>
           <p:nvPr/>
         </p:nvSpPr>
@@ -6335,10 +8264,12 @@
             <a:avLst/>
           </a:prstGeom>
           <a:solidFill>
-            <a:srgbClr val="161B22"/>
+            <a:srgbClr val="FFFFFF"/>
           </a:solidFill>
-          <a:ln>
-            <a:noFill/>
+          <a:ln w="19050">
+            <a:solidFill>
+              <a:srgbClr val="DADEE5"/>
+            </a:solidFill>
           </a:ln>
         </p:spPr>
         <p:style>
@@ -6365,7 +8296,7 @@
       </p:sp>
       <p:sp>
         <p:nvSpPr>
-          <p:cNvPr id="4" name="TextBox 3"/>
+          <p:cNvPr id="5" name="TextBox 4"/>
           <p:cNvSpPr txBox="1"/>
           <p:nvPr/>
         </p:nvSpPr>
@@ -6380,119 +8311,188 @@
           <a:noFill/>
         </p:spPr>
         <p:txBody>
-          <a:bodyPr wrap="square" lIns="0" tIns="0" rIns="0" bIns="0">
+          <a:bodyPr wrap="square" lIns="228600" rIns="228600" tIns="228600" bIns="228600">
             <a:spAutoFit/>
           </a:bodyPr>
           <a:lstStyle/>
           <a:p>
             <a:pPr>
-              <a:spcAft>
-                <a:spcPts val="1000"/>
-              </a:spcAft>
-              <a:defRPr sz="2000">
-                <a:solidFill>
-                  <a:srgbClr val="FFFFFF"/>
-                </a:solidFill>
-                <a:latin typeface="Microsoft JhengHei"/>
-              </a:defRPr>
-            </a:pPr>
-            <a:r>
-              <a:t>**Pull Request (PR)** 是 GitHub 團隊協作的最核心功能：</a:t>
+              <a:lnSpc>
+                <a:spcPct val="125000"/>
+              </a:lnSpc>
+              <a:spcAft>
+                <a:spcPts val="600"/>
+              </a:spcAft>
+              <a:defRPr>
+                <a:latin typeface="Microsoft JhengHei"/>
+              </a:defRPr>
+            </a:pPr>
+            <a:r>
+              <a:rPr sz="2000" b="1">
+                <a:solidFill>
+                  <a:srgbClr val="1F2328"/>
+                </a:solidFill>
+                <a:latin typeface="Microsoft JhengHei"/>
+              </a:rPr>
+              <a:t>Pull Request (PR)</a:t>
+            </a:r>
+            <a:r>
+              <a:rPr sz="2000">
+                <a:solidFill>
+                  <a:srgbClr val="1F2328"/>
+                </a:solidFill>
+                <a:latin typeface="Microsoft JhengHei"/>
+              </a:rPr>
+              <a:t> 是 GitHub 團隊協作的最核心功能：</a:t>
             </a:r>
           </a:p>
           <a:p>
             <a:pPr lvl="1">
-              <a:spcAft>
-                <a:spcPts val="1000"/>
-              </a:spcAft>
-              <a:defRPr sz="1800">
-                <a:solidFill>
-                  <a:srgbClr val="FFFFFF"/>
-                </a:solidFill>
-                <a:latin typeface="Microsoft JhengHei"/>
-              </a:defRPr>
-            </a:pPr>
-            <a:r>
+              <a:lnSpc>
+                <a:spcPct val="125000"/>
+              </a:lnSpc>
+              <a:spcAft>
+                <a:spcPts val="600"/>
+              </a:spcAft>
+              <a:defRPr>
+                <a:latin typeface="Microsoft JhengHei"/>
+              </a:defRPr>
+            </a:pPr>
+            <a:r>
+              <a:rPr sz="1800">
+                <a:solidFill>
+                  <a:srgbClr val="1F2328"/>
+                </a:solidFill>
+                <a:latin typeface="Microsoft JhengHei"/>
+              </a:rPr>
               <a:t>當你修改完程式碼並 push 自己的分支後，在 GitHub 網頁發起 PR</a:t>
             </a:r>
           </a:p>
           <a:p>
             <a:pPr lvl="1">
-              <a:spcAft>
-                <a:spcPts val="1000"/>
-              </a:spcAft>
-              <a:defRPr sz="1800">
-                <a:solidFill>
-                  <a:srgbClr val="FFFFFF"/>
-                </a:solidFill>
-                <a:latin typeface="Microsoft JhengHei"/>
-              </a:defRPr>
-            </a:pPr>
-            <a:r>
+              <a:lnSpc>
+                <a:spcPct val="125000"/>
+              </a:lnSpc>
+              <a:spcAft>
+                <a:spcPts val="600"/>
+              </a:spcAft>
+              <a:defRPr>
+                <a:latin typeface="Microsoft JhengHei"/>
+              </a:defRPr>
+            </a:pPr>
+            <a:r>
+              <a:rPr sz="1800">
+                <a:solidFill>
+                  <a:srgbClr val="1F2328"/>
+                </a:solidFill>
+                <a:latin typeface="Microsoft JhengHei"/>
+              </a:rPr>
               <a:t>PR 是一個「請求合併通知」，向團隊展示修改的檔案 diff 差異</a:t>
             </a:r>
           </a:p>
           <a:p>
             <a:pPr>
-              <a:spcAft>
-                <a:spcPts val="1000"/>
-              </a:spcAft>
-              <a:defRPr sz="2000">
-                <a:solidFill>
-                  <a:srgbClr val="FFFFFF"/>
-                </a:solidFill>
-                <a:latin typeface="Microsoft JhengHei"/>
-              </a:defRPr>
-            </a:pPr>
-            <a:r>
-              <a:t>**Code Review (程式碼審查)**：</a:t>
+              <a:lnSpc>
+                <a:spcPct val="125000"/>
+              </a:lnSpc>
+              <a:spcAft>
+                <a:spcPts val="600"/>
+              </a:spcAft>
+              <a:defRPr>
+                <a:latin typeface="Microsoft JhengHei"/>
+              </a:defRPr>
+            </a:pPr>
+            <a:r>
+              <a:rPr sz="2000" b="1">
+                <a:solidFill>
+                  <a:srgbClr val="1F2328"/>
+                </a:solidFill>
+                <a:latin typeface="Microsoft JhengHei"/>
+              </a:rPr>
+              <a:t>Code Review (程式碼審查)</a:t>
+            </a:r>
+            <a:r>
+              <a:rPr sz="2000">
+                <a:solidFill>
+                  <a:srgbClr val="1F2328"/>
+                </a:solidFill>
+                <a:latin typeface="Microsoft JhengHei"/>
+              </a:rPr>
+              <a:t>：</a:t>
             </a:r>
           </a:p>
           <a:p>
             <a:pPr lvl="1">
-              <a:spcAft>
-                <a:spcPts val="1000"/>
-              </a:spcAft>
-              <a:defRPr sz="1800">
-                <a:solidFill>
-                  <a:srgbClr val="FFFFFF"/>
-                </a:solidFill>
-                <a:latin typeface="Microsoft JhengHei"/>
-              </a:defRPr>
-            </a:pPr>
-            <a:r>
+              <a:lnSpc>
+                <a:spcPct val="125000"/>
+              </a:lnSpc>
+              <a:spcAft>
+                <a:spcPts val="600"/>
+              </a:spcAft>
+              <a:defRPr>
+                <a:latin typeface="Microsoft JhengHei"/>
+              </a:defRPr>
+            </a:pPr>
+            <a:r>
+              <a:rPr sz="1800">
+                <a:solidFill>
+                  <a:srgbClr val="1F2328"/>
+                </a:solidFill>
+                <a:latin typeface="Microsoft JhengHei"/>
+              </a:rPr>
               <a:t>團隊成員會在 PR 頁面逐行檢視代碼，並在行內留言討論與建議</a:t>
             </a:r>
           </a:p>
           <a:p>
             <a:pPr lvl="1">
-              <a:spcAft>
-                <a:spcPts val="1000"/>
-              </a:spcAft>
-              <a:defRPr sz="1800">
-                <a:solidFill>
-                  <a:srgbClr val="FFFFFF"/>
-                </a:solidFill>
-                <a:latin typeface="Microsoft JhengHei"/>
-              </a:defRPr>
-            </a:pPr>
-            <a:r>
-              <a:t>審查通過後，管理員點擊 Merge，將分支合併回主線 `main`</a:t>
+              <a:lnSpc>
+                <a:spcPct val="125000"/>
+              </a:lnSpc>
+              <a:spcAft>
+                <a:spcPts val="600"/>
+              </a:spcAft>
+              <a:defRPr>
+                <a:latin typeface="Microsoft JhengHei"/>
+              </a:defRPr>
+            </a:pPr>
+            <a:r>
+              <a:rPr sz="1800">
+                <a:solidFill>
+                  <a:srgbClr val="1F2328"/>
+                </a:solidFill>
+                <a:latin typeface="Microsoft JhengHei"/>
+              </a:rPr>
+              <a:t>審查通過後，管理員點擊 Merge，將分支合併回主線 </a:t>
+            </a:r>
+            <a:r>
+              <a:rPr sz="1800" b="1">
+                <a:solidFill>
+                  <a:srgbClr val="F05032"/>
+                </a:solidFill>
+                <a:latin typeface="Consolas"/>
+              </a:rPr>
+              <a:t>main</a:t>
             </a:r>
           </a:p>
           <a:p>
             <a:pPr lvl="1">
-              <a:spcAft>
-                <a:spcPts val="1000"/>
-              </a:spcAft>
-              <a:defRPr sz="1800">
-                <a:solidFill>
-                  <a:srgbClr val="FFFFFF"/>
-                </a:solidFill>
-                <a:latin typeface="Microsoft JhengHei"/>
-              </a:defRPr>
-            </a:pPr>
-            <a:r>
+              <a:lnSpc>
+                <a:spcPct val="125000"/>
+              </a:lnSpc>
+              <a:spcAft>
+                <a:spcPts val="600"/>
+              </a:spcAft>
+              <a:defRPr>
+                <a:latin typeface="Microsoft JhengHei"/>
+              </a:defRPr>
+            </a:pPr>
+            <a:r>
+              <a:rPr sz="1800">
+                <a:solidFill>
+                  <a:srgbClr val="1F2328"/>
+                </a:solidFill>
+                <a:latin typeface="Microsoft JhengHei"/>
+              </a:rPr>
               <a:t>這是確保程式碼品質與團隊知識分享的最有效流程</a:t>
             </a:r>
           </a:p>
@@ -6512,7 +8512,7 @@
     <p:bg>
       <p:bgPr>
         <a:solidFill>
-          <a:srgbClr val="0D1117"/>
+          <a:srgbClr val="F6F8FA"/>
         </a:solidFill>
         <a:effectLst/>
       </p:bgPr>
@@ -6526,14 +8526,59 @@
       <p:grpSpPr/>
       <p:sp>
         <p:nvSpPr>
-          <p:cNvPr id="2" name="TextBox 1"/>
+          <p:cNvPr id="2" name="Rectangle 1"/>
+          <p:cNvSpPr/>
+          <p:nvPr/>
+        </p:nvSpPr>
+        <p:spPr>
+          <a:xfrm>
+            <a:off x="731520" y="384048"/>
+            <a:ext cx="91440" cy="502920"/>
+          </a:xfrm>
+          <a:prstGeom prst="rect">
+            <a:avLst/>
+          </a:prstGeom>
+          <a:solidFill>
+            <a:srgbClr val="0366D6"/>
+          </a:solidFill>
+          <a:ln>
+            <a:solidFill>
+              <a:srgbClr val="0366D6"/>
+            </a:solidFill>
+          </a:ln>
+        </p:spPr>
+        <p:style>
+          <a:lnRef idx="1">
+            <a:schemeClr val="accent1"/>
+          </a:lnRef>
+          <a:fillRef idx="3">
+            <a:schemeClr val="accent1"/>
+          </a:fillRef>
+          <a:effectRef idx="2">
+            <a:schemeClr val="accent1"/>
+          </a:effectRef>
+          <a:fontRef idx="minor">
+            <a:schemeClr val="lt1"/>
+          </a:fontRef>
+        </p:style>
+        <p:txBody>
+          <a:bodyPr rtlCol="0" anchor="ctr"/>
+          <a:lstStyle/>
+          <a:p>
+            <a:pPr algn="ctr"/>
+          </a:p>
+        </p:txBody>
+      </p:sp>
+      <p:sp>
+        <p:nvSpPr>
+          <p:cNvPr id="3" name="TextBox 2"/>
           <p:cNvSpPr txBox="1"/>
           <p:nvPr/>
         </p:nvSpPr>
         <p:spPr>
           <a:xfrm>
-            <a:off x="731520" y="365760"/>
-            <a:ext cx="10725912" cy="731520"/>
+            <a:off x="960120" y="320040"/>
+            <a:ext cx="10497312" cy="731520"/>
           </a:xfrm>
           <a:prstGeom prst="rect">
             <a:avLst/>
@@ -6549,7 +8594,7 @@
             <a:pPr>
               <a:defRPr sz="3600" b="1">
                 <a:solidFill>
-                  <a:srgbClr val="58A6FF"/>
+                  <a:srgbClr val="0366D6"/>
                 </a:solidFill>
                 <a:latin typeface="Microsoft JhengHei"/>
               </a:defRPr>
@@ -6562,7 +8607,7 @@
       </p:sp>
       <p:sp>
         <p:nvSpPr>
-          <p:cNvPr id="3" name="Rectangle 2"/>
+          <p:cNvPr id="4" name="Rectangle 3"/>
           <p:cNvSpPr/>
           <p:nvPr/>
         </p:nvSpPr>
@@ -6575,10 +8620,12 @@
             <a:avLst/>
           </a:prstGeom>
           <a:solidFill>
-            <a:srgbClr val="161B22"/>
+            <a:srgbClr val="FFFFFF"/>
           </a:solidFill>
-          <a:ln>
-            <a:noFill/>
+          <a:ln w="19050">
+            <a:solidFill>
+              <a:srgbClr val="DADEE5"/>
+            </a:solidFill>
           </a:ln>
         </p:spPr>
         <p:style>
@@ -6605,7 +8652,7 @@
       </p:sp>
       <p:sp>
         <p:nvSpPr>
-          <p:cNvPr id="4" name="TextBox 3"/>
+          <p:cNvPr id="5" name="TextBox 4"/>
           <p:cNvSpPr txBox="1"/>
           <p:nvPr/>
         </p:nvSpPr>
@@ -6620,88 +8667,190 @@
           <a:noFill/>
         </p:spPr>
         <p:txBody>
-          <a:bodyPr wrap="square" lIns="0" tIns="0" rIns="0" bIns="0">
+          <a:bodyPr wrap="square" lIns="228600" rIns="228600" tIns="228600" bIns="228600">
             <a:spAutoFit/>
           </a:bodyPr>
           <a:lstStyle/>
           <a:p>
             <a:pPr>
-              <a:spcAft>
-                <a:spcPts val="1000"/>
-              </a:spcAft>
-              <a:defRPr sz="2000">
-                <a:solidFill>
-                  <a:srgbClr val="FFFFFF"/>
-                </a:solidFill>
-                <a:latin typeface="Microsoft JhengHei"/>
-              </a:defRPr>
-            </a:pPr>
-            <a:r>
-              <a:t>參與開源專案或沒有寫入權限的 Repository 時，使用 **Fork** 流程：</a:t>
+              <a:lnSpc>
+                <a:spcPct val="125000"/>
+              </a:lnSpc>
+              <a:spcAft>
+                <a:spcPts val="600"/>
+              </a:spcAft>
+              <a:defRPr>
+                <a:latin typeface="Microsoft JhengHei"/>
+              </a:defRPr>
+            </a:pPr>
+            <a:r>
+              <a:rPr sz="2000">
+                <a:solidFill>
+                  <a:srgbClr val="1F2328"/>
+                </a:solidFill>
+                <a:latin typeface="Microsoft JhengHei"/>
+              </a:rPr>
+              <a:t>參與開源專案或沒有寫入權限的 Repository 時，使用 </a:t>
+            </a:r>
+            <a:r>
+              <a:rPr sz="2000" b="1">
+                <a:solidFill>
+                  <a:srgbClr val="1F2328"/>
+                </a:solidFill>
+                <a:latin typeface="Microsoft JhengHei"/>
+              </a:rPr>
+              <a:t>Fork</a:t>
+            </a:r>
+            <a:r>
+              <a:rPr sz="2000">
+                <a:solidFill>
+                  <a:srgbClr val="1F2328"/>
+                </a:solidFill>
+                <a:latin typeface="Microsoft JhengHei"/>
+              </a:rPr>
+              <a:t> 流程：</a:t>
             </a:r>
           </a:p>
           <a:p>
             <a:pPr lvl="1">
-              <a:spcAft>
-                <a:spcPts val="1000"/>
-              </a:spcAft>
-              <a:defRPr sz="1800">
-                <a:solidFill>
-                  <a:srgbClr val="FFFFFF"/>
-                </a:solidFill>
-                <a:latin typeface="Microsoft JhengHei"/>
-              </a:defRPr>
-            </a:pPr>
-            <a:r>
-              <a:t>**Fork**：將別人的 Repository 複製一份到你個人的 GitHub 帳號下</a:t>
+              <a:lnSpc>
+                <a:spcPct val="125000"/>
+              </a:lnSpc>
+              <a:spcAft>
+                <a:spcPts val="600"/>
+              </a:spcAft>
+              <a:defRPr>
+                <a:latin typeface="Microsoft JhengHei"/>
+              </a:defRPr>
+            </a:pPr>
+            <a:r>
+              <a:rPr sz="1800" b="1">
+                <a:solidFill>
+                  <a:srgbClr val="1F2328"/>
+                </a:solidFill>
+                <a:latin typeface="Microsoft JhengHei"/>
+              </a:rPr>
+              <a:t>Fork</a:t>
+            </a:r>
+            <a:r>
+              <a:rPr sz="1800">
+                <a:solidFill>
+                  <a:srgbClr val="1F2328"/>
+                </a:solidFill>
+                <a:latin typeface="Microsoft JhengHei"/>
+              </a:rPr>
+              <a:t>：將別人的 Repository 複製一份到你個人的 GitHub 帳號下</a:t>
             </a:r>
           </a:p>
           <a:p>
             <a:pPr lvl="1">
-              <a:spcAft>
-                <a:spcPts val="1000"/>
-              </a:spcAft>
-              <a:defRPr sz="1800">
-                <a:solidFill>
-                  <a:srgbClr val="FFFFFF"/>
-                </a:solidFill>
-                <a:latin typeface="Microsoft JhengHei"/>
-              </a:defRPr>
-            </a:pPr>
-            <a:r>
-              <a:t>**Clone &amp; 修改**：將你個人的 Fork 複製到本地電腦修改並 commit</a:t>
+              <a:lnSpc>
+                <a:spcPct val="125000"/>
+              </a:lnSpc>
+              <a:spcAft>
+                <a:spcPts val="600"/>
+              </a:spcAft>
+              <a:defRPr>
+                <a:latin typeface="Microsoft JhengHei"/>
+              </a:defRPr>
+            </a:pPr>
+            <a:r>
+              <a:rPr sz="1800" b="1">
+                <a:solidFill>
+                  <a:srgbClr val="1F2328"/>
+                </a:solidFill>
+                <a:latin typeface="Microsoft JhengHei"/>
+              </a:rPr>
+              <a:t>Clone &amp; 修改</a:t>
+            </a:r>
+            <a:r>
+              <a:rPr sz="1800">
+                <a:solidFill>
+                  <a:srgbClr val="1F2328"/>
+                </a:solidFill>
+                <a:latin typeface="Microsoft JhengHei"/>
+              </a:rPr>
+              <a:t>：將你個人的 Fork 複製到本地電腦修改並 commit</a:t>
             </a:r>
           </a:p>
           <a:p>
             <a:pPr lvl="1">
-              <a:spcAft>
-                <a:spcPts val="1000"/>
-              </a:spcAft>
-              <a:defRPr sz="1800">
-                <a:solidFill>
-                  <a:srgbClr val="FFFFFF"/>
-                </a:solidFill>
-                <a:latin typeface="Microsoft JhengHei"/>
-              </a:defRPr>
-            </a:pPr>
-            <a:r>
-              <a:t>**Sync Fork**：定期將原始作者的更新同步回你的 Fork（使用 `git remote add upstream &lt;原網址&gt;`）</a:t>
+              <a:lnSpc>
+                <a:spcPct val="125000"/>
+              </a:lnSpc>
+              <a:spcAft>
+                <a:spcPts val="600"/>
+              </a:spcAft>
+              <a:defRPr>
+                <a:latin typeface="Microsoft JhengHei"/>
+              </a:defRPr>
+            </a:pPr>
+            <a:r>
+              <a:rPr sz="1800" b="1">
+                <a:solidFill>
+                  <a:srgbClr val="1F2328"/>
+                </a:solidFill>
+                <a:latin typeface="Microsoft JhengHei"/>
+              </a:rPr>
+              <a:t>Sync Fork</a:t>
+            </a:r>
+            <a:r>
+              <a:rPr sz="1800">
+                <a:solidFill>
+                  <a:srgbClr val="1F2328"/>
+                </a:solidFill>
+                <a:latin typeface="Microsoft JhengHei"/>
+              </a:rPr>
+              <a:t>：定期將原始作者的更新同步回你的 Fork（使用 </a:t>
+            </a:r>
+            <a:r>
+              <a:rPr sz="1800" b="1">
+                <a:solidFill>
+                  <a:srgbClr val="F05032"/>
+                </a:solidFill>
+                <a:latin typeface="Consolas"/>
+              </a:rPr>
+              <a:t>git remote add upstream &lt;原網址&gt;</a:t>
+            </a:r>
+            <a:r>
+              <a:rPr sz="1800">
+                <a:solidFill>
+                  <a:srgbClr val="1F2328"/>
+                </a:solidFill>
+                <a:latin typeface="Microsoft JhengHei"/>
+              </a:rPr>
+              <a:t>）</a:t>
             </a:r>
           </a:p>
           <a:p>
             <a:pPr lvl="1">
-              <a:spcAft>
-                <a:spcPts val="1000"/>
-              </a:spcAft>
-              <a:defRPr sz="1800">
-                <a:solidFill>
-                  <a:srgbClr val="FFFFFF"/>
-                </a:solidFill>
-                <a:latin typeface="Microsoft JhengHei"/>
-              </a:defRPr>
-            </a:pPr>
-            <a:r>
-              <a:t>**發送 PR**：修改完成後，發起 Pull Request 回原始專案，請求對方合併你的修改。這就是貢獻開源代碼的標準做法！</a:t>
+              <a:lnSpc>
+                <a:spcPct val="125000"/>
+              </a:lnSpc>
+              <a:spcAft>
+                <a:spcPts val="600"/>
+              </a:spcAft>
+              <a:defRPr>
+                <a:latin typeface="Microsoft JhengHei"/>
+              </a:defRPr>
+            </a:pPr>
+            <a:r>
+              <a:rPr sz="1800" b="1">
+                <a:solidFill>
+                  <a:srgbClr val="1F2328"/>
+                </a:solidFill>
+                <a:latin typeface="Microsoft JhengHei"/>
+              </a:rPr>
+              <a:t>發送 PR</a:t>
+            </a:r>
+            <a:r>
+              <a:rPr sz="1800">
+                <a:solidFill>
+                  <a:srgbClr val="1F2328"/>
+                </a:solidFill>
+                <a:latin typeface="Microsoft JhengHei"/>
+              </a:rPr>
+              <a:t>：修改完成後，發起 Pull Request 回原始專案，請求對方合併你的修改。這就是貢獻開源代碼的標準做法！</a:t>
             </a:r>
           </a:p>
         </p:txBody>
@@ -6720,7 +8869,7 @@
     <p:bg>
       <p:bgPr>
         <a:solidFill>
-          <a:srgbClr val="0D1117"/>
+          <a:srgbClr val="F6F8FA"/>
         </a:solidFill>
         <a:effectLst/>
       </p:bgPr>
@@ -6734,14 +8883,59 @@
       <p:grpSpPr/>
       <p:sp>
         <p:nvSpPr>
-          <p:cNvPr id="2" name="TextBox 1"/>
+          <p:cNvPr id="2" name="Rectangle 1"/>
+          <p:cNvSpPr/>
+          <p:nvPr/>
+        </p:nvSpPr>
+        <p:spPr>
+          <a:xfrm>
+            <a:off x="731520" y="384048"/>
+            <a:ext cx="91440" cy="502920"/>
+          </a:xfrm>
+          <a:prstGeom prst="rect">
+            <a:avLst/>
+          </a:prstGeom>
+          <a:solidFill>
+            <a:srgbClr val="0366D6"/>
+          </a:solidFill>
+          <a:ln>
+            <a:solidFill>
+              <a:srgbClr val="0366D6"/>
+            </a:solidFill>
+          </a:ln>
+        </p:spPr>
+        <p:style>
+          <a:lnRef idx="1">
+            <a:schemeClr val="accent1"/>
+          </a:lnRef>
+          <a:fillRef idx="3">
+            <a:schemeClr val="accent1"/>
+          </a:fillRef>
+          <a:effectRef idx="2">
+            <a:schemeClr val="accent1"/>
+          </a:effectRef>
+          <a:fontRef idx="minor">
+            <a:schemeClr val="lt1"/>
+          </a:fontRef>
+        </p:style>
+        <p:txBody>
+          <a:bodyPr rtlCol="0" anchor="ctr"/>
+          <a:lstStyle/>
+          <a:p>
+            <a:pPr algn="ctr"/>
+          </a:p>
+        </p:txBody>
+      </p:sp>
+      <p:sp>
+        <p:nvSpPr>
+          <p:cNvPr id="3" name="TextBox 2"/>
           <p:cNvSpPr txBox="1"/>
           <p:nvPr/>
         </p:nvSpPr>
         <p:spPr>
           <a:xfrm>
-            <a:off x="731520" y="365760"/>
-            <a:ext cx="10725912" cy="731520"/>
+            <a:off x="960120" y="320040"/>
+            <a:ext cx="10497312" cy="731520"/>
           </a:xfrm>
           <a:prstGeom prst="rect">
             <a:avLst/>
@@ -6757,7 +8951,7 @@
             <a:pPr>
               <a:defRPr sz="3600" b="1">
                 <a:solidFill>
-                  <a:srgbClr val="58A6FF"/>
+                  <a:srgbClr val="0366D6"/>
                 </a:solidFill>
                 <a:latin typeface="Microsoft JhengHei"/>
               </a:defRPr>
@@ -6770,7 +8964,7 @@
       </p:sp>
       <p:sp>
         <p:nvSpPr>
-          <p:cNvPr id="3" name="Rectangle 2"/>
+          <p:cNvPr id="4" name="Rectangle 3"/>
           <p:cNvSpPr/>
           <p:nvPr/>
         </p:nvSpPr>
@@ -6783,10 +8977,12 @@
             <a:avLst/>
           </a:prstGeom>
           <a:solidFill>
-            <a:srgbClr val="161B22"/>
+            <a:srgbClr val="FFFFFF"/>
           </a:solidFill>
-          <a:ln>
-            <a:noFill/>
+          <a:ln w="19050">
+            <a:solidFill>
+              <a:srgbClr val="DADEE5"/>
+            </a:solidFill>
           </a:ln>
         </p:spPr>
         <p:style>
@@ -6813,7 +9009,7 @@
       </p:sp>
       <p:sp>
         <p:nvSpPr>
-          <p:cNvPr id="4" name="TextBox 3"/>
+          <p:cNvPr id="5" name="TextBox 4"/>
           <p:cNvSpPr txBox="1"/>
           <p:nvPr/>
         </p:nvSpPr>
@@ -6828,72 +9024,123 @@
           <a:noFill/>
         </p:spPr>
         <p:txBody>
-          <a:bodyPr wrap="square" lIns="0" tIns="0" rIns="0" bIns="0">
+          <a:bodyPr wrap="square" lIns="228600" rIns="228600" tIns="228600" bIns="228600">
             <a:spAutoFit/>
           </a:bodyPr>
           <a:lstStyle/>
           <a:p>
             <a:pPr>
-              <a:spcAft>
-                <a:spcPts val="1000"/>
-              </a:spcAft>
-              <a:defRPr sz="2000">
-                <a:solidFill>
-                  <a:srgbClr val="FFFFFF"/>
-                </a:solidFill>
-                <a:latin typeface="Microsoft JhengHei"/>
-              </a:defRPr>
-            </a:pPr>
-            <a:r>
+              <a:lnSpc>
+                <a:spcPct val="125000"/>
+              </a:lnSpc>
+              <a:spcAft>
+                <a:spcPts val="600"/>
+              </a:spcAft>
+              <a:defRPr>
+                <a:latin typeface="Microsoft JhengHei"/>
+              </a:defRPr>
+            </a:pPr>
+            <a:r>
+              <a:rPr sz="2000">
+                <a:solidFill>
+                  <a:srgbClr val="1F2328"/>
+                </a:solidFill>
+                <a:latin typeface="Microsoft JhengHei"/>
+              </a:rPr>
               <a:t>GitHub 提供了一整套開發者生態工具：</a:t>
             </a:r>
           </a:p>
           <a:p>
             <a:pPr lvl="1">
-              <a:spcAft>
-                <a:spcPts val="1000"/>
-              </a:spcAft>
-              <a:defRPr sz="1800">
-                <a:solidFill>
-                  <a:srgbClr val="FFFFFF"/>
-                </a:solidFill>
-                <a:latin typeface="Microsoft JhengHei"/>
-              </a:defRPr>
-            </a:pPr>
-            <a:r>
-              <a:t>**GitHub Pages**：完全免費！直接將你儲存庫中的靜態 HTML/CSS/JS 網站部署上線 (如個人履歷、作品集)</a:t>
+              <a:lnSpc>
+                <a:spcPct val="125000"/>
+              </a:lnSpc>
+              <a:spcAft>
+                <a:spcPts val="600"/>
+              </a:spcAft>
+              <a:defRPr>
+                <a:latin typeface="Microsoft JhengHei"/>
+              </a:defRPr>
+            </a:pPr>
+            <a:r>
+              <a:rPr sz="1800" b="1">
+                <a:solidFill>
+                  <a:srgbClr val="1F2328"/>
+                </a:solidFill>
+                <a:latin typeface="Microsoft JhengHei"/>
+              </a:rPr>
+              <a:t>GitHub Pages</a:t>
+            </a:r>
+            <a:r>
+              <a:rPr sz="1800">
+                <a:solidFill>
+                  <a:srgbClr val="1F2328"/>
+                </a:solidFill>
+                <a:latin typeface="Microsoft JhengHei"/>
+              </a:rPr>
+              <a:t>：完全免費！直接將你儲存庫中的靜態 HTML/CSS/JS 網站部署上線 (如個人履歷、作品集)</a:t>
             </a:r>
           </a:p>
           <a:p>
             <a:pPr lvl="1">
-              <a:spcAft>
-                <a:spcPts val="1000"/>
-              </a:spcAft>
-              <a:defRPr sz="1800">
-                <a:solidFill>
-                  <a:srgbClr val="FFFFFF"/>
-                </a:solidFill>
-                <a:latin typeface="Microsoft JhengHei"/>
-              </a:defRPr>
-            </a:pPr>
-            <a:r>
-              <a:t>**GitHub Actions (CI/CD)**：自動化工作流，在每次 push 時自動執行測試、編譯，或將網站自動部署</a:t>
+              <a:lnSpc>
+                <a:spcPct val="125000"/>
+              </a:lnSpc>
+              <a:spcAft>
+                <a:spcPts val="600"/>
+              </a:spcAft>
+              <a:defRPr>
+                <a:latin typeface="Microsoft JhengHei"/>
+              </a:defRPr>
+            </a:pPr>
+            <a:r>
+              <a:rPr sz="1800" b="1">
+                <a:solidFill>
+                  <a:srgbClr val="1F2328"/>
+                </a:solidFill>
+                <a:latin typeface="Microsoft JhengHei"/>
+              </a:rPr>
+              <a:t>GitHub Actions (CI/CD)</a:t>
+            </a:r>
+            <a:r>
+              <a:rPr sz="1800">
+                <a:solidFill>
+                  <a:srgbClr val="1F2328"/>
+                </a:solidFill>
+                <a:latin typeface="Microsoft JhengHei"/>
+              </a:rPr>
+              <a:t>：自動化工作流，在每次 push 時自動執行測試、編譯，或將網站自動部署</a:t>
             </a:r>
           </a:p>
           <a:p>
             <a:pPr lvl="1">
-              <a:spcAft>
-                <a:spcPts val="1000"/>
-              </a:spcAft>
-              <a:defRPr sz="1800">
-                <a:solidFill>
-                  <a:srgbClr val="FFFFFF"/>
-                </a:solidFill>
-                <a:latin typeface="Microsoft JhengHei"/>
-              </a:defRPr>
-            </a:pPr>
-            <a:r>
-              <a:t>**GitHub Codespaces**：在雲端運行的 VS Code 開發虛擬機，就算沒有帶電腦，用 iPad 開瀏覽器也能寫程式</a:t>
+              <a:lnSpc>
+                <a:spcPct val="125000"/>
+              </a:lnSpc>
+              <a:spcAft>
+                <a:spcPts val="600"/>
+              </a:spcAft>
+              <a:defRPr>
+                <a:latin typeface="Microsoft JhengHei"/>
+              </a:defRPr>
+            </a:pPr>
+            <a:r>
+              <a:rPr sz="1800" b="1">
+                <a:solidFill>
+                  <a:srgbClr val="1F2328"/>
+                </a:solidFill>
+                <a:latin typeface="Microsoft JhengHei"/>
+              </a:rPr>
+              <a:t>GitHub Codespaces</a:t>
+            </a:r>
+            <a:r>
+              <a:rPr sz="1800">
+                <a:solidFill>
+                  <a:srgbClr val="1F2328"/>
+                </a:solidFill>
+                <a:latin typeface="Microsoft JhengHei"/>
+              </a:rPr>
+              <a:t>：在雲端運行的 VS Code 開發虛擬機，就算沒有帶電腦，用 iPad 開瀏覽器也能寫程式</a:t>
             </a:r>
           </a:p>
         </p:txBody>
@@ -6912,7 +9159,7 @@
     <p:bg>
       <p:bgPr>
         <a:solidFill>
-          <a:srgbClr val="0D1117"/>
+          <a:srgbClr val="F6F8FA"/>
         </a:solidFill>
         <a:effectLst/>
       </p:bgPr>
@@ -6926,14 +9173,59 @@
       <p:grpSpPr/>
       <p:sp>
         <p:nvSpPr>
-          <p:cNvPr id="2" name="TextBox 1"/>
+          <p:cNvPr id="2" name="Rectangle 1"/>
+          <p:cNvSpPr/>
+          <p:nvPr/>
+        </p:nvSpPr>
+        <p:spPr>
+          <a:xfrm>
+            <a:off x="731520" y="384048"/>
+            <a:ext cx="91440" cy="502920"/>
+          </a:xfrm>
+          <a:prstGeom prst="rect">
+            <a:avLst/>
+          </a:prstGeom>
+          <a:solidFill>
+            <a:srgbClr val="0366D6"/>
+          </a:solidFill>
+          <a:ln>
+            <a:solidFill>
+              <a:srgbClr val="0366D6"/>
+            </a:solidFill>
+          </a:ln>
+        </p:spPr>
+        <p:style>
+          <a:lnRef idx="1">
+            <a:schemeClr val="accent1"/>
+          </a:lnRef>
+          <a:fillRef idx="3">
+            <a:schemeClr val="accent1"/>
+          </a:fillRef>
+          <a:effectRef idx="2">
+            <a:schemeClr val="accent1"/>
+          </a:effectRef>
+          <a:fontRef idx="minor">
+            <a:schemeClr val="lt1"/>
+          </a:fontRef>
+        </p:style>
+        <p:txBody>
+          <a:bodyPr rtlCol="0" anchor="ctr"/>
+          <a:lstStyle/>
+          <a:p>
+            <a:pPr algn="ctr"/>
+          </a:p>
+        </p:txBody>
+      </p:sp>
+      <p:sp>
+        <p:nvSpPr>
+          <p:cNvPr id="3" name="TextBox 2"/>
           <p:cNvSpPr txBox="1"/>
           <p:nvPr/>
         </p:nvSpPr>
         <p:spPr>
           <a:xfrm>
-            <a:off x="731520" y="365760"/>
-            <a:ext cx="10725912" cy="731520"/>
+            <a:off x="960120" y="320040"/>
+            <a:ext cx="10497312" cy="731520"/>
           </a:xfrm>
           <a:prstGeom prst="rect">
             <a:avLst/>
@@ -6949,7 +9241,7 @@
             <a:pPr>
               <a:defRPr sz="3600" b="1">
                 <a:solidFill>
-                  <a:srgbClr val="58A6FF"/>
+                  <a:srgbClr val="0366D6"/>
                 </a:solidFill>
                 <a:latin typeface="Microsoft JhengHei"/>
               </a:defRPr>
@@ -6962,7 +9254,7 @@
       </p:sp>
       <p:sp>
         <p:nvSpPr>
-          <p:cNvPr id="3" name="Rectangle 2"/>
+          <p:cNvPr id="4" name="Rectangle 3"/>
           <p:cNvSpPr/>
           <p:nvPr/>
         </p:nvSpPr>
@@ -6975,10 +9267,12 @@
             <a:avLst/>
           </a:prstGeom>
           <a:solidFill>
-            <a:srgbClr val="161B22"/>
+            <a:srgbClr val="FFFFFF"/>
           </a:solidFill>
-          <a:ln>
-            <a:noFill/>
+          <a:ln w="19050">
+            <a:solidFill>
+              <a:srgbClr val="DADEE5"/>
+            </a:solidFill>
           </a:ln>
         </p:spPr>
         <p:style>
@@ -7005,7 +9299,7 @@
       </p:sp>
       <p:sp>
         <p:nvSpPr>
-          <p:cNvPr id="4" name="TextBox 3"/>
+          <p:cNvPr id="5" name="TextBox 4"/>
           <p:cNvSpPr txBox="1"/>
           <p:nvPr/>
         </p:nvSpPr>
@@ -7020,87 +9314,261 @@
           <a:noFill/>
         </p:spPr>
         <p:txBody>
-          <a:bodyPr wrap="square" lIns="0" tIns="0" rIns="0" bIns="0">
+          <a:bodyPr wrap="square" lIns="228600" rIns="228600" tIns="228600" bIns="228600">
             <a:spAutoFit/>
           </a:bodyPr>
           <a:lstStyle/>
           <a:p>
             <a:pPr>
-              <a:spcAft>
-                <a:spcPts val="1000"/>
-              </a:spcAft>
-              <a:defRPr sz="2000">
-                <a:solidFill>
-                  <a:srgbClr val="FFFFFF"/>
-                </a:solidFill>
-                <a:latin typeface="Microsoft JhengHei"/>
-              </a:defRPr>
-            </a:pPr>
-            <a:r>
+              <a:lnSpc>
+                <a:spcPct val="125000"/>
+              </a:lnSpc>
+              <a:spcAft>
+                <a:spcPts val="600"/>
+              </a:spcAft>
+              <a:defRPr>
+                <a:latin typeface="Microsoft JhengHei"/>
+              </a:defRPr>
+            </a:pPr>
+            <a:r>
+              <a:rPr sz="2000">
+                <a:solidFill>
+                  <a:srgbClr val="1F2328"/>
+                </a:solidFill>
+                <a:latin typeface="Microsoft JhengHei"/>
+              </a:rPr>
               <a:t>Git 最好的學習方式是「實作」。今天請完成以下挑戰：</a:t>
             </a:r>
           </a:p>
           <a:p>
             <a:pPr lvl="1">
-              <a:spcAft>
-                <a:spcPts val="1000"/>
-              </a:spcAft>
-              <a:defRPr sz="1800">
-                <a:solidFill>
-                  <a:srgbClr val="FFFFFF"/>
-                </a:solidFill>
-                <a:latin typeface="Microsoft JhengHei"/>
-              </a:defRPr>
-            </a:pPr>
-            <a:r>
-              <a:t>1. **註冊 GitHub 帳號**並啟用雙因素驗證 (2FA)</a:t>
+              <a:lnSpc>
+                <a:spcPct val="125000"/>
+              </a:lnSpc>
+              <a:spcAft>
+                <a:spcPts val="600"/>
+              </a:spcAft>
+              <a:defRPr>
+                <a:latin typeface="Microsoft JhengHei"/>
+              </a:defRPr>
+            </a:pPr>
+            <a:r>
+              <a:rPr sz="1800">
+                <a:solidFill>
+                  <a:srgbClr val="1F2328"/>
+                </a:solidFill>
+                <a:latin typeface="Microsoft JhengHei"/>
+              </a:rPr>
+              <a:t>1. </a:t>
+            </a:r>
+            <a:r>
+              <a:rPr sz="1800" b="1">
+                <a:solidFill>
+                  <a:srgbClr val="1F2328"/>
+                </a:solidFill>
+                <a:latin typeface="Microsoft JhengHei"/>
+              </a:rPr>
+              <a:t>註冊 GitHub 帳號</a:t>
+            </a:r>
+            <a:r>
+              <a:rPr sz="1800">
+                <a:solidFill>
+                  <a:srgbClr val="1F2328"/>
+                </a:solidFill>
+                <a:latin typeface="Microsoft JhengHei"/>
+              </a:rPr>
+              <a:t>並啟用雙因素驗證 (2FA)</a:t>
             </a:r>
           </a:p>
           <a:p>
             <a:pPr lvl="1">
-              <a:spcAft>
-                <a:spcPts val="1000"/>
-              </a:spcAft>
-              <a:defRPr sz="1800">
-                <a:solidFill>
-                  <a:srgbClr val="FFFFFF"/>
-                </a:solidFill>
-                <a:latin typeface="Microsoft JhengHei"/>
-              </a:defRPr>
-            </a:pPr>
-            <a:r>
-              <a:t>2. **建立特殊同名儲存庫**：新建 `你的帳號/你的帳號` 儲存庫，填寫 `README.md`，這會變成你的 GitHub 個人主頁！</a:t>
+              <a:lnSpc>
+                <a:spcPct val="125000"/>
+              </a:lnSpc>
+              <a:spcAft>
+                <a:spcPts val="600"/>
+              </a:spcAft>
+              <a:defRPr>
+                <a:latin typeface="Microsoft JhengHei"/>
+              </a:defRPr>
+            </a:pPr>
+            <a:r>
+              <a:rPr sz="1800">
+                <a:solidFill>
+                  <a:srgbClr val="1F2328"/>
+                </a:solidFill>
+                <a:latin typeface="Microsoft JhengHei"/>
+              </a:rPr>
+              <a:t>2. </a:t>
+            </a:r>
+            <a:r>
+              <a:rPr sz="1800" b="1">
+                <a:solidFill>
+                  <a:srgbClr val="1F2328"/>
+                </a:solidFill>
+                <a:latin typeface="Microsoft JhengHei"/>
+              </a:rPr>
+              <a:t>建立特殊同名儲存庫</a:t>
+            </a:r>
+            <a:r>
+              <a:rPr sz="1800">
+                <a:solidFill>
+                  <a:srgbClr val="1F2328"/>
+                </a:solidFill>
+                <a:latin typeface="Microsoft JhengHei"/>
+              </a:rPr>
+              <a:t>：新建 </a:t>
+            </a:r>
+            <a:r>
+              <a:rPr sz="1800" b="1">
+                <a:solidFill>
+                  <a:srgbClr val="F05032"/>
+                </a:solidFill>
+                <a:latin typeface="Consolas"/>
+              </a:rPr>
+              <a:t>你的帳號/你的帳號</a:t>
+            </a:r>
+            <a:r>
+              <a:rPr sz="1800">
+                <a:solidFill>
+                  <a:srgbClr val="1F2328"/>
+                </a:solidFill>
+                <a:latin typeface="Microsoft JhengHei"/>
+              </a:rPr>
+              <a:t> 儲存庫，填寫 </a:t>
+            </a:r>
+            <a:r>
+              <a:rPr sz="1800" b="1">
+                <a:solidFill>
+                  <a:srgbClr val="F05032"/>
+                </a:solidFill>
+                <a:latin typeface="Consolas"/>
+              </a:rPr>
+              <a:t>README.md</a:t>
+            </a:r>
+            <a:r>
+              <a:rPr sz="1800">
+                <a:solidFill>
+                  <a:srgbClr val="1F2328"/>
+                </a:solidFill>
+                <a:latin typeface="Microsoft JhengHei"/>
+              </a:rPr>
+              <a:t>，這會變成你的 GitHub 個人主頁！</a:t>
             </a:r>
           </a:p>
           <a:p>
             <a:pPr lvl="1">
-              <a:spcAft>
-                <a:spcPts val="1000"/>
-              </a:spcAft>
-              <a:defRPr sz="1800">
-                <a:solidFill>
-                  <a:srgbClr val="FFFFFF"/>
-                </a:solidFill>
-                <a:latin typeface="Microsoft JhengHei"/>
-              </a:defRPr>
-            </a:pPr>
-            <a:r>
-              <a:t>3. **建立一個測試專案**，練習 `add` ➡ `commit` ➡ `push` 的完整流程</a:t>
+              <a:lnSpc>
+                <a:spcPct val="125000"/>
+              </a:lnSpc>
+              <a:spcAft>
+                <a:spcPts val="600"/>
+              </a:spcAft>
+              <a:defRPr>
+                <a:latin typeface="Microsoft JhengHei"/>
+              </a:defRPr>
+            </a:pPr>
+            <a:r>
+              <a:rPr sz="1800">
+                <a:solidFill>
+                  <a:srgbClr val="1F2328"/>
+                </a:solidFill>
+                <a:latin typeface="Microsoft JhengHei"/>
+              </a:rPr>
+              <a:t>3. </a:t>
+            </a:r>
+            <a:r>
+              <a:rPr sz="1800" b="1">
+                <a:solidFill>
+                  <a:srgbClr val="1F2328"/>
+                </a:solidFill>
+                <a:latin typeface="Microsoft JhengHei"/>
+              </a:rPr>
+              <a:t>建立一個測試專案</a:t>
+            </a:r>
+            <a:r>
+              <a:rPr sz="1800">
+                <a:solidFill>
+                  <a:srgbClr val="1F2328"/>
+                </a:solidFill>
+                <a:latin typeface="Microsoft JhengHei"/>
+              </a:rPr>
+              <a:t>，練習 </a:t>
+            </a:r>
+            <a:r>
+              <a:rPr sz="1800" b="1">
+                <a:solidFill>
+                  <a:srgbClr val="F05032"/>
+                </a:solidFill>
+                <a:latin typeface="Consolas"/>
+              </a:rPr>
+              <a:t>add</a:t>
+            </a:r>
+            <a:r>
+              <a:rPr sz="1800">
+                <a:solidFill>
+                  <a:srgbClr val="1F2328"/>
+                </a:solidFill>
+                <a:latin typeface="Microsoft JhengHei"/>
+              </a:rPr>
+              <a:t> ➡ </a:t>
+            </a:r>
+            <a:r>
+              <a:rPr sz="1800" b="1">
+                <a:solidFill>
+                  <a:srgbClr val="F05032"/>
+                </a:solidFill>
+                <a:latin typeface="Consolas"/>
+              </a:rPr>
+              <a:t>commit</a:t>
+            </a:r>
+            <a:r>
+              <a:rPr sz="1800">
+                <a:solidFill>
+                  <a:srgbClr val="1F2328"/>
+                </a:solidFill>
+                <a:latin typeface="Microsoft JhengHei"/>
+              </a:rPr>
+              <a:t> ➡ </a:t>
+            </a:r>
+            <a:r>
+              <a:rPr sz="1800" b="1">
+                <a:solidFill>
+                  <a:srgbClr val="F05032"/>
+                </a:solidFill>
+                <a:latin typeface="Consolas"/>
+              </a:rPr>
+              <a:t>push</a:t>
+            </a:r>
+            <a:r>
+              <a:rPr sz="1800">
+                <a:solidFill>
+                  <a:srgbClr val="1F2328"/>
+                </a:solidFill>
+                <a:latin typeface="Microsoft JhengHei"/>
+              </a:rPr>
+              <a:t> 的完整流程</a:t>
             </a:r>
           </a:p>
           <a:p>
             <a:pPr>
-              <a:spcAft>
-                <a:spcPts val="1000"/>
-              </a:spcAft>
-              <a:defRPr sz="2000">
-                <a:solidFill>
-                  <a:srgbClr val="FFFFFF"/>
-                </a:solidFill>
-                <a:latin typeface="Microsoft JhengHei"/>
-              </a:defRPr>
-            </a:pPr>
-            <a:r>
+              <a:lnSpc>
+                <a:spcPct val="125000"/>
+              </a:lnSpc>
+              <a:spcAft>
+                <a:spcPts val="600"/>
+              </a:spcAft>
+              <a:defRPr>
+                <a:latin typeface="Microsoft JhengHei"/>
+              </a:defRPr>
+            </a:pPr>
+            <a:r>
+              <a:rPr sz="2000">
+                <a:solidFill>
+                  <a:srgbClr val="1F2328"/>
+                </a:solidFill>
+                <a:latin typeface="Microsoft JhengHei"/>
+              </a:rPr>
               <a:t>Git 幾乎可以救回任何已提交的檔案，不要害怕輸入指令，開始動手吧！🎉</a:t>
             </a:r>
           </a:p>
@@ -7120,7 +9588,7 @@
     <p:bg>
       <p:bgPr>
         <a:solidFill>
-          <a:srgbClr val="0D1117"/>
+          <a:srgbClr val="F6F8FA"/>
         </a:solidFill>
         <a:effectLst/>
       </p:bgPr>
@@ -7134,14 +9602,59 @@
       <p:grpSpPr/>
       <p:sp>
         <p:nvSpPr>
-          <p:cNvPr id="2" name="TextBox 1"/>
+          <p:cNvPr id="2" name="Rectangle 1"/>
+          <p:cNvSpPr/>
+          <p:nvPr/>
+        </p:nvSpPr>
+        <p:spPr>
+          <a:xfrm>
+            <a:off x="731520" y="384048"/>
+            <a:ext cx="91440" cy="502920"/>
+          </a:xfrm>
+          <a:prstGeom prst="rect">
+            <a:avLst/>
+          </a:prstGeom>
+          <a:solidFill>
+            <a:srgbClr val="0366D6"/>
+          </a:solidFill>
+          <a:ln>
+            <a:solidFill>
+              <a:srgbClr val="0366D6"/>
+            </a:solidFill>
+          </a:ln>
+        </p:spPr>
+        <p:style>
+          <a:lnRef idx="1">
+            <a:schemeClr val="accent1"/>
+          </a:lnRef>
+          <a:fillRef idx="3">
+            <a:schemeClr val="accent1"/>
+          </a:fillRef>
+          <a:effectRef idx="2">
+            <a:schemeClr val="accent1"/>
+          </a:effectRef>
+          <a:fontRef idx="minor">
+            <a:schemeClr val="lt1"/>
+          </a:fontRef>
+        </p:style>
+        <p:txBody>
+          <a:bodyPr rtlCol="0" anchor="ctr"/>
+          <a:lstStyle/>
+          <a:p>
+            <a:pPr algn="ctr"/>
+          </a:p>
+        </p:txBody>
+      </p:sp>
+      <p:sp>
+        <p:nvSpPr>
+          <p:cNvPr id="3" name="TextBox 2"/>
           <p:cNvSpPr txBox="1"/>
           <p:nvPr/>
         </p:nvSpPr>
         <p:spPr>
           <a:xfrm>
-            <a:off x="731520" y="365760"/>
-            <a:ext cx="10725912" cy="731520"/>
+            <a:off x="960120" y="320040"/>
+            <a:ext cx="10497312" cy="731520"/>
           </a:xfrm>
           <a:prstGeom prst="rect">
             <a:avLst/>
@@ -7157,7 +9670,7 @@
             <a:pPr>
               <a:defRPr sz="3600" b="1">
                 <a:solidFill>
-                  <a:srgbClr val="58A6FF"/>
+                  <a:srgbClr val="0366D6"/>
                 </a:solidFill>
                 <a:latin typeface="Microsoft JhengHei"/>
               </a:defRPr>
@@ -7170,7 +9683,7 @@
       </p:sp>
       <p:sp>
         <p:nvSpPr>
-          <p:cNvPr id="3" name="Rectangle 2"/>
+          <p:cNvPr id="4" name="Rectangle 3"/>
           <p:cNvSpPr/>
           <p:nvPr/>
         </p:nvSpPr>
@@ -7183,10 +9696,12 @@
             <a:avLst/>
           </a:prstGeom>
           <a:solidFill>
-            <a:srgbClr val="161B22"/>
+            <a:srgbClr val="FFFFFF"/>
           </a:solidFill>
-          <a:ln>
-            <a:noFill/>
+          <a:ln w="19050">
+            <a:solidFill>
+              <a:srgbClr val="DADEE5"/>
+            </a:solidFill>
           </a:ln>
         </p:spPr>
         <p:style>
@@ -7213,7 +9728,7 @@
       </p:sp>
       <p:sp>
         <p:nvSpPr>
-          <p:cNvPr id="4" name="TextBox 3"/>
+          <p:cNvPr id="5" name="TextBox 4"/>
           <p:cNvSpPr txBox="1"/>
           <p:nvPr/>
         </p:nvSpPr>
@@ -7228,119 +9743,179 @@
           <a:noFill/>
         </p:spPr>
         <p:txBody>
-          <a:bodyPr wrap="square" lIns="0" tIns="0" rIns="0" bIns="0">
+          <a:bodyPr wrap="square" lIns="228600" rIns="228600" tIns="228600" bIns="228600">
             <a:spAutoFit/>
           </a:bodyPr>
           <a:lstStyle/>
           <a:p>
             <a:pPr>
-              <a:spcAft>
-                <a:spcPts val="1000"/>
-              </a:spcAft>
-              <a:defRPr sz="2000">
-                <a:solidFill>
-                  <a:srgbClr val="FFFFFF"/>
-                </a:solidFill>
-                <a:latin typeface="Microsoft JhengHei"/>
-              </a:defRPr>
-            </a:pPr>
-            <a:r>
+              <a:lnSpc>
+                <a:spcPct val="125000"/>
+              </a:lnSpc>
+              <a:spcAft>
+                <a:spcPts val="600"/>
+              </a:spcAft>
+              <a:defRPr>
+                <a:latin typeface="Microsoft JhengHei"/>
+              </a:defRPr>
+            </a:pPr>
+            <a:r>
+              <a:rPr sz="2000">
+                <a:solidFill>
+                  <a:srgbClr val="1F2328"/>
+                </a:solidFill>
+                <a:latin typeface="Microsoft JhengHei"/>
+              </a:rPr>
               <a:t>許多初學者會把這兩者搞混，其實它們是完全不同的東西：</a:t>
             </a:r>
           </a:p>
           <a:p>
             <a:pPr>
-              <a:spcAft>
-                <a:spcPts val="1000"/>
-              </a:spcAft>
-              <a:defRPr sz="2000">
-                <a:solidFill>
-                  <a:srgbClr val="FFFFFF"/>
-                </a:solidFill>
-                <a:latin typeface="Microsoft JhengHei"/>
-              </a:defRPr>
-            </a:pPr>
-            <a:r>
-              <a:t>**Git (本地版本控制軟體)**：</a:t>
+              <a:lnSpc>
+                <a:spcPct val="125000"/>
+              </a:lnSpc>
+              <a:spcAft>
+                <a:spcPts val="600"/>
+              </a:spcAft>
+              <a:defRPr>
+                <a:latin typeface="Microsoft JhengHei"/>
+              </a:defRPr>
+            </a:pPr>
+            <a:r>
+              <a:rPr sz="2000" b="1">
+                <a:solidFill>
+                  <a:srgbClr val="1F2328"/>
+                </a:solidFill>
+                <a:latin typeface="Microsoft JhengHei"/>
+              </a:rPr>
+              <a:t>Git (本地版本控制軟體)</a:t>
+            </a:r>
+            <a:r>
+              <a:rPr sz="2000">
+                <a:solidFill>
+                  <a:srgbClr val="1F2328"/>
+                </a:solidFill>
+                <a:latin typeface="Microsoft JhengHei"/>
+              </a:rPr>
+              <a:t>：</a:t>
             </a:r>
           </a:p>
           <a:p>
             <a:pPr lvl="1">
-              <a:spcAft>
-                <a:spcPts val="1000"/>
-              </a:spcAft>
-              <a:defRPr sz="1800">
-                <a:solidFill>
-                  <a:srgbClr val="FFFFFF"/>
-                </a:solidFill>
-                <a:latin typeface="Microsoft JhengHei"/>
-              </a:defRPr>
-            </a:pPr>
-            <a:r>
+              <a:lnSpc>
+                <a:spcPct val="125000"/>
+              </a:lnSpc>
+              <a:spcAft>
+                <a:spcPts val="600"/>
+              </a:spcAft>
+              <a:defRPr>
+                <a:latin typeface="Microsoft JhengHei"/>
+              </a:defRPr>
+            </a:pPr>
+            <a:r>
+              <a:rPr sz="1800">
+                <a:solidFill>
+                  <a:srgbClr val="1F2328"/>
+                </a:solidFill>
+                <a:latin typeface="Microsoft JhengHei"/>
+              </a:rPr>
               <a:t>安裝在你的本機電腦上的軟體，負責記錄檔案變更、管理分支與合併</a:t>
             </a:r>
           </a:p>
           <a:p>
             <a:pPr lvl="1">
-              <a:spcAft>
-                <a:spcPts val="1000"/>
-              </a:spcAft>
-              <a:defRPr sz="1800">
-                <a:solidFill>
-                  <a:srgbClr val="FFFFFF"/>
-                </a:solidFill>
-                <a:latin typeface="Microsoft JhengHei"/>
-              </a:defRPr>
-            </a:pPr>
-            <a:r>
+              <a:lnSpc>
+                <a:spcPct val="125000"/>
+              </a:lnSpc>
+              <a:spcAft>
+                <a:spcPts val="600"/>
+              </a:spcAft>
+              <a:defRPr>
+                <a:latin typeface="Microsoft JhengHei"/>
+              </a:defRPr>
+            </a:pPr>
+            <a:r>
+              <a:rPr sz="1800">
+                <a:solidFill>
+                  <a:srgbClr val="1F2328"/>
+                </a:solidFill>
+                <a:latin typeface="Microsoft JhengHei"/>
+              </a:rPr>
               <a:t>離線也可以完全正常使用，不需要網路</a:t>
             </a:r>
           </a:p>
           <a:p>
             <a:pPr>
-              <a:spcAft>
-                <a:spcPts val="1000"/>
-              </a:spcAft>
-              <a:defRPr sz="2000">
-                <a:solidFill>
-                  <a:srgbClr val="FFFFFF"/>
-                </a:solidFill>
-                <a:latin typeface="Microsoft JhengHei"/>
-              </a:defRPr>
-            </a:pPr>
-            <a:r>
-              <a:t>**GitHub (雲端代管平台)**：</a:t>
+              <a:lnSpc>
+                <a:spcPct val="125000"/>
+              </a:lnSpc>
+              <a:spcAft>
+                <a:spcPts val="600"/>
+              </a:spcAft>
+              <a:defRPr>
+                <a:latin typeface="Microsoft JhengHei"/>
+              </a:defRPr>
+            </a:pPr>
+            <a:r>
+              <a:rPr sz="2000" b="1">
+                <a:solidFill>
+                  <a:srgbClr val="1F2328"/>
+                </a:solidFill>
+                <a:latin typeface="Microsoft JhengHei"/>
+              </a:rPr>
+              <a:t>GitHub (雲端代管平台)</a:t>
+            </a:r>
+            <a:r>
+              <a:rPr sz="2000">
+                <a:solidFill>
+                  <a:srgbClr val="1F2328"/>
+                </a:solidFill>
+                <a:latin typeface="Microsoft JhengHei"/>
+              </a:rPr>
+              <a:t>：</a:t>
             </a:r>
           </a:p>
           <a:p>
             <a:pPr lvl="1">
-              <a:spcAft>
-                <a:spcPts val="1000"/>
-              </a:spcAft>
-              <a:defRPr sz="1800">
-                <a:solidFill>
-                  <a:srgbClr val="FFFFFF"/>
-                </a:solidFill>
-                <a:latin typeface="Microsoft JhengHei"/>
-              </a:defRPr>
-            </a:pPr>
-            <a:r>
+              <a:lnSpc>
+                <a:spcPct val="125000"/>
+              </a:lnSpc>
+              <a:spcAft>
+                <a:spcPts val="600"/>
+              </a:spcAft>
+              <a:defRPr>
+                <a:latin typeface="Microsoft JhengHei"/>
+              </a:defRPr>
+            </a:pPr>
+            <a:r>
+              <a:rPr sz="1800">
+                <a:solidFill>
+                  <a:srgbClr val="1F2328"/>
+                </a:solidFill>
+                <a:latin typeface="Microsoft JhengHei"/>
+              </a:rPr>
               <a:t>將你的 Git 本地儲存庫備份到雲端的網站平台</a:t>
             </a:r>
           </a:p>
           <a:p>
             <a:pPr lvl="1">
-              <a:spcAft>
-                <a:spcPts val="1000"/>
-              </a:spcAft>
-              <a:defRPr sz="1800">
-                <a:solidFill>
-                  <a:srgbClr val="FFFFFF"/>
-                </a:solidFill>
-                <a:latin typeface="Microsoft JhengHei"/>
-              </a:defRPr>
-            </a:pPr>
-            <a:r>
+              <a:lnSpc>
+                <a:spcPct val="125000"/>
+              </a:lnSpc>
+              <a:spcAft>
+                <a:spcPts val="600"/>
+              </a:spcAft>
+              <a:defRPr>
+                <a:latin typeface="Microsoft JhengHei"/>
+              </a:defRPr>
+            </a:pPr>
+            <a:r>
+              <a:rPr sz="1800">
+                <a:solidFill>
+                  <a:srgbClr val="1F2328"/>
+                </a:solidFill>
+                <a:latin typeface="Microsoft JhengHei"/>
+              </a:rPr>
               <a:t>提供網頁圖形介面，強大的多人協作、Pull Request 審查與 Issue 討論區</a:t>
             </a:r>
           </a:p>
@@ -7360,7 +9935,7 @@
     <p:bg>
       <p:bgPr>
         <a:solidFill>
-          <a:srgbClr val="0D1117"/>
+          <a:srgbClr val="F6F8FA"/>
         </a:solidFill>
         <a:effectLst/>
       </p:bgPr>
@@ -7374,14 +9949,59 @@
       <p:grpSpPr/>
       <p:sp>
         <p:nvSpPr>
-          <p:cNvPr id="2" name="TextBox 1"/>
+          <p:cNvPr id="2" name="Rectangle 1"/>
+          <p:cNvSpPr/>
+          <p:nvPr/>
+        </p:nvSpPr>
+        <p:spPr>
+          <a:xfrm>
+            <a:off x="731520" y="384048"/>
+            <a:ext cx="91440" cy="502920"/>
+          </a:xfrm>
+          <a:prstGeom prst="rect">
+            <a:avLst/>
+          </a:prstGeom>
+          <a:solidFill>
+            <a:srgbClr val="0366D6"/>
+          </a:solidFill>
+          <a:ln>
+            <a:solidFill>
+              <a:srgbClr val="0366D6"/>
+            </a:solidFill>
+          </a:ln>
+        </p:spPr>
+        <p:style>
+          <a:lnRef idx="1">
+            <a:schemeClr val="accent1"/>
+          </a:lnRef>
+          <a:fillRef idx="3">
+            <a:schemeClr val="accent1"/>
+          </a:fillRef>
+          <a:effectRef idx="2">
+            <a:schemeClr val="accent1"/>
+          </a:effectRef>
+          <a:fontRef idx="minor">
+            <a:schemeClr val="lt1"/>
+          </a:fontRef>
+        </p:style>
+        <p:txBody>
+          <a:bodyPr rtlCol="0" anchor="ctr"/>
+          <a:lstStyle/>
+          <a:p>
+            <a:pPr algn="ctr"/>
+          </a:p>
+        </p:txBody>
+      </p:sp>
+      <p:sp>
+        <p:nvSpPr>
+          <p:cNvPr id="3" name="TextBox 2"/>
           <p:cNvSpPr txBox="1"/>
           <p:nvPr/>
         </p:nvSpPr>
         <p:spPr>
           <a:xfrm>
-            <a:off x="731520" y="365760"/>
-            <a:ext cx="10725912" cy="731520"/>
+            <a:off x="960120" y="320040"/>
+            <a:ext cx="10497312" cy="731520"/>
           </a:xfrm>
           <a:prstGeom prst="rect">
             <a:avLst/>
@@ -7397,7 +10017,7 @@
             <a:pPr>
               <a:defRPr sz="3600" b="1">
                 <a:solidFill>
-                  <a:srgbClr val="58A6FF"/>
+                  <a:srgbClr val="0366D6"/>
                 </a:solidFill>
                 <a:latin typeface="Microsoft JhengHei"/>
               </a:defRPr>
@@ -7410,7 +10030,7 @@
       </p:sp>
       <p:sp>
         <p:nvSpPr>
-          <p:cNvPr id="3" name="Rectangle 2"/>
+          <p:cNvPr id="4" name="Rectangle 3"/>
           <p:cNvSpPr/>
           <p:nvPr/>
         </p:nvSpPr>
@@ -7423,10 +10043,12 @@
             <a:avLst/>
           </a:prstGeom>
           <a:solidFill>
-            <a:srgbClr val="161B22"/>
+            <a:srgbClr val="FFFFFF"/>
           </a:solidFill>
-          <a:ln>
-            <a:noFill/>
+          <a:ln w="19050">
+            <a:solidFill>
+              <a:srgbClr val="DADEE5"/>
+            </a:solidFill>
           </a:ln>
         </p:spPr>
         <p:style>
@@ -7453,7 +10075,7 @@
       </p:sp>
       <p:sp>
         <p:nvSpPr>
-          <p:cNvPr id="4" name="TextBox 3"/>
+          <p:cNvPr id="5" name="TextBox 4"/>
           <p:cNvSpPr txBox="1"/>
           <p:nvPr/>
         </p:nvSpPr>
@@ -7468,136 +10090,256 @@
           <a:noFill/>
         </p:spPr>
         <p:txBody>
-          <a:bodyPr wrap="square" lIns="0" tIns="0" rIns="0" bIns="0">
+          <a:bodyPr wrap="square" lIns="228600" rIns="228600" tIns="228600" bIns="228600">
             <a:spAutoFit/>
           </a:bodyPr>
           <a:lstStyle/>
           <a:p>
             <a:pPr>
-              <a:spcAft>
-                <a:spcPts val="1000"/>
-              </a:spcAft>
-              <a:defRPr sz="2000">
-                <a:solidFill>
-                  <a:srgbClr val="FFFFFF"/>
-                </a:solidFill>
-                <a:latin typeface="Microsoft JhengHei"/>
-              </a:defRPr>
-            </a:pPr>
-            <a:r>
-              <a:t>**Windows 使用者**：</a:t>
+              <a:lnSpc>
+                <a:spcPct val="125000"/>
+              </a:lnSpc>
+              <a:spcAft>
+                <a:spcPts val="600"/>
+              </a:spcAft>
+              <a:defRPr>
+                <a:latin typeface="Microsoft JhengHei"/>
+              </a:defRPr>
+            </a:pPr>
+            <a:r>
+              <a:rPr sz="2000" b="1">
+                <a:solidFill>
+                  <a:srgbClr val="1F2328"/>
+                </a:solidFill>
+                <a:latin typeface="Microsoft JhengHei"/>
+              </a:rPr>
+              <a:t>Windows 使用者</a:t>
+            </a:r>
+            <a:r>
+              <a:rPr sz="2000">
+                <a:solidFill>
+                  <a:srgbClr val="1F2328"/>
+                </a:solidFill>
+                <a:latin typeface="Microsoft JhengHei"/>
+              </a:rPr>
+              <a:t>：</a:t>
             </a:r>
           </a:p>
           <a:p>
             <a:pPr lvl="1">
-              <a:spcAft>
-                <a:spcPts val="1000"/>
-              </a:spcAft>
-              <a:defRPr sz="1800">
-                <a:solidFill>
-                  <a:srgbClr val="FFFFFF"/>
-                </a:solidFill>
-                <a:latin typeface="Microsoft JhengHei"/>
-              </a:defRPr>
-            </a:pPr>
-            <a:r>
-              <a:t>前往官網 `https://git-scm.com` 下載 Windows 安裝檔</a:t>
+              <a:lnSpc>
+                <a:spcPct val="125000"/>
+              </a:lnSpc>
+              <a:spcAft>
+                <a:spcPts val="600"/>
+              </a:spcAft>
+              <a:defRPr>
+                <a:latin typeface="Microsoft JhengHei"/>
+              </a:defRPr>
+            </a:pPr>
+            <a:r>
+              <a:rPr sz="1800">
+                <a:solidFill>
+                  <a:srgbClr val="1F2328"/>
+                </a:solidFill>
+                <a:latin typeface="Microsoft JhengHei"/>
+              </a:rPr>
+              <a:t>前往官網 </a:t>
+            </a:r>
+            <a:r>
+              <a:rPr sz="1800" b="1">
+                <a:solidFill>
+                  <a:srgbClr val="F05032"/>
+                </a:solidFill>
+                <a:latin typeface="Consolas"/>
+              </a:rPr>
+              <a:t>https://git-scm.com</a:t>
+            </a:r>
+            <a:r>
+              <a:rPr sz="1800">
+                <a:solidFill>
+                  <a:srgbClr val="1F2328"/>
+                </a:solidFill>
+                <a:latin typeface="Microsoft JhengHei"/>
+              </a:rPr>
+              <a:t> 下載 Windows 安裝檔</a:t>
             </a:r>
           </a:p>
           <a:p>
             <a:pPr lvl="1">
-              <a:spcAft>
-                <a:spcPts val="1000"/>
-              </a:spcAft>
-              <a:defRPr sz="1800">
-                <a:solidFill>
-                  <a:srgbClr val="FFFFFF"/>
-                </a:solidFill>
-                <a:latin typeface="Microsoft JhengHei"/>
-              </a:defRPr>
-            </a:pPr>
-            <a:r>
+              <a:lnSpc>
+                <a:spcPct val="125000"/>
+              </a:lnSpc>
+              <a:spcAft>
+                <a:spcPts val="600"/>
+              </a:spcAft>
+              <a:defRPr>
+                <a:latin typeface="Microsoft JhengHei"/>
+              </a:defRPr>
+            </a:pPr>
+            <a:r>
+              <a:rPr sz="1800">
+                <a:solidFill>
+                  <a:srgbClr val="1F2328"/>
+                </a:solidFill>
+                <a:latin typeface="Microsoft JhengHei"/>
+              </a:rPr>
               <a:t>安裝時大多保持預設設定，預設編輯器建議選擇 VS Code</a:t>
             </a:r>
           </a:p>
           <a:p>
             <a:pPr>
-              <a:spcAft>
-                <a:spcPts val="1000"/>
-              </a:spcAft>
-              <a:defRPr sz="2000">
-                <a:solidFill>
-                  <a:srgbClr val="FFFFFF"/>
-                </a:solidFill>
-                <a:latin typeface="Microsoft JhengHei"/>
-              </a:defRPr>
-            </a:pPr>
-            <a:r>
-              <a:t>**macOS 使用者**：</a:t>
+              <a:lnSpc>
+                <a:spcPct val="125000"/>
+              </a:lnSpc>
+              <a:spcAft>
+                <a:spcPts val="600"/>
+              </a:spcAft>
+              <a:defRPr>
+                <a:latin typeface="Microsoft JhengHei"/>
+              </a:defRPr>
+            </a:pPr>
+            <a:r>
+              <a:rPr sz="2000" b="1">
+                <a:solidFill>
+                  <a:srgbClr val="1F2328"/>
+                </a:solidFill>
+                <a:latin typeface="Microsoft JhengHei"/>
+              </a:rPr>
+              <a:t>macOS 使用者</a:t>
+            </a:r>
+            <a:r>
+              <a:rPr sz="2000">
+                <a:solidFill>
+                  <a:srgbClr val="1F2328"/>
+                </a:solidFill>
+                <a:latin typeface="Microsoft JhengHei"/>
+              </a:rPr>
+              <a:t>：</a:t>
             </a:r>
           </a:p>
           <a:p>
             <a:pPr lvl="1">
-              <a:spcAft>
-                <a:spcPts val="1000"/>
-              </a:spcAft>
-              <a:defRPr sz="1800">
-                <a:solidFill>
-                  <a:srgbClr val="FFFFFF"/>
-                </a:solidFill>
-                <a:latin typeface="Microsoft JhengHei"/>
-              </a:defRPr>
-            </a:pPr>
-            <a:r>
-              <a:t>打開「終端機」(Terminal)，輸入 `git --version`</a:t>
+              <a:lnSpc>
+                <a:spcPct val="125000"/>
+              </a:lnSpc>
+              <a:spcAft>
+                <a:spcPts val="600"/>
+              </a:spcAft>
+              <a:defRPr>
+                <a:latin typeface="Microsoft JhengHei"/>
+              </a:defRPr>
+            </a:pPr>
+            <a:r>
+              <a:rPr sz="1800">
+                <a:solidFill>
+                  <a:srgbClr val="1F2328"/>
+                </a:solidFill>
+                <a:latin typeface="Microsoft JhengHei"/>
+              </a:rPr>
+              <a:t>打開「終端機」(Terminal)，輸入 </a:t>
+            </a:r>
+            <a:r>
+              <a:rPr sz="1800" b="1">
+                <a:solidFill>
+                  <a:srgbClr val="F05032"/>
+                </a:solidFill>
+                <a:latin typeface="Consolas"/>
+              </a:rPr>
+              <a:t>git --version</a:t>
             </a:r>
           </a:p>
           <a:p>
             <a:pPr lvl="1">
-              <a:spcAft>
-                <a:spcPts val="1000"/>
-              </a:spcAft>
-              <a:defRPr sz="1800">
-                <a:solidFill>
-                  <a:srgbClr val="FFFFFF"/>
-                </a:solidFill>
-                <a:latin typeface="Microsoft JhengHei"/>
-              </a:defRPr>
-            </a:pPr>
-            <a:r>
+              <a:lnSpc>
+                <a:spcPct val="125000"/>
+              </a:lnSpc>
+              <a:spcAft>
+                <a:spcPts val="600"/>
+              </a:spcAft>
+              <a:defRPr>
+                <a:latin typeface="Microsoft JhengHei"/>
+              </a:defRPr>
+            </a:pPr>
+            <a:r>
+              <a:rPr sz="1800">
+                <a:solidFill>
+                  <a:srgbClr val="1F2328"/>
+                </a:solidFill>
+                <a:latin typeface="Microsoft JhengHei"/>
+              </a:rPr>
               <a:t>若未安裝，系統會自動跳出提示引導你安裝 Xcode Command Line Tools</a:t>
             </a:r>
           </a:p>
           <a:p>
             <a:pPr>
-              <a:spcAft>
-                <a:spcPts val="1000"/>
-              </a:spcAft>
-              <a:defRPr sz="2000">
-                <a:solidFill>
-                  <a:srgbClr val="FFFFFF"/>
-                </a:solidFill>
-                <a:latin typeface="Microsoft JhengHei"/>
-              </a:defRPr>
-            </a:pPr>
-            <a:r>
-              <a:t>**驗證安裝**：</a:t>
+              <a:lnSpc>
+                <a:spcPct val="125000"/>
+              </a:lnSpc>
+              <a:spcAft>
+                <a:spcPts val="600"/>
+              </a:spcAft>
+              <a:defRPr>
+                <a:latin typeface="Microsoft JhengHei"/>
+              </a:defRPr>
+            </a:pPr>
+            <a:r>
+              <a:rPr sz="2000" b="1">
+                <a:solidFill>
+                  <a:srgbClr val="1F2328"/>
+                </a:solidFill>
+                <a:latin typeface="Microsoft JhengHei"/>
+              </a:rPr>
+              <a:t>驗證安裝</a:t>
+            </a:r>
+            <a:r>
+              <a:rPr sz="2000">
+                <a:solidFill>
+                  <a:srgbClr val="1F2328"/>
+                </a:solidFill>
+                <a:latin typeface="Microsoft JhengHei"/>
+              </a:rPr>
+              <a:t>：</a:t>
             </a:r>
           </a:p>
           <a:p>
             <a:pPr lvl="1">
-              <a:spcAft>
-                <a:spcPts val="1000"/>
-              </a:spcAft>
-              <a:defRPr sz="1800">
-                <a:solidFill>
-                  <a:srgbClr val="FFFFFF"/>
-                </a:solidFill>
-                <a:latin typeface="Microsoft JhengHei"/>
-              </a:defRPr>
-            </a:pPr>
-            <a:r>
-              <a:t>在命令提示字元/終端機輸入 `git --version`，正確顯示版本號即成功</a:t>
+              <a:lnSpc>
+                <a:spcPct val="125000"/>
+              </a:lnSpc>
+              <a:spcAft>
+                <a:spcPts val="600"/>
+              </a:spcAft>
+              <a:defRPr>
+                <a:latin typeface="Microsoft JhengHei"/>
+              </a:defRPr>
+            </a:pPr>
+            <a:r>
+              <a:rPr sz="1800">
+                <a:solidFill>
+                  <a:srgbClr val="1F2328"/>
+                </a:solidFill>
+                <a:latin typeface="Microsoft JhengHei"/>
+              </a:rPr>
+              <a:t>在命令提示字元/終端機輸入 </a:t>
+            </a:r>
+            <a:r>
+              <a:rPr sz="1800" b="1">
+                <a:solidFill>
+                  <a:srgbClr val="F05032"/>
+                </a:solidFill>
+                <a:latin typeface="Consolas"/>
+              </a:rPr>
+              <a:t>git --version</a:t>
+            </a:r>
+            <a:r>
+              <a:rPr sz="1800">
+                <a:solidFill>
+                  <a:srgbClr val="1F2328"/>
+                </a:solidFill>
+                <a:latin typeface="Microsoft JhengHei"/>
+              </a:rPr>
+              <a:t>，正確顯示版本號即成功</a:t>
             </a:r>
           </a:p>
         </p:txBody>
@@ -7616,7 +10358,7 @@
     <p:bg>
       <p:bgPr>
         <a:solidFill>
-          <a:srgbClr val="0D1117"/>
+          <a:srgbClr val="F6F8FA"/>
         </a:solidFill>
         <a:effectLst/>
       </p:bgPr>
@@ -7630,14 +10372,59 @@
       <p:grpSpPr/>
       <p:sp>
         <p:nvSpPr>
-          <p:cNvPr id="2" name="TextBox 1"/>
+          <p:cNvPr id="2" name="Rectangle 1"/>
+          <p:cNvSpPr/>
+          <p:nvPr/>
+        </p:nvSpPr>
+        <p:spPr>
+          <a:xfrm>
+            <a:off x="731520" y="384048"/>
+            <a:ext cx="91440" cy="502920"/>
+          </a:xfrm>
+          <a:prstGeom prst="rect">
+            <a:avLst/>
+          </a:prstGeom>
+          <a:solidFill>
+            <a:srgbClr val="0366D6"/>
+          </a:solidFill>
+          <a:ln>
+            <a:solidFill>
+              <a:srgbClr val="0366D6"/>
+            </a:solidFill>
+          </a:ln>
+        </p:spPr>
+        <p:style>
+          <a:lnRef idx="1">
+            <a:schemeClr val="accent1"/>
+          </a:lnRef>
+          <a:fillRef idx="3">
+            <a:schemeClr val="accent1"/>
+          </a:fillRef>
+          <a:effectRef idx="2">
+            <a:schemeClr val="accent1"/>
+          </a:effectRef>
+          <a:fontRef idx="minor">
+            <a:schemeClr val="lt1"/>
+          </a:fontRef>
+        </p:style>
+        <p:txBody>
+          <a:bodyPr rtlCol="0" anchor="ctr"/>
+          <a:lstStyle/>
+          <a:p>
+            <a:pPr algn="ctr"/>
+          </a:p>
+        </p:txBody>
+      </p:sp>
+      <p:sp>
+        <p:nvSpPr>
+          <p:cNvPr id="3" name="TextBox 2"/>
           <p:cNvSpPr txBox="1"/>
           <p:nvPr/>
         </p:nvSpPr>
         <p:spPr>
           <a:xfrm>
-            <a:off x="731520" y="365760"/>
-            <a:ext cx="10725912" cy="731520"/>
+            <a:off x="960120" y="320040"/>
+            <a:ext cx="10497312" cy="731520"/>
           </a:xfrm>
           <a:prstGeom prst="rect">
             <a:avLst/>
@@ -7653,7 +10440,7 @@
             <a:pPr>
               <a:defRPr sz="3600" b="1">
                 <a:solidFill>
-                  <a:srgbClr val="58A6FF"/>
+                  <a:srgbClr val="0366D6"/>
                 </a:solidFill>
                 <a:latin typeface="Microsoft JhengHei"/>
               </a:defRPr>
@@ -7666,7 +10453,7 @@
       </p:sp>
       <p:sp>
         <p:nvSpPr>
-          <p:cNvPr id="3" name="Rectangle 2"/>
+          <p:cNvPr id="4" name="Rectangle 3"/>
           <p:cNvSpPr/>
           <p:nvPr/>
         </p:nvSpPr>
@@ -7679,10 +10466,12 @@
             <a:avLst/>
           </a:prstGeom>
           <a:solidFill>
-            <a:srgbClr val="161B22"/>
+            <a:srgbClr val="FFFFFF"/>
           </a:solidFill>
-          <a:ln>
-            <a:noFill/>
+          <a:ln w="19050">
+            <a:solidFill>
+              <a:srgbClr val="DADEE5"/>
+            </a:solidFill>
           </a:ln>
         </p:spPr>
         <p:style>
@@ -7709,7 +10498,7 @@
       </p:sp>
       <p:sp>
         <p:nvSpPr>
-          <p:cNvPr id="4" name="TextBox 3"/>
+          <p:cNvPr id="5" name="TextBox 4"/>
           <p:cNvSpPr txBox="1"/>
           <p:nvPr/>
         </p:nvSpPr>
@@ -7724,136 +10513,229 @@
           <a:noFill/>
         </p:spPr>
         <p:txBody>
-          <a:bodyPr wrap="square" lIns="0" tIns="0" rIns="0" bIns="0">
+          <a:bodyPr wrap="square" lIns="228600" rIns="228600" tIns="228600" bIns="228600">
             <a:spAutoFit/>
           </a:bodyPr>
           <a:lstStyle/>
           <a:p>
             <a:pPr>
-              <a:spcAft>
-                <a:spcPts val="1000"/>
-              </a:spcAft>
-              <a:defRPr sz="2000">
-                <a:solidFill>
-                  <a:srgbClr val="FFFFFF"/>
-                </a:solidFill>
-                <a:latin typeface="Microsoft JhengHei"/>
-              </a:defRPr>
-            </a:pPr>
-            <a:r>
+              <a:lnSpc>
+                <a:spcPct val="125000"/>
+              </a:lnSpc>
+              <a:spcAft>
+                <a:spcPts val="600"/>
+              </a:spcAft>
+              <a:defRPr>
+                <a:latin typeface="Microsoft JhengHei"/>
+              </a:defRPr>
+            </a:pPr>
+            <a:r>
+              <a:rPr sz="2000">
+                <a:solidFill>
+                  <a:srgbClr val="1F2328"/>
+                </a:solidFill>
+                <a:latin typeface="Microsoft JhengHei"/>
+              </a:rPr>
               <a:t>安裝好 Git 後，第一件事是告訴 Git 你是誰。每次提交版本時，Git 都會記錄這些資訊：</a:t>
             </a:r>
           </a:p>
           <a:p>
             <a:pPr>
-              <a:spcAft>
-                <a:spcPts val="1000"/>
-              </a:spcAft>
-              <a:defRPr sz="2000">
-                <a:solidFill>
-                  <a:srgbClr val="FFFFFF"/>
-                </a:solidFill>
-                <a:latin typeface="Microsoft JhengHei"/>
-              </a:defRPr>
-            </a:pPr>
-            <a:r>
+              <a:lnSpc>
+                <a:spcPct val="125000"/>
+              </a:lnSpc>
+              <a:spcAft>
+                <a:spcPts val="600"/>
+              </a:spcAft>
+              <a:defRPr>
+                <a:latin typeface="Microsoft JhengHei"/>
+              </a:defRPr>
+            </a:pPr>
+            <a:r>
+              <a:rPr sz="2000">
+                <a:solidFill>
+                  <a:srgbClr val="1F2328"/>
+                </a:solidFill>
+                <a:latin typeface="Microsoft JhengHei"/>
+              </a:rPr>
               <a:t>在終端機輸入以下指令：</a:t>
             </a:r>
           </a:p>
           <a:p>
             <a:pPr lvl="1">
-              <a:spcAft>
-                <a:spcPts val="1000"/>
-              </a:spcAft>
-              <a:defRPr sz="1800">
-                <a:solidFill>
-                  <a:srgbClr val="FFFFFF"/>
-                </a:solidFill>
-                <a:latin typeface="Microsoft JhengHei"/>
-              </a:defRPr>
-            </a:pPr>
-            <a:r>
-              <a:t>`git config --global user.name "你的名字"` (建議使用英文名稱)</a:t>
+              <a:lnSpc>
+                <a:spcPct val="125000"/>
+              </a:lnSpc>
+              <a:spcAft>
+                <a:spcPts val="600"/>
+              </a:spcAft>
+              <a:defRPr>
+                <a:latin typeface="Microsoft JhengHei"/>
+              </a:defRPr>
+            </a:pPr>
+            <a:r>
+              <a:rPr sz="1800" b="1">
+                <a:solidFill>
+                  <a:srgbClr val="F05032"/>
+                </a:solidFill>
+                <a:latin typeface="Consolas"/>
+              </a:rPr>
+              <a:t>git config --global user.name "你的名字"</a:t>
+            </a:r>
+            <a:r>
+              <a:rPr sz="1800">
+                <a:solidFill>
+                  <a:srgbClr val="1F2328"/>
+                </a:solidFill>
+                <a:latin typeface="Microsoft JhengHei"/>
+              </a:rPr>
+              <a:t> (建議使用英文名稱)</a:t>
             </a:r>
           </a:p>
           <a:p>
             <a:pPr lvl="1">
-              <a:spcAft>
-                <a:spcPts val="1000"/>
-              </a:spcAft>
-              <a:defRPr sz="1800">
-                <a:solidFill>
-                  <a:srgbClr val="FFFFFF"/>
-                </a:solidFill>
-                <a:latin typeface="Microsoft JhengHei"/>
-              </a:defRPr>
-            </a:pPr>
-            <a:r>
-              <a:t>`git config --global user.email "你的Email@example.com"`</a:t>
+              <a:lnSpc>
+                <a:spcPct val="125000"/>
+              </a:lnSpc>
+              <a:spcAft>
+                <a:spcPts val="600"/>
+              </a:spcAft>
+              <a:defRPr>
+                <a:latin typeface="Microsoft JhengHei"/>
+              </a:defRPr>
+            </a:pPr>
+            <a:r>
+              <a:rPr sz="1800" b="1">
+                <a:solidFill>
+                  <a:srgbClr val="F05032"/>
+                </a:solidFill>
+                <a:latin typeface="Consolas"/>
+              </a:rPr>
+              <a:t>git config --global user.email "你的Email@example.com"</a:t>
             </a:r>
           </a:p>
           <a:p>
             <a:pPr>
-              <a:spcAft>
-                <a:spcPts val="1000"/>
-              </a:spcAft>
-              <a:defRPr sz="2000">
-                <a:solidFill>
-                  <a:srgbClr val="FFFFFF"/>
-                </a:solidFill>
-                <a:latin typeface="Microsoft JhengHei"/>
-              </a:defRPr>
-            </a:pPr>
-            <a:r>
-              <a:t>**注意事項**：</a:t>
+              <a:lnSpc>
+                <a:spcPct val="125000"/>
+              </a:lnSpc>
+              <a:spcAft>
+                <a:spcPts val="600"/>
+              </a:spcAft>
+              <a:defRPr>
+                <a:latin typeface="Microsoft JhengHei"/>
+              </a:defRPr>
+            </a:pPr>
+            <a:r>
+              <a:rPr sz="2000" b="1">
+                <a:solidFill>
+                  <a:srgbClr val="1F2328"/>
+                </a:solidFill>
+                <a:latin typeface="Microsoft JhengHei"/>
+              </a:rPr>
+              <a:t>注意事項</a:t>
+            </a:r>
+            <a:r>
+              <a:rPr sz="2000">
+                <a:solidFill>
+                  <a:srgbClr val="1F2328"/>
+                </a:solidFill>
+                <a:latin typeface="Microsoft JhengHei"/>
+              </a:rPr>
+              <a:t>：</a:t>
             </a:r>
           </a:p>
           <a:p>
             <a:pPr lvl="1">
-              <a:spcAft>
-                <a:spcPts val="1000"/>
-              </a:spcAft>
-              <a:defRPr sz="1800">
-                <a:solidFill>
-                  <a:srgbClr val="FFFFFF"/>
-                </a:solidFill>
-                <a:latin typeface="Microsoft JhengHei"/>
-              </a:defRPr>
-            </a:pPr>
-            <a:r>
-              <a:t>`--global` 表示這台電腦上所有的 Git 專案都會預設套用這個身分</a:t>
+              <a:lnSpc>
+                <a:spcPct val="125000"/>
+              </a:lnSpc>
+              <a:spcAft>
+                <a:spcPts val="600"/>
+              </a:spcAft>
+              <a:defRPr>
+                <a:latin typeface="Microsoft JhengHei"/>
+              </a:defRPr>
+            </a:pPr>
+            <a:r>
+              <a:rPr sz="1800" b="1">
+                <a:solidFill>
+                  <a:srgbClr val="F05032"/>
+                </a:solidFill>
+                <a:latin typeface="Consolas"/>
+              </a:rPr>
+              <a:t>--global</a:t>
+            </a:r>
+            <a:r>
+              <a:rPr sz="1800">
+                <a:solidFill>
+                  <a:srgbClr val="1F2328"/>
+                </a:solidFill>
+                <a:latin typeface="Microsoft JhengHei"/>
+              </a:rPr>
+              <a:t> 表示這台電腦上所有的 Git 專案都會預設套用這個身分</a:t>
             </a:r>
           </a:p>
           <a:p>
             <a:pPr lvl="1">
-              <a:spcAft>
-                <a:spcPts val="1000"/>
-              </a:spcAft>
-              <a:defRPr sz="1800">
-                <a:solidFill>
-                  <a:srgbClr val="FFFFFF"/>
-                </a:solidFill>
-                <a:latin typeface="Microsoft JhengHei"/>
-              </a:defRPr>
-            </a:pPr>
-            <a:r>
+              <a:lnSpc>
+                <a:spcPct val="125000"/>
+              </a:lnSpc>
+              <a:spcAft>
+                <a:spcPts val="600"/>
+              </a:spcAft>
+              <a:defRPr>
+                <a:latin typeface="Microsoft JhengHei"/>
+              </a:defRPr>
+            </a:pPr>
+            <a:r>
+              <a:rPr sz="1800">
+                <a:solidFill>
+                  <a:srgbClr val="1F2328"/>
+                </a:solidFill>
+                <a:latin typeface="Microsoft JhengHei"/>
+              </a:rPr>
               <a:t>Email 建議填寫與 GitHub 帳號相同的 Email，以利日後將貢獻正確連結</a:t>
             </a:r>
           </a:p>
           <a:p>
             <a:pPr lvl="1">
-              <a:spcAft>
-                <a:spcPts val="1000"/>
-              </a:spcAft>
-              <a:defRPr sz="1800">
-                <a:solidFill>
-                  <a:srgbClr val="FFFFFF"/>
-                </a:solidFill>
-                <a:latin typeface="Microsoft JhengHei"/>
-              </a:defRPr>
-            </a:pPr>
-            <a:r>
-              <a:t>輸入 `git config --global --list` 可以檢查目前設定</a:t>
+              <a:lnSpc>
+                <a:spcPct val="125000"/>
+              </a:lnSpc>
+              <a:spcAft>
+                <a:spcPts val="600"/>
+              </a:spcAft>
+              <a:defRPr>
+                <a:latin typeface="Microsoft JhengHei"/>
+              </a:defRPr>
+            </a:pPr>
+            <a:r>
+              <a:rPr sz="1800">
+                <a:solidFill>
+                  <a:srgbClr val="1F2328"/>
+                </a:solidFill>
+                <a:latin typeface="Microsoft JhengHei"/>
+              </a:rPr>
+              <a:t>輸入 </a:t>
+            </a:r>
+            <a:r>
+              <a:rPr sz="1800" b="1">
+                <a:solidFill>
+                  <a:srgbClr val="F05032"/>
+                </a:solidFill>
+                <a:latin typeface="Consolas"/>
+              </a:rPr>
+              <a:t>git config --global --list</a:t>
+            </a:r>
+            <a:r>
+              <a:rPr sz="1800">
+                <a:solidFill>
+                  <a:srgbClr val="1F2328"/>
+                </a:solidFill>
+                <a:latin typeface="Microsoft JhengHei"/>
+              </a:rPr>
+              <a:t> 可以檢查目前設定</a:t>
             </a:r>
           </a:p>
         </p:txBody>
@@ -7912,7 +10794,7 @@
               </a:spcAft>
               <a:defRPr sz="4800" b="1">
                 <a:solidFill>
-                  <a:srgbClr val="FFFFFF"/>
+                  <a:srgbClr val="1F2328"/>
                 </a:solidFill>
                 <a:latin typeface="Microsoft JhengHei"/>
               </a:defRPr>
@@ -7925,7 +10807,7 @@
             <a:pPr algn="ctr">
               <a:defRPr sz="2000">
                 <a:solidFill>
-                  <a:srgbClr val="8B949E"/>
+                  <a:srgbClr val="57606A"/>
                 </a:solidFill>
                 <a:latin typeface="Microsoft JhengHei"/>
               </a:defRPr>
@@ -7950,7 +10832,7 @@
     <p:bg>
       <p:bgPr>
         <a:solidFill>
-          <a:srgbClr val="0D1117"/>
+          <a:srgbClr val="F6F8FA"/>
         </a:solidFill>
         <a:effectLst/>
       </p:bgPr>
@@ -7964,14 +10846,59 @@
       <p:grpSpPr/>
       <p:sp>
         <p:nvSpPr>
-          <p:cNvPr id="2" name="TextBox 1"/>
+          <p:cNvPr id="2" name="Rectangle 1"/>
+          <p:cNvSpPr/>
+          <p:nvPr/>
+        </p:nvSpPr>
+        <p:spPr>
+          <a:xfrm>
+            <a:off x="731520" y="384048"/>
+            <a:ext cx="91440" cy="502920"/>
+          </a:xfrm>
+          <a:prstGeom prst="rect">
+            <a:avLst/>
+          </a:prstGeom>
+          <a:solidFill>
+            <a:srgbClr val="0366D6"/>
+          </a:solidFill>
+          <a:ln>
+            <a:solidFill>
+              <a:srgbClr val="0366D6"/>
+            </a:solidFill>
+          </a:ln>
+        </p:spPr>
+        <p:style>
+          <a:lnRef idx="1">
+            <a:schemeClr val="accent1"/>
+          </a:lnRef>
+          <a:fillRef idx="3">
+            <a:schemeClr val="accent1"/>
+          </a:fillRef>
+          <a:effectRef idx="2">
+            <a:schemeClr val="accent1"/>
+          </a:effectRef>
+          <a:fontRef idx="minor">
+            <a:schemeClr val="lt1"/>
+          </a:fontRef>
+        </p:style>
+        <p:txBody>
+          <a:bodyPr rtlCol="0" anchor="ctr"/>
+          <a:lstStyle/>
+          <a:p>
+            <a:pPr algn="ctr"/>
+          </a:p>
+        </p:txBody>
+      </p:sp>
+      <p:sp>
+        <p:nvSpPr>
+          <p:cNvPr id="3" name="TextBox 2"/>
           <p:cNvSpPr txBox="1"/>
           <p:nvPr/>
         </p:nvSpPr>
         <p:spPr>
           <a:xfrm>
-            <a:off x="731520" y="365760"/>
-            <a:ext cx="10725912" cy="731520"/>
+            <a:off x="960120" y="320040"/>
+            <a:ext cx="10497312" cy="731520"/>
           </a:xfrm>
           <a:prstGeom prst="rect">
             <a:avLst/>
@@ -7987,7 +10914,7 @@
             <a:pPr>
               <a:defRPr sz="3600" b="1">
                 <a:solidFill>
-                  <a:srgbClr val="58A6FF"/>
+                  <a:srgbClr val="0366D6"/>
                 </a:solidFill>
                 <a:latin typeface="Microsoft JhengHei"/>
               </a:defRPr>
@@ -8000,7 +10927,7 @@
       </p:sp>
       <p:sp>
         <p:nvSpPr>
-          <p:cNvPr id="3" name="Rectangle 2"/>
+          <p:cNvPr id="4" name="Rectangle 3"/>
           <p:cNvSpPr/>
           <p:nvPr/>
         </p:nvSpPr>
@@ -8013,10 +10940,12 @@
             <a:avLst/>
           </a:prstGeom>
           <a:solidFill>
-            <a:srgbClr val="161B22"/>
+            <a:srgbClr val="FFFFFF"/>
           </a:solidFill>
-          <a:ln>
-            <a:noFill/>
+          <a:ln w="19050">
+            <a:solidFill>
+              <a:srgbClr val="DADEE5"/>
+            </a:solidFill>
           </a:ln>
         </p:spPr>
         <p:style>
@@ -8043,7 +10972,7 @@
       </p:sp>
       <p:sp>
         <p:nvSpPr>
-          <p:cNvPr id="4" name="TextBox 3"/>
+          <p:cNvPr id="5" name="TextBox 4"/>
           <p:cNvSpPr txBox="1"/>
           <p:nvPr/>
         </p:nvSpPr>
@@ -8058,127 +10987,187 @@
           <a:noFill/>
         </p:spPr>
         <p:txBody>
-          <a:bodyPr wrap="square" lIns="0" tIns="0" rIns="0" bIns="0">
+          <a:bodyPr wrap="square" lIns="228600" rIns="228600" tIns="228600" bIns="228600">
             <a:spAutoFit/>
           </a:bodyPr>
           <a:lstStyle/>
           <a:p>
             <a:pPr>
-              <a:spcAft>
-                <a:spcPts val="1000"/>
-              </a:spcAft>
-              <a:defRPr sz="1800">
-                <a:solidFill>
-                  <a:srgbClr val="FFFFFF"/>
-                </a:solidFill>
-                <a:latin typeface="Microsoft JhengHei"/>
-              </a:defRPr>
-            </a:pPr>
-            <a:r>
+              <a:lnSpc>
+                <a:spcPct val="125000"/>
+              </a:lnSpc>
+              <a:spcAft>
+                <a:spcPts val="600"/>
+              </a:spcAft>
+              <a:defRPr>
+                <a:latin typeface="Microsoft JhengHei"/>
+              </a:defRPr>
+            </a:pPr>
+            <a:r>
+              <a:rPr sz="1800">
+                <a:solidFill>
+                  <a:srgbClr val="1F2328"/>
+                </a:solidFill>
+                <a:latin typeface="Microsoft JhengHei"/>
+              </a:rPr>
               <a:t>Git 版本控制的精髓在於這三個區域的切換：</a:t>
             </a:r>
           </a:p>
           <a:p>
             <a:pPr>
-              <a:spcAft>
-                <a:spcPts val="1000"/>
-              </a:spcAft>
-              <a:defRPr sz="1800">
-                <a:solidFill>
-                  <a:srgbClr val="FFFFFF"/>
-                </a:solidFill>
-                <a:latin typeface="Microsoft JhengHei"/>
-              </a:defRPr>
-            </a:pPr>
-            <a:r>
-              <a:t>**1. 工作目錄 (Working Directory)**</a:t>
+              <a:lnSpc>
+                <a:spcPct val="125000"/>
+              </a:lnSpc>
+              <a:spcAft>
+                <a:spcPts val="600"/>
+              </a:spcAft>
+              <a:defRPr>
+                <a:latin typeface="Microsoft JhengHei"/>
+              </a:defRPr>
+            </a:pPr>
+            <a:r>
+              <a:rPr sz="1800" b="1">
+                <a:solidFill>
+                  <a:srgbClr val="1F2328"/>
+                </a:solidFill>
+                <a:latin typeface="Microsoft JhengHei"/>
+              </a:rPr>
+              <a:t>1. 工作目錄 (Working Directory)</a:t>
             </a:r>
           </a:p>
           <a:p>
             <a:pPr lvl="1">
-              <a:spcAft>
-                <a:spcPts val="1000"/>
-              </a:spcAft>
-              <a:defRPr sz="1600">
-                <a:solidFill>
-                  <a:srgbClr val="FFFFFF"/>
-                </a:solidFill>
-                <a:latin typeface="Microsoft JhengHei"/>
-              </a:defRPr>
-            </a:pPr>
-            <a:r>
+              <a:lnSpc>
+                <a:spcPct val="125000"/>
+              </a:lnSpc>
+              <a:spcAft>
+                <a:spcPts val="600"/>
+              </a:spcAft>
+              <a:defRPr>
+                <a:latin typeface="Microsoft JhengHei"/>
+              </a:defRPr>
+            </a:pPr>
+            <a:r>
+              <a:rPr sz="1600">
+                <a:solidFill>
+                  <a:srgbClr val="1F2328"/>
+                </a:solidFill>
+                <a:latin typeface="Microsoft JhengHei"/>
+              </a:rPr>
               <a:t>你在電腦上實際編輯程式碼、新增或刪除檔案的地方</a:t>
             </a:r>
           </a:p>
           <a:p>
             <a:pPr>
-              <a:spcAft>
-                <a:spcPts val="1000"/>
-              </a:spcAft>
-              <a:defRPr sz="1800">
-                <a:solidFill>
-                  <a:srgbClr val="FFFFFF"/>
-                </a:solidFill>
-                <a:latin typeface="Microsoft JhengHei"/>
-              </a:defRPr>
-            </a:pPr>
-            <a:r>
-              <a:t>**2. 暫存區 (Staging Area)**</a:t>
+              <a:lnSpc>
+                <a:spcPct val="125000"/>
+              </a:lnSpc>
+              <a:spcAft>
+                <a:spcPts val="600"/>
+              </a:spcAft>
+              <a:defRPr>
+                <a:latin typeface="Microsoft JhengHei"/>
+              </a:defRPr>
+            </a:pPr>
+            <a:r>
+              <a:rPr sz="1800" b="1">
+                <a:solidFill>
+                  <a:srgbClr val="1F2328"/>
+                </a:solidFill>
+                <a:latin typeface="Microsoft JhengHei"/>
+              </a:rPr>
+              <a:t>2. 暫存區 (Staging Area)</a:t>
             </a:r>
           </a:p>
           <a:p>
             <a:pPr lvl="1">
-              <a:spcAft>
-                <a:spcPts val="1000"/>
-              </a:spcAft>
-              <a:defRPr sz="1600">
-                <a:solidFill>
-                  <a:srgbClr val="FFFFFF"/>
-                </a:solidFill>
-                <a:latin typeface="Microsoft JhengHei"/>
-              </a:defRPr>
-            </a:pPr>
-            <a:r>
+              <a:lnSpc>
+                <a:spcPct val="125000"/>
+              </a:lnSpc>
+              <a:spcAft>
+                <a:spcPts val="600"/>
+              </a:spcAft>
+              <a:defRPr>
+                <a:latin typeface="Microsoft JhengHei"/>
+              </a:defRPr>
+            </a:pPr>
+            <a:r>
+              <a:rPr sz="1600">
+                <a:solidFill>
+                  <a:srgbClr val="1F2328"/>
+                </a:solidFill>
+                <a:latin typeface="Microsoft JhengHei"/>
+              </a:rPr>
               <a:t>準備要結帳的「購物車」。你在這裡挑選哪些檔案要納入下個版本</a:t>
             </a:r>
           </a:p>
           <a:p>
             <a:pPr>
-              <a:spcAft>
-                <a:spcPts val="1000"/>
-              </a:spcAft>
-              <a:defRPr sz="1800">
-                <a:solidFill>
-                  <a:srgbClr val="FFFFFF"/>
-                </a:solidFill>
-                <a:latin typeface="Microsoft JhengHei"/>
-              </a:defRPr>
-            </a:pPr>
-            <a:r>
-              <a:t>**3. 本地儲存庫 (Repository)**</a:t>
+              <a:lnSpc>
+                <a:spcPct val="125000"/>
+              </a:lnSpc>
+              <a:spcAft>
+                <a:spcPts val="600"/>
+              </a:spcAft>
+              <a:defRPr>
+                <a:latin typeface="Microsoft JhengHei"/>
+              </a:defRPr>
+            </a:pPr>
+            <a:r>
+              <a:rPr sz="1800" b="1">
+                <a:solidFill>
+                  <a:srgbClr val="1F2328"/>
+                </a:solidFill>
+                <a:latin typeface="Microsoft JhengHei"/>
+              </a:rPr>
+              <a:t>3. 本地儲存庫 (Repository)</a:t>
             </a:r>
           </a:p>
           <a:p>
             <a:pPr lvl="1">
-              <a:spcAft>
-                <a:spcPts val="1000"/>
-              </a:spcAft>
-              <a:defRPr sz="1600">
-                <a:solidFill>
-                  <a:srgbClr val="FFFFFF"/>
-                </a:solidFill>
-                <a:latin typeface="Microsoft JhengHei"/>
-              </a:defRPr>
-            </a:pPr>
-            <a:r>
-              <a:t>已經完成提交的永久快照歷史，存放在隱藏的 `.git` 資料夾中</a:t>
+              <a:lnSpc>
+                <a:spcPct val="125000"/>
+              </a:lnSpc>
+              <a:spcAft>
+                <a:spcPts val="600"/>
+              </a:spcAft>
+              <a:defRPr>
+                <a:latin typeface="Microsoft JhengHei"/>
+              </a:defRPr>
+            </a:pPr>
+            <a:r>
+              <a:rPr sz="1600">
+                <a:solidFill>
+                  <a:srgbClr val="1F2328"/>
+                </a:solidFill>
+                <a:latin typeface="Microsoft JhengHei"/>
+              </a:rPr>
+              <a:t>已經完成提交的永久快照歷史，存放在隱藏的 </a:t>
+            </a:r>
+            <a:r>
+              <a:rPr sz="1600" b="1">
+                <a:solidFill>
+                  <a:srgbClr val="F05032"/>
+                </a:solidFill>
+                <a:latin typeface="Consolas"/>
+              </a:rPr>
+              <a:t>.git</a:t>
+            </a:r>
+            <a:r>
+              <a:rPr sz="1600">
+                <a:solidFill>
+                  <a:srgbClr val="1F2328"/>
+                </a:solidFill>
+                <a:latin typeface="Microsoft JhengHei"/>
+              </a:rPr>
+              <a:t> 資料夾中</a:t>
             </a:r>
           </a:p>
         </p:txBody>
       </p:sp>
       <p:pic>
         <p:nvPicPr>
-          <p:cNvPr id="5" name="Picture 4" descr="git_areas.png"/>
+          <p:cNvPr id="6" name="Picture 5" descr="git_areas.png"/>
           <p:cNvPicPr>
             <a:picLocks noChangeAspect="1"/>
           </p:cNvPicPr>
@@ -8214,7 +11203,7 @@
     <p:bg>
       <p:bgPr>
         <a:solidFill>
-          <a:srgbClr val="0D1117"/>
+          <a:srgbClr val="F6F8FA"/>
         </a:solidFill>
         <a:effectLst/>
       </p:bgPr>
@@ -8228,14 +11217,59 @@
       <p:grpSpPr/>
       <p:sp>
         <p:nvSpPr>
-          <p:cNvPr id="2" name="TextBox 1"/>
+          <p:cNvPr id="2" name="Rectangle 1"/>
+          <p:cNvSpPr/>
+          <p:nvPr/>
+        </p:nvSpPr>
+        <p:spPr>
+          <a:xfrm>
+            <a:off x="731520" y="384048"/>
+            <a:ext cx="91440" cy="502920"/>
+          </a:xfrm>
+          <a:prstGeom prst="rect">
+            <a:avLst/>
+          </a:prstGeom>
+          <a:solidFill>
+            <a:srgbClr val="0366D6"/>
+          </a:solidFill>
+          <a:ln>
+            <a:solidFill>
+              <a:srgbClr val="0366D6"/>
+            </a:solidFill>
+          </a:ln>
+        </p:spPr>
+        <p:style>
+          <a:lnRef idx="1">
+            <a:schemeClr val="accent1"/>
+          </a:lnRef>
+          <a:fillRef idx="3">
+            <a:schemeClr val="accent1"/>
+          </a:fillRef>
+          <a:effectRef idx="2">
+            <a:schemeClr val="accent1"/>
+          </a:effectRef>
+          <a:fontRef idx="minor">
+            <a:schemeClr val="lt1"/>
+          </a:fontRef>
+        </p:style>
+        <p:txBody>
+          <a:bodyPr rtlCol="0" anchor="ctr"/>
+          <a:lstStyle/>
+          <a:p>
+            <a:pPr algn="ctr"/>
+          </a:p>
+        </p:txBody>
+      </p:sp>
+      <p:sp>
+        <p:nvSpPr>
+          <p:cNvPr id="3" name="TextBox 2"/>
           <p:cNvSpPr txBox="1"/>
           <p:nvPr/>
         </p:nvSpPr>
         <p:spPr>
           <a:xfrm>
-            <a:off x="731520" y="365760"/>
-            <a:ext cx="10725912" cy="731520"/>
+            <a:off x="960120" y="320040"/>
+            <a:ext cx="10497312" cy="731520"/>
           </a:xfrm>
           <a:prstGeom prst="rect">
             <a:avLst/>
@@ -8251,7 +11285,7 @@
             <a:pPr>
               <a:defRPr sz="3600" b="1">
                 <a:solidFill>
-                  <a:srgbClr val="58A6FF"/>
+                  <a:srgbClr val="0366D6"/>
                 </a:solidFill>
                 <a:latin typeface="Microsoft JhengHei"/>
               </a:defRPr>
@@ -8264,7 +11298,7 @@
       </p:sp>
       <p:sp>
         <p:nvSpPr>
-          <p:cNvPr id="3" name="Rectangle 2"/>
+          <p:cNvPr id="4" name="Rectangle 3"/>
           <p:cNvSpPr/>
           <p:nvPr/>
         </p:nvSpPr>
@@ -8277,10 +11311,12 @@
             <a:avLst/>
           </a:prstGeom>
           <a:solidFill>
-            <a:srgbClr val="161B22"/>
+            <a:srgbClr val="FFFFFF"/>
           </a:solidFill>
-          <a:ln>
-            <a:noFill/>
+          <a:ln w="19050">
+            <a:solidFill>
+              <a:srgbClr val="DADEE5"/>
+            </a:solidFill>
           </a:ln>
         </p:spPr>
         <p:style>
@@ -8307,7 +11343,7 @@
       </p:sp>
       <p:sp>
         <p:nvSpPr>
-          <p:cNvPr id="4" name="TextBox 3"/>
+          <p:cNvPr id="5" name="TextBox 4"/>
           <p:cNvSpPr txBox="1"/>
           <p:nvPr/>
         </p:nvSpPr>
@@ -8322,136 +11358,265 @@
           <a:noFill/>
         </p:spPr>
         <p:txBody>
-          <a:bodyPr wrap="square" lIns="0" tIns="0" rIns="0" bIns="0">
+          <a:bodyPr wrap="square" lIns="228600" rIns="228600" tIns="228600" bIns="228600">
             <a:spAutoFit/>
           </a:bodyPr>
           <a:lstStyle/>
           <a:p>
             <a:pPr>
-              <a:spcAft>
-                <a:spcPts val="1000"/>
-              </a:spcAft>
-              <a:defRPr sz="2000">
-                <a:solidFill>
-                  <a:srgbClr val="FFFFFF"/>
-                </a:solidFill>
-                <a:latin typeface="Microsoft JhengHei"/>
-              </a:defRPr>
-            </a:pPr>
-            <a:r>
-              <a:t>**`git init`：初始化專案**</a:t>
+              <a:lnSpc>
+                <a:spcPct val="125000"/>
+              </a:lnSpc>
+              <a:spcAft>
+                <a:spcPts val="600"/>
+              </a:spcAft>
+              <a:defRPr>
+                <a:latin typeface="Microsoft JhengHei"/>
+              </a:defRPr>
+            </a:pPr>
+            <a:r>
+              <a:rPr sz="2000" b="1">
+                <a:solidFill>
+                  <a:srgbClr val="1F2328"/>
+                </a:solidFill>
+                <a:latin typeface="Microsoft JhengHei"/>
+              </a:rPr>
+              <a:t>`git init`：初始化專案</a:t>
             </a:r>
           </a:p>
           <a:p>
             <a:pPr lvl="1">
-              <a:spcAft>
-                <a:spcPts val="1000"/>
-              </a:spcAft>
-              <a:defRPr sz="1800">
-                <a:solidFill>
-                  <a:srgbClr val="FFFFFF"/>
-                </a:solidFill>
-                <a:latin typeface="Microsoft JhengHei"/>
-              </a:defRPr>
-            </a:pPr>
-            <a:r>
-              <a:t>在你要版控的資料夾下輸入 `git init`，會自動建立 `.git` 資料夾</a:t>
+              <a:lnSpc>
+                <a:spcPct val="125000"/>
+              </a:lnSpc>
+              <a:spcAft>
+                <a:spcPts val="600"/>
+              </a:spcAft>
+              <a:defRPr>
+                <a:latin typeface="Microsoft JhengHei"/>
+              </a:defRPr>
+            </a:pPr>
+            <a:r>
+              <a:rPr sz="1800">
+                <a:solidFill>
+                  <a:srgbClr val="1F2328"/>
+                </a:solidFill>
+                <a:latin typeface="Microsoft JhengHei"/>
+              </a:rPr>
+              <a:t>在你要版控的資料夾下輸入 </a:t>
+            </a:r>
+            <a:r>
+              <a:rPr sz="1800" b="1">
+                <a:solidFill>
+                  <a:srgbClr val="F05032"/>
+                </a:solidFill>
+                <a:latin typeface="Consolas"/>
+              </a:rPr>
+              <a:t>git init</a:t>
+            </a:r>
+            <a:r>
+              <a:rPr sz="1800">
+                <a:solidFill>
+                  <a:srgbClr val="1F2328"/>
+                </a:solidFill>
+                <a:latin typeface="Microsoft JhengHei"/>
+              </a:rPr>
+              <a:t>，會自動建立 </a:t>
+            </a:r>
+            <a:r>
+              <a:rPr sz="1800" b="1">
+                <a:solidFill>
+                  <a:srgbClr val="F05032"/>
+                </a:solidFill>
+                <a:latin typeface="Consolas"/>
+              </a:rPr>
+              <a:t>.git</a:t>
+            </a:r>
+            <a:r>
+              <a:rPr sz="1800">
+                <a:solidFill>
+                  <a:srgbClr val="1F2328"/>
+                </a:solidFill>
+                <a:latin typeface="Microsoft JhengHei"/>
+              </a:rPr>
+              <a:t> 資料夾</a:t>
             </a:r>
           </a:p>
           <a:p>
             <a:pPr lvl="1">
-              <a:spcAft>
-                <a:spcPts val="1000"/>
-              </a:spcAft>
-              <a:defRPr sz="1800">
-                <a:solidFill>
-                  <a:srgbClr val="FFFFFF"/>
-                </a:solidFill>
-                <a:latin typeface="Microsoft JhengHei"/>
-              </a:defRPr>
-            </a:pPr>
-            <a:r>
-              <a:t>*提醒*：一個專案只需初始化一次，不要手動修改隱藏的 `.git` 資料夾</a:t>
+              <a:lnSpc>
+                <a:spcPct val="125000"/>
+              </a:lnSpc>
+              <a:spcAft>
+                <a:spcPts val="600"/>
+              </a:spcAft>
+              <a:defRPr>
+                <a:latin typeface="Microsoft JhengHei"/>
+              </a:defRPr>
+            </a:pPr>
+            <a:r>
+              <a:rPr sz="1800">
+                <a:solidFill>
+                  <a:srgbClr val="1F2328"/>
+                </a:solidFill>
+                <a:latin typeface="Microsoft JhengHei"/>
+              </a:rPr>
+              <a:t>*提醒*：一個專案只需初始化一次，不要手動修改隱藏的 </a:t>
+            </a:r>
+            <a:r>
+              <a:rPr sz="1800" b="1">
+                <a:solidFill>
+                  <a:srgbClr val="F05032"/>
+                </a:solidFill>
+                <a:latin typeface="Consolas"/>
+              </a:rPr>
+              <a:t>.git</a:t>
+            </a:r>
+            <a:r>
+              <a:rPr sz="1800">
+                <a:solidFill>
+                  <a:srgbClr val="1F2328"/>
+                </a:solidFill>
+                <a:latin typeface="Microsoft JhengHei"/>
+              </a:rPr>
+              <a:t> 資料夾</a:t>
             </a:r>
           </a:p>
           <a:p>
             <a:pPr>
-              <a:spcAft>
-                <a:spcPts val="1000"/>
-              </a:spcAft>
-              <a:defRPr sz="2000">
-                <a:solidFill>
-                  <a:srgbClr val="FFFFFF"/>
-                </a:solidFill>
-                <a:latin typeface="Microsoft JhengHei"/>
-              </a:defRPr>
-            </a:pPr>
-            <a:r>
-              <a:t>**`git status`：檢查狀態**</a:t>
+              <a:lnSpc>
+                <a:spcPct val="125000"/>
+              </a:lnSpc>
+              <a:spcAft>
+                <a:spcPts val="600"/>
+              </a:spcAft>
+              <a:defRPr>
+                <a:latin typeface="Microsoft JhengHei"/>
+              </a:defRPr>
+            </a:pPr>
+            <a:r>
+              <a:rPr sz="2000" b="1">
+                <a:solidFill>
+                  <a:srgbClr val="1F2328"/>
+                </a:solidFill>
+                <a:latin typeface="Microsoft JhengHei"/>
+              </a:rPr>
+              <a:t>`git status`：檢查狀態</a:t>
             </a:r>
           </a:p>
           <a:p>
             <a:pPr lvl="1">
-              <a:spcAft>
-                <a:spcPts val="1000"/>
-              </a:spcAft>
-              <a:defRPr sz="1800">
-                <a:solidFill>
-                  <a:srgbClr val="FFFFFF"/>
-                </a:solidFill>
-                <a:latin typeface="Microsoft JhengHei"/>
-              </a:defRPr>
-            </a:pPr>
-            <a:r>
+              <a:lnSpc>
+                <a:spcPct val="125000"/>
+              </a:lnSpc>
+              <a:spcAft>
+                <a:spcPts val="600"/>
+              </a:spcAft>
+              <a:defRPr>
+                <a:latin typeface="Microsoft JhengHei"/>
+              </a:defRPr>
+            </a:pPr>
+            <a:r>
+              <a:rPr sz="1800">
+                <a:solidFill>
+                  <a:srgbClr val="1F2328"/>
+                </a:solidFill>
+                <a:latin typeface="Microsoft JhengHei"/>
+              </a:rPr>
               <a:t>告訴你目前工作目錄與暫存區的檔案狀況：</a:t>
             </a:r>
           </a:p>
           <a:p>
             <a:pPr lvl="2">
-              <a:spcAft>
-                <a:spcPts val="1000"/>
-              </a:spcAft>
-              <a:defRPr sz="1600">
-                <a:solidFill>
-                  <a:srgbClr val="FFFFFF"/>
-                </a:solidFill>
-                <a:latin typeface="Microsoft JhengHei"/>
-              </a:defRPr>
-            </a:pPr>
-            <a:r>
-              <a:t>**Untracked (未追蹤)**: Git 還不認識的新檔案</a:t>
+              <a:lnSpc>
+                <a:spcPct val="125000"/>
+              </a:lnSpc>
+              <a:spcAft>
+                <a:spcPts val="600"/>
+              </a:spcAft>
+              <a:defRPr>
+                <a:latin typeface="Microsoft JhengHei"/>
+              </a:defRPr>
+            </a:pPr>
+            <a:r>
+              <a:rPr sz="1600" b="1">
+                <a:solidFill>
+                  <a:srgbClr val="1F2328"/>
+                </a:solidFill>
+                <a:latin typeface="Microsoft JhengHei"/>
+              </a:rPr>
+              <a:t>Untracked (未追蹤)</a:t>
+            </a:r>
+            <a:r>
+              <a:rPr sz="1600">
+                <a:solidFill>
+                  <a:srgbClr val="1F2328"/>
+                </a:solidFill>
+                <a:latin typeface="Microsoft JhengHei"/>
+              </a:rPr>
+              <a:t>: Git 還不認識的新檔案</a:t>
             </a:r>
           </a:p>
           <a:p>
             <a:pPr lvl="2">
-              <a:spcAft>
-                <a:spcPts val="1000"/>
-              </a:spcAft>
-              <a:defRPr sz="1600">
-                <a:solidFill>
-                  <a:srgbClr val="FFFFFF"/>
-                </a:solidFill>
-                <a:latin typeface="Microsoft JhengHei"/>
-              </a:defRPr>
-            </a:pPr>
-            <a:r>
-              <a:t>**Modified (已修改)**: 檔案被改動但尚未加入暫存區</a:t>
+              <a:lnSpc>
+                <a:spcPct val="125000"/>
+              </a:lnSpc>
+              <a:spcAft>
+                <a:spcPts val="600"/>
+              </a:spcAft>
+              <a:defRPr>
+                <a:latin typeface="Microsoft JhengHei"/>
+              </a:defRPr>
+            </a:pPr>
+            <a:r>
+              <a:rPr sz="1600" b="1">
+                <a:solidFill>
+                  <a:srgbClr val="1F2328"/>
+                </a:solidFill>
+                <a:latin typeface="Microsoft JhengHei"/>
+              </a:rPr>
+              <a:t>Modified (已修改)</a:t>
+            </a:r>
+            <a:r>
+              <a:rPr sz="1600">
+                <a:solidFill>
+                  <a:srgbClr val="1F2328"/>
+                </a:solidFill>
+                <a:latin typeface="Microsoft JhengHei"/>
+              </a:rPr>
+              <a:t>: 檔案被改動但尚未加入暫存區</a:t>
             </a:r>
           </a:p>
           <a:p>
             <a:pPr lvl="2">
-              <a:spcAft>
-                <a:spcPts val="1000"/>
-              </a:spcAft>
-              <a:defRPr sz="1600">
-                <a:solidFill>
-                  <a:srgbClr val="FFFFFF"/>
-                </a:solidFill>
-                <a:latin typeface="Microsoft JhengHei"/>
-              </a:defRPr>
-            </a:pPr>
-            <a:r>
-              <a:t>**Staged (已暫存)**: 已加入暫存區，準備好提交的檔案</a:t>
+              <a:lnSpc>
+                <a:spcPct val="125000"/>
+              </a:lnSpc>
+              <a:spcAft>
+                <a:spcPts val="600"/>
+              </a:spcAft>
+              <a:defRPr>
+                <a:latin typeface="Microsoft JhengHei"/>
+              </a:defRPr>
+            </a:pPr>
+            <a:r>
+              <a:rPr sz="1600" b="1">
+                <a:solidFill>
+                  <a:srgbClr val="1F2328"/>
+                </a:solidFill>
+                <a:latin typeface="Microsoft JhengHei"/>
+              </a:rPr>
+              <a:t>Staged (已暫存)</a:t>
+            </a:r>
+            <a:r>
+              <a:rPr sz="1600">
+                <a:solidFill>
+                  <a:srgbClr val="1F2328"/>
+                </a:solidFill>
+                <a:latin typeface="Microsoft JhengHei"/>
+              </a:rPr>
+              <a:t>: 已加入暫存區，準備好提交的檔案</a:t>
             </a:r>
           </a:p>
         </p:txBody>
@@ -8470,7 +11635,7 @@
     <p:bg>
       <p:bgPr>
         <a:solidFill>
-          <a:srgbClr val="0D1117"/>
+          <a:srgbClr val="F6F8FA"/>
         </a:solidFill>
         <a:effectLst/>
       </p:bgPr>
@@ -8484,14 +11649,59 @@
       <p:grpSpPr/>
       <p:sp>
         <p:nvSpPr>
-          <p:cNvPr id="2" name="TextBox 1"/>
+          <p:cNvPr id="2" name="Rectangle 1"/>
+          <p:cNvSpPr/>
+          <p:nvPr/>
+        </p:nvSpPr>
+        <p:spPr>
+          <a:xfrm>
+            <a:off x="731520" y="384048"/>
+            <a:ext cx="91440" cy="502920"/>
+          </a:xfrm>
+          <a:prstGeom prst="rect">
+            <a:avLst/>
+          </a:prstGeom>
+          <a:solidFill>
+            <a:srgbClr val="0366D6"/>
+          </a:solidFill>
+          <a:ln>
+            <a:solidFill>
+              <a:srgbClr val="0366D6"/>
+            </a:solidFill>
+          </a:ln>
+        </p:spPr>
+        <p:style>
+          <a:lnRef idx="1">
+            <a:schemeClr val="accent1"/>
+          </a:lnRef>
+          <a:fillRef idx="3">
+            <a:schemeClr val="accent1"/>
+          </a:fillRef>
+          <a:effectRef idx="2">
+            <a:schemeClr val="accent1"/>
+          </a:effectRef>
+          <a:fontRef idx="minor">
+            <a:schemeClr val="lt1"/>
+          </a:fontRef>
+        </p:style>
+        <p:txBody>
+          <a:bodyPr rtlCol="0" anchor="ctr"/>
+          <a:lstStyle/>
+          <a:p>
+            <a:pPr algn="ctr"/>
+          </a:p>
+        </p:txBody>
+      </p:sp>
+      <p:sp>
+        <p:nvSpPr>
+          <p:cNvPr id="3" name="TextBox 2"/>
           <p:cNvSpPr txBox="1"/>
           <p:nvPr/>
         </p:nvSpPr>
         <p:spPr>
           <a:xfrm>
-            <a:off x="731520" y="365760"/>
-            <a:ext cx="10725912" cy="731520"/>
+            <a:off x="960120" y="320040"/>
+            <a:ext cx="10497312" cy="731520"/>
           </a:xfrm>
           <a:prstGeom prst="rect">
             <a:avLst/>
@@ -8507,7 +11717,7 @@
             <a:pPr>
               <a:defRPr sz="3600" b="1">
                 <a:solidFill>
-                  <a:srgbClr val="58A6FF"/>
+                  <a:srgbClr val="0366D6"/>
                 </a:solidFill>
                 <a:latin typeface="Microsoft JhengHei"/>
               </a:defRPr>
@@ -8520,7 +11730,7 @@
       </p:sp>
       <p:sp>
         <p:nvSpPr>
-          <p:cNvPr id="3" name="Rectangle 2"/>
+          <p:cNvPr id="4" name="Rectangle 3"/>
           <p:cNvSpPr/>
           <p:nvPr/>
         </p:nvSpPr>
@@ -8533,10 +11743,12 @@
             <a:avLst/>
           </a:prstGeom>
           <a:solidFill>
-            <a:srgbClr val="161B22"/>
+            <a:srgbClr val="FFFFFF"/>
           </a:solidFill>
-          <a:ln>
-            <a:noFill/>
+          <a:ln w="19050">
+            <a:solidFill>
+              <a:srgbClr val="DADEE5"/>
+            </a:solidFill>
           </a:ln>
         </p:spPr>
         <p:style>
@@ -8563,7 +11775,7 @@
       </p:sp>
       <p:sp>
         <p:nvSpPr>
-          <p:cNvPr id="4" name="TextBox 3"/>
+          <p:cNvPr id="5" name="TextBox 4"/>
           <p:cNvSpPr txBox="1"/>
           <p:nvPr/>
         </p:nvSpPr>
@@ -8578,136 +11790,229 @@
           <a:noFill/>
         </p:spPr>
         <p:txBody>
-          <a:bodyPr wrap="square" lIns="0" tIns="0" rIns="0" bIns="0">
+          <a:bodyPr wrap="square" lIns="228600" rIns="228600" tIns="228600" bIns="228600">
             <a:spAutoFit/>
           </a:bodyPr>
           <a:lstStyle/>
           <a:p>
             <a:pPr>
-              <a:spcAft>
-                <a:spcPts val="1000"/>
-              </a:spcAft>
-              <a:defRPr sz="2000">
-                <a:solidFill>
-                  <a:srgbClr val="FFFFFF"/>
-                </a:solidFill>
-                <a:latin typeface="Microsoft JhengHei"/>
-              </a:defRPr>
-            </a:pPr>
-            <a:r>
+              <a:lnSpc>
+                <a:spcPct val="125000"/>
+              </a:lnSpc>
+              <a:spcAft>
+                <a:spcPts val="600"/>
+              </a:spcAft>
+              <a:defRPr>
+                <a:latin typeface="Microsoft JhengHei"/>
+              </a:defRPr>
+            </a:pPr>
+            <a:r>
+              <a:rPr sz="2000">
+                <a:solidFill>
+                  <a:srgbClr val="1F2328"/>
+                </a:solidFill>
+                <a:latin typeface="Microsoft JhengHei"/>
+              </a:rPr>
               <a:t>這是 Git 日常最核心的「兩段式提交」操作：</a:t>
             </a:r>
           </a:p>
           <a:p>
             <a:pPr>
-              <a:spcAft>
-                <a:spcPts val="1000"/>
-              </a:spcAft>
-              <a:defRPr sz="2000">
-                <a:solidFill>
-                  <a:srgbClr val="FFFFFF"/>
-                </a:solidFill>
-                <a:latin typeface="Microsoft JhengHei"/>
-              </a:defRPr>
-            </a:pPr>
-            <a:r>
-              <a:t>**步驟一：放入暫存區 (Staging)**</a:t>
+              <a:lnSpc>
+                <a:spcPct val="125000"/>
+              </a:lnSpc>
+              <a:spcAft>
+                <a:spcPts val="600"/>
+              </a:spcAft>
+              <a:defRPr>
+                <a:latin typeface="Microsoft JhengHei"/>
+              </a:defRPr>
+            </a:pPr>
+            <a:r>
+              <a:rPr sz="2000" b="1">
+                <a:solidFill>
+                  <a:srgbClr val="1F2328"/>
+                </a:solidFill>
+                <a:latin typeface="Microsoft JhengHei"/>
+              </a:rPr>
+              <a:t>步驟一：放入暫存區 (Staging)</a:t>
             </a:r>
           </a:p>
           <a:p>
             <a:pPr lvl="1">
-              <a:spcAft>
-                <a:spcPts val="1000"/>
-              </a:spcAft>
-              <a:defRPr sz="1800">
-                <a:solidFill>
-                  <a:srgbClr val="FFFFFF"/>
-                </a:solidFill>
-                <a:latin typeface="Microsoft JhengHei"/>
-              </a:defRPr>
-            </a:pPr>
-            <a:r>
-              <a:t>`git add hello.txt`: 將指定檔案的修改放入購物車</a:t>
+              <a:lnSpc>
+                <a:spcPct val="125000"/>
+              </a:lnSpc>
+              <a:spcAft>
+                <a:spcPts val="600"/>
+              </a:spcAft>
+              <a:defRPr>
+                <a:latin typeface="Microsoft JhengHei"/>
+              </a:defRPr>
+            </a:pPr>
+            <a:r>
+              <a:rPr sz="1800" b="1">
+                <a:solidFill>
+                  <a:srgbClr val="F05032"/>
+                </a:solidFill>
+                <a:latin typeface="Consolas"/>
+              </a:rPr>
+              <a:t>git add hello.txt</a:t>
+            </a:r>
+            <a:r>
+              <a:rPr sz="1800">
+                <a:solidFill>
+                  <a:srgbClr val="1F2328"/>
+                </a:solidFill>
+                <a:latin typeface="Microsoft JhengHei"/>
+              </a:rPr>
+              <a:t>: 將指定檔案的修改放入購物車</a:t>
             </a:r>
           </a:p>
           <a:p>
             <a:pPr lvl="1">
-              <a:spcAft>
-                <a:spcPts val="1000"/>
-              </a:spcAft>
-              <a:defRPr sz="1800">
-                <a:solidFill>
-                  <a:srgbClr val="FFFFFF"/>
-                </a:solidFill>
-                <a:latin typeface="Microsoft JhengHei"/>
-              </a:defRPr>
-            </a:pPr>
-            <a:r>
-              <a:t>`git add .` (或 `git add -A`): 將目前所有修改一次塞入購物車</a:t>
+              <a:lnSpc>
+                <a:spcPct val="125000"/>
+              </a:lnSpc>
+              <a:spcAft>
+                <a:spcPts val="600"/>
+              </a:spcAft>
+              <a:defRPr>
+                <a:latin typeface="Microsoft JhengHei"/>
+              </a:defRPr>
+            </a:pPr>
+            <a:r>
+              <a:rPr sz="1800" b="1">
+                <a:solidFill>
+                  <a:srgbClr val="F05032"/>
+                </a:solidFill>
+                <a:latin typeface="Consolas"/>
+              </a:rPr>
+              <a:t>git add .</a:t>
+            </a:r>
+            <a:r>
+              <a:rPr sz="1800">
+                <a:solidFill>
+                  <a:srgbClr val="1F2328"/>
+                </a:solidFill>
+                <a:latin typeface="Microsoft JhengHei"/>
+              </a:rPr>
+              <a:t> (或 </a:t>
+            </a:r>
+            <a:r>
+              <a:rPr sz="1800" b="1">
+                <a:solidFill>
+                  <a:srgbClr val="F05032"/>
+                </a:solidFill>
+                <a:latin typeface="Consolas"/>
+              </a:rPr>
+              <a:t>git add -A</a:t>
+            </a:r>
+            <a:r>
+              <a:rPr sz="1800">
+                <a:solidFill>
+                  <a:srgbClr val="1F2328"/>
+                </a:solidFill>
+                <a:latin typeface="Microsoft JhengHei"/>
+              </a:rPr>
+              <a:t>): 將目前所有修改一次塞入購物車</a:t>
             </a:r>
           </a:p>
           <a:p>
             <a:pPr>
-              <a:spcAft>
-                <a:spcPts val="1000"/>
-              </a:spcAft>
-              <a:defRPr sz="2000">
-                <a:solidFill>
-                  <a:srgbClr val="FFFFFF"/>
-                </a:solidFill>
-                <a:latin typeface="Microsoft JhengHei"/>
-              </a:defRPr>
-            </a:pPr>
-            <a:r>
-              <a:t>**步驟二：提交保存 (Commit)**</a:t>
+              <a:lnSpc>
+                <a:spcPct val="125000"/>
+              </a:lnSpc>
+              <a:spcAft>
+                <a:spcPts val="600"/>
+              </a:spcAft>
+              <a:defRPr>
+                <a:latin typeface="Microsoft JhengHei"/>
+              </a:defRPr>
+            </a:pPr>
+            <a:r>
+              <a:rPr sz="2000" b="1">
+                <a:solidFill>
+                  <a:srgbClr val="1F2328"/>
+                </a:solidFill>
+                <a:latin typeface="Microsoft JhengHei"/>
+              </a:rPr>
+              <a:t>步驟二：提交保存 (Commit)</a:t>
             </a:r>
           </a:p>
           <a:p>
             <a:pPr lvl="1">
-              <a:spcAft>
-                <a:spcPts val="1000"/>
-              </a:spcAft>
-              <a:defRPr sz="1800">
-                <a:solidFill>
-                  <a:srgbClr val="FFFFFF"/>
-                </a:solidFill>
-                <a:latin typeface="Microsoft JhengHei"/>
-              </a:defRPr>
-            </a:pPr>
-            <a:r>
-              <a:t>`git commit -m "新增首頁功能"`</a:t>
+              <a:lnSpc>
+                <a:spcPct val="125000"/>
+              </a:lnSpc>
+              <a:spcAft>
+                <a:spcPts val="600"/>
+              </a:spcAft>
+              <a:defRPr>
+                <a:latin typeface="Microsoft JhengHei"/>
+              </a:defRPr>
+            </a:pPr>
+            <a:r>
+              <a:rPr sz="1800" b="1">
+                <a:solidFill>
+                  <a:srgbClr val="F05032"/>
+                </a:solidFill>
+                <a:latin typeface="Consolas"/>
+              </a:rPr>
+              <a:t>git commit -m "新增首頁功能"</a:t>
             </a:r>
           </a:p>
           <a:p>
             <a:pPr lvl="1">
-              <a:spcAft>
-                <a:spcPts val="1000"/>
-              </a:spcAft>
-              <a:defRPr sz="1800">
-                <a:solidFill>
-                  <a:srgbClr val="FFFFFF"/>
-                </a:solidFill>
-                <a:latin typeface="Microsoft JhengHei"/>
-              </a:defRPr>
-            </a:pPr>
-            <a:r>
+              <a:lnSpc>
+                <a:spcPct val="125000"/>
+              </a:lnSpc>
+              <a:spcAft>
+                <a:spcPts val="600"/>
+              </a:spcAft>
+              <a:defRPr>
+                <a:latin typeface="Microsoft JhengHei"/>
+              </a:defRPr>
+            </a:pPr>
+            <a:r>
+              <a:rPr sz="1800">
+                <a:solidFill>
+                  <a:srgbClr val="1F2328"/>
+                </a:solidFill>
+                <a:latin typeface="Microsoft JhengHei"/>
+              </a:rPr>
               <a:t>這會將暫存區的檔案打包成一個永久的版本快照</a:t>
             </a:r>
           </a:p>
           <a:p>
             <a:pPr lvl="1">
-              <a:spcAft>
-                <a:spcPts val="1000"/>
-              </a:spcAft>
-              <a:defRPr sz="1800">
-                <a:solidFill>
-                  <a:srgbClr val="FFFFFF"/>
-                </a:solidFill>
-                <a:latin typeface="Microsoft JhengHei"/>
-              </a:defRPr>
-            </a:pPr>
-            <a:r>
-              <a:t>`-m` 後面是提交訊息，必須簡述這版「做了什麼修改」</a:t>
+              <a:lnSpc>
+                <a:spcPct val="125000"/>
+              </a:lnSpc>
+              <a:spcAft>
+                <a:spcPts val="600"/>
+              </a:spcAft>
+              <a:defRPr>
+                <a:latin typeface="Microsoft JhengHei"/>
+              </a:defRPr>
+            </a:pPr>
+            <a:r>
+              <a:rPr sz="1800" b="1">
+                <a:solidFill>
+                  <a:srgbClr val="F05032"/>
+                </a:solidFill>
+                <a:latin typeface="Consolas"/>
+              </a:rPr>
+              <a:t>-m</a:t>
+            </a:r>
+            <a:r>
+              <a:rPr sz="1800">
+                <a:solidFill>
+                  <a:srgbClr val="1F2328"/>
+                </a:solidFill>
+                <a:latin typeface="Microsoft JhengHei"/>
+              </a:rPr>
+              <a:t> 後面是提交訊息，必須簡述這版「做了什麼修改」</a:t>
             </a:r>
           </a:p>
         </p:txBody>
